--- a/docs/Презентация_Сглаживание_изображений.pptx
+++ b/docs/Презентация_Сглаживание_изображений.pptx
@@ -16,9 +16,6 @@
     <p:sldId id="264" r:id="rId16"/>
     <p:sldId id="265" r:id="rId17"/>
     <p:sldId id="266" r:id="rId18"/>
-    <p:sldId id="267" r:id="rId19"/>
-    <p:sldId id="268" r:id="rId20"/>
-    <p:sldId id="269" r:id="rId21"/>
   </p:sldIdLst>
   <p:sldSz cx="12191695" cy="6858000" type="screen4x3"/>
   <p:notesSz cx="6858000" cy="9144000"/>
@@ -515,7 +512,7 @@
           <a:lstStyle/>
           <a:p>
             <a:r>
-              <a:t>Здравствуйте! Тема моего проекта — разработка и исследование метода сглаживания изображений. Я не просто реализовал известные фильтры, а предложил собственный метод — адаптивный контрастно-структурный фильтр, реализовал его на языке Rust и экспериментально сравнил с классическими алгоритмами. Расскажу по порядку: сначала проблема, затем мой метод, затем результаты эксперимента.</a:t>
+              <a:t>Здравствуйте. Я покажу учебный проект по шумоподавлению изображений — адаптивный контрастно-структурный фильтр, или АКСФ. Это не заявление о новом мировом классе алгоритмов, а прозрачное развитие билатеральной фильтрации. Важная часть работы — не только метод, но и честный воспроизводимый эксперимент: шесть сцен, шесть уровней шума, цветной режим и отдельная статистическая проверка.</a:t>
             </a:r>
           </a:p>
         </p:txBody>
@@ -585,7 +582,7 @@
           <a:lstStyle/>
           <a:p>
             <a:r>
-              <a:t>Переходим к результатам — это главный слайд. В таблице средние значения по всем изображениям и уровням шума. Гауссов фильтр даёт 23 децибела, медианный — 22, билатеральный с универсальной настройкой — 24,15. Наш метод АКСФ — 26,14 децибела: это на 3 децибела лучше лучшего классического метода и на 2 лучше билатерального. И самое главное сравнение — с «оракулом»: у него 26,40, то есть мы отстаём всего на четверть децибела, хотя оракул подбирает параметры под каждую задачу вручную, а наш метод всегда работает с одними и теми же настройками. По структурному сходству SSIM картина та же: 0,72 против 0,58 у билатерального и 0,52 у гауссова. На графике справа видно, что красная кривая нашего метода почти совпадает с пунктирной кривой оракула на всём диапазоне шума. Единственная плата — время: 179 миллисекунд против 16 у гауссова фильтра.</a:t>
+              <a:t>Цветная часть реализована отдельно. Сначала RGB переводится в YCbCr. Оценка шума и карта активности строятся по яркости Y, что соответствует визуальной роли контура. Но затем Y, Cb и Cr фильтруются совместным весом, поэтому это не три независимые серые обработки. На трёх цветных сценах АКСФ также выигрывает у реализованного bilateral по всем сводным метрикам.</a:t>
             </a:r>
           </a:p>
         </p:txBody>
@@ -655,217 +652,7 @@
           <a:lstStyle/>
           <a:p>
             <a:r>
-              <a:t>Помимо цифр, посмотрим глазами. Это фрагмент изображения бабуина с шумом 25. Второй кадр — зашумлённое изображение: зерно разрушает текстуру меха. Третий — гауссов фильтр: шум ушёл, но мех превратился в однородное пятно, а это потеря реальных деталей. Четвёртый — билатеральный: структура лучше, но в шерсти остаётся шум. Пятый — наш метод: шум в гладких зонах подавлен, а текстура шерсти и контур глаза сохранены. Именно это и обещает карта активности — адаптация к локальной структуре.</a:t>
-            </a:r>
-          </a:p>
-        </p:txBody>
-      </p:sp>
-      <p:sp>
-        <p:nvSpPr>
-          <p:cNvPr id="4" name="Slide Number Placeholder 3"/>
-          <p:cNvSpPr>
-            <a:spLocks noGrp="1"/>
-          </p:cNvSpPr>
-          <p:nvPr>
-            <p:ph type="sldNum" idx="5" sz="quarter"/>
-          </p:nvPr>
-        </p:nvSpPr>
-        <p:spPr/>
-      </p:sp>
-    </p:spTree>
-  </p:cSld>
-  <p:clrMapOvr>
-    <a:masterClrMapping/>
-  </p:clrMapOvr>
-</p:notes>
-</file>
-
-<file path=ppt/notesSlides/notesSlide12.xml><?xml version="1.0" encoding="utf-8"?>
-<p:notes xmlns:a="http://schemas.openxmlformats.org/drawingml/2006/main" xmlns:p="http://schemas.openxmlformats.org/presentationml/2006/main" xmlns:r="http://schemas.openxmlformats.org/officeDocument/2006/relationships">
-  <p:cSld>
-    <p:spTree>
-      <p:nvGrpSpPr>
-        <p:cNvPr id="1" name=""/>
-        <p:cNvGrpSpPr/>
-        <p:nvPr/>
-      </p:nvGrpSpPr>
-      <p:grpSpPr>
-        <a:xfrm>
-          <a:off x="0" y="0"/>
-          <a:ext cx="0" cy="0"/>
-          <a:chOff x="0" y="0"/>
-          <a:chExt cx="0" cy="0"/>
-        </a:xfrm>
-      </p:grpSpPr>
-      <p:sp>
-        <p:nvSpPr>
-          <p:cNvPr id="2" name="Slide Image Placeholder 1"/>
-          <p:cNvSpPr>
-            <a:spLocks noGrp="1"/>
-          </p:cNvSpPr>
-          <p:nvPr>
-            <p:ph type="sldImg" idx="2"/>
-          </p:nvPr>
-        </p:nvSpPr>
-        <p:spPr/>
-      </p:sp>
-      <p:sp>
-        <p:nvSpPr>
-          <p:cNvPr id="3" name="Notes Placeholder 2"/>
-          <p:cNvSpPr>
-            <a:spLocks noGrp="1"/>
-          </p:cNvSpPr>
-          <p:nvPr>
-            <p:ph type="body" idx="3" sz="quarter"/>
-          </p:nvPr>
-        </p:nvSpPr>
-        <p:spPr/>
-        <p:txBody>
-          <a:bodyPr/>
-          <a:lstStyle/>
-          <a:p>
-            <a:r>
-              <a:t>Отдельно о надёжности — это вопросы, которые обычно задают на защите. Первое: не переобучены ли параметры под конкретный шум? Параметры выбирались на уровнях 20 и 30, а проверил я их на уровнях 10 и 40, которые в калибровке не участвовали: конфигурация осталась лучшей. Второе: оценка шума по Иммеркеру на текстурированных изображениях завышается — например, для бабуина она даёт 14,5 при реальном шуме 10. Но метод к этому почти нечувствителен: если подставить точное значение шума, результат улучшится всего на 0,09 децибела. Третье: я проверил, что выигрыш даёт именно адаптация, а не случайно удачное среднее значение параметра: контрольный вариант с постоянным сигма_r проигрывает половину децибела. И честно про ограничения: метод в разы медленнее простых фильтров и не рассчитан на импульсный шум — там лучше работает медианный фильтр.</a:t>
-            </a:r>
-          </a:p>
-        </p:txBody>
-      </p:sp>
-      <p:sp>
-        <p:nvSpPr>
-          <p:cNvPr id="4" name="Slide Number Placeholder 3"/>
-          <p:cNvSpPr>
-            <a:spLocks noGrp="1"/>
-          </p:cNvSpPr>
-          <p:nvPr>
-            <p:ph type="sldNum" idx="5" sz="quarter"/>
-          </p:nvPr>
-        </p:nvSpPr>
-        <p:spPr/>
-      </p:sp>
-    </p:spTree>
-  </p:cSld>
-  <p:clrMapOvr>
-    <a:masterClrMapping/>
-  </p:clrMapOvr>
-</p:notes>
-</file>
-
-<file path=ppt/notesSlides/notesSlide13.xml><?xml version="1.0" encoding="utf-8"?>
-<p:notes xmlns:a="http://schemas.openxmlformats.org/drawingml/2006/main" xmlns:p="http://schemas.openxmlformats.org/presentationml/2006/main" xmlns:r="http://schemas.openxmlformats.org/officeDocument/2006/relationships">
-  <p:cSld>
-    <p:spTree>
-      <p:nvGrpSpPr>
-        <p:cNvPr id="1" name=""/>
-        <p:cNvGrpSpPr/>
-        <p:nvPr/>
-      </p:nvGrpSpPr>
-      <p:grpSpPr>
-        <a:xfrm>
-          <a:off x="0" y="0"/>
-          <a:ext cx="0" cy="0"/>
-          <a:chOff x="0" y="0"/>
-          <a:chExt cx="0" cy="0"/>
-        </a:xfrm>
-      </p:grpSpPr>
-      <p:sp>
-        <p:nvSpPr>
-          <p:cNvPr id="2" name="Slide Image Placeholder 1"/>
-          <p:cNvSpPr>
-            <a:spLocks noGrp="1"/>
-          </p:cNvSpPr>
-          <p:nvPr>
-            <p:ph type="sldImg" idx="2"/>
-          </p:nvPr>
-        </p:nvSpPr>
-        <p:spPr/>
-      </p:sp>
-      <p:sp>
-        <p:nvSpPr>
-          <p:cNvPr id="3" name="Notes Placeholder 2"/>
-          <p:cNvSpPr>
-            <a:spLocks noGrp="1"/>
-          </p:cNvSpPr>
-          <p:nvPr>
-            <p:ph type="body" idx="3" sz="quarter"/>
-          </p:nvPr>
-        </p:nvSpPr>
-        <p:spPr/>
-        <p:txBody>
-          <a:bodyPr/>
-          <a:lstStyle/>
-          <a:p>
-            <a:r>
-              <a:t>Итоги. Главный результат работы: разработан, реализован и исследован собственный метод — адаптивный контрастно-структурный фильтр. Он основан на билатеральном фильтре, но параметр сглаживания вычисляется в каждой точке по карте структурной активности, а масштаб этой карты автоматически привязан к оценке уровня шума. Метод не требует ни знания шума, ни ручной настройки. Экспериментально он превосходит все классические фильтры — до трёх децибел по PSNR — и практически достигает верхней границы, которую показал бы вручную настроенный фильтр. Устойчивость подтверждена на незнакомых уровнях шума. Программа написана на Rust, около 1200 строк, все алгоритмы, метрики и даже генератор шума написаны мной с нуля без готовых библиотек обработки изображений. Спасибо за внимание, готов ответить на вопросы.</a:t>
-            </a:r>
-          </a:p>
-        </p:txBody>
-      </p:sp>
-      <p:sp>
-        <p:nvSpPr>
-          <p:cNvPr id="4" name="Slide Number Placeholder 3"/>
-          <p:cNvSpPr>
-            <a:spLocks noGrp="1"/>
-          </p:cNvSpPr>
-          <p:nvPr>
-            <p:ph type="sldNum" idx="5" sz="quarter"/>
-          </p:nvPr>
-        </p:nvSpPr>
-        <p:spPr/>
-      </p:sp>
-    </p:spTree>
-  </p:cSld>
-  <p:clrMapOvr>
-    <a:masterClrMapping/>
-  </p:clrMapOvr>
-</p:notes>
-</file>
-
-<file path=ppt/notesSlides/notesSlide14.xml><?xml version="1.0" encoding="utf-8"?>
-<p:notes xmlns:a="http://schemas.openxmlformats.org/drawingml/2006/main" xmlns:p="http://schemas.openxmlformats.org/presentationml/2006/main" xmlns:r="http://schemas.openxmlformats.org/officeDocument/2006/relationships">
-  <p:cSld>
-    <p:spTree>
-      <p:nvGrpSpPr>
-        <p:cNvPr id="1" name=""/>
-        <p:cNvGrpSpPr/>
-        <p:nvPr/>
-      </p:nvGrpSpPr>
-      <p:grpSpPr>
-        <a:xfrm>
-          <a:off x="0" y="0"/>
-          <a:ext cx="0" cy="0"/>
-          <a:chOff x="0" y="0"/>
-          <a:chExt cx="0" cy="0"/>
-        </a:xfrm>
-      </p:grpSpPr>
-      <p:sp>
-        <p:nvSpPr>
-          <p:cNvPr id="2" name="Slide Image Placeholder 1"/>
-          <p:cNvSpPr>
-            <a:spLocks noGrp="1"/>
-          </p:cNvSpPr>
-          <p:nvPr>
-            <p:ph type="sldImg" idx="2"/>
-          </p:nvPr>
-        </p:nvSpPr>
-        <p:spPr/>
-      </p:sp>
-      <p:sp>
-        <p:nvSpPr>
-          <p:cNvPr id="3" name="Notes Placeholder 2"/>
-          <p:cNvSpPr>
-            <a:spLocks noGrp="1"/>
-          </p:cNvSpPr>
-          <p:nvPr>
-            <p:ph type="body" idx="3" sz="quarter"/>
-          </p:nvPr>
-        </p:nvSpPr>
-        <p:spPr/>
-        <p:txBody>
-          <a:bodyPr/>
-          <a:lstStyle/>
-          <a:p>
-            <a:r>
-              <a:t>В завершение — направления развития. Первое и самое практичное: ускорение. Сейчас метод обрабатывает изображение за 179 миллисекунд, и это можно сократить в разы за счёт сепарабельных вычислений и целочисленной арифметики. Второе — обобщение на цветные изображения, там логично обрабатывать яркость отдельно от цветовых каналов. Третье — перенести идею адаптивного параметра на другие семейства фильтров. Четвёртое — гибрид с медианным фильтром для импульсного шума. Спасибо за внимание, готов ответить на вопросы. Наиболее вероятные вопросы и ответы: почему Rust — потому что скорость уровня C и надёжность; почему не нейросеть — потому что цель была создать прозрачный алгоритм без обучения, работающий по одной фотографии; как проверялась честность — все методы оцениваются одной программой на одинаковых зашумлённых данных с фиксированным seed.</a:t>
+              <a:t>Подведу итог. В проекте есть не только алгоритм, но и полный путь проверки: быстрый публичный вариант, точная контрольная версия, контроль адаптации, сильный реализованный конкурент, цветной режим и парная статистика. Результаты говорят в пользу АКСФ именно в заданной модели гауссова шума. Честные ограничения также важны: нельзя переносить этот вывод без новых опытов на импульсный шум или реальные снимки. Спасибо за внимание, готов ответить на вопросы.</a:t>
             </a:r>
           </a:p>
         </p:txBody>
@@ -935,7 +722,7 @@
           <a:lstStyle/>
           <a:p>
             <a:r>
-              <a:t>Начнём с проблемы. Шум присутствует практически на любом реальном изображении: он возникает при съёмке при плохом освещении, при передаче по каналам связи, при сжатии. Мы используем классическую модель аддитивного белого гауссова шума: к каждому пикселю прибавляется случайная величина с нормальным распределением и стандартным отклонением сигма. На слайде справа видно зашумлённое изображение: мелкая зернистость разрушает детали. Задача сглаживания — убрать эту зернистость, но при этом не размыть контуры и текстуру. Главная сложность: уровень шума на практике заранее неизвестен, а параметры классических фильтров нужно подбирать вручную под каждый уровень шума и каждое изображение.</a:t>
+              <a:t>На примере видны два противоречивых требования. Нужно подавить гауссову зернистость, но не потерять контуры и текстуру. Простое усреднение одинаково относится к гладкой области и к границе, поэтому неизбежно размывает детали. Кроме того, на реальном кадре заранее неизвестен уровень шума. Это мотивирует локально адаптивное правило вместо одного глобального параметра.</a:t>
             </a:r>
           </a:p>
         </p:txBody>
@@ -1005,7 +792,7 @@
           <a:lstStyle/>
           <a:p>
             <a:r>
-              <a:t>Цель проекта — разработать собственный метод сглаживания, который настраивается автоматически: не требует ни знания уровня шума, ни ручного подбора параметров. Для этого нужно было решить шесть задач: изучить математические модели классических фильтров, разработать модификацию с локальной адаптацией, реализовать всё на Rust, спланировать и провести эксперимент на трёх изображениях и пяти уровнях шума, оценить качество по трём метрикам плюс время работы и честно зафиксировать ограничения. Про ограничения скажу отдельно в конце — для защиты это важно.</a:t>
+              <a:t>Алгоритм состоит из трёх логичных шагов. Сначала оценка шума по самому изображению. Затем в небольшом окне измеряется дисперсия, но из неё вычитается дисперсия шума — поэтому карта активности показывает преимущественно полезную структуру. Наконец, эта карта непрерывно управляет диапазонным параметром билатерального фильтра. В гладком месте фильтр смелее, а на детали — осторожнее.</a:t>
             </a:r>
           </a:p>
         </p:txBody>
@@ -1075,7 +862,7 @@
           <a:lstStyle/>
           <a:p>
             <a:r>
-              <a:t>Классические методы. Фильтр скользящего среднего заменяет каждый пиксель средним по окну — это снижает дисперсию шума, но размывает всё изображение целиком, включая границы. Гауссов фильтр делает то же самое, но с большим весом центральных пикселей — переходы получаются мягче. Медианный фильтр берёт медиану: он отлично убирает импульсный шум, но на гауссовом шуме и мелкой текстуре работает хуже. На правой картинке видно результат гауссова фильтра на фрагменте платы: шум ушёл, но вместе с ним исчезли тонкие дорожки и мелкие надписи. Общая проблема всех трёх методов: сила размытия задаётся одним числом для всего изображения и подбирается вручную. А значит, всегда приходится выбирать между подавлением шума и сохранением деталей.</a:t>
+              <a:t>Параметры не менялись ради удобства оптимизации. Была проведена отдельная калибровка только на уровнях 20 и 30; остальные уровни не использовались при выборе. Затем основную стоимость сняли тремя инженерными шагами: интегральная дисперсия, таблица экспоненты и сепарабельный проход. При этом точная 2D-версия оставлена внутри тестов, а публичный быстрый путь ограничен регрессионным порогом потери качества 0,05 децибела.</a:t>
             </a:r>
           </a:p>
         </p:txBody>
@@ -1145,7 +932,7 @@
           <a:lstStyle/>
           <a:p>
             <a:r>
-              <a:t>Следующий шаг — билатеральный фильтр. Он взвешивает пиксели окрестности не только по расстоянию, но и по разнице яркости: если яркость соседа сильно отличается от центральной — он считается «чужим» и почти не участвует в усреднении. За счёт этого границы объектов сохраняются. Но у фильтра есть принципиальное ограничение: параметр сигма_r, управляющий чувствительностью к разнице яркостей, один и тот же для всего изображения. Если он мал — в гладких областях шум останется, если велик — фильтр начнёт перескакивать через границы и размывать их. По нашим измерениям ручная подгонка параметров даёт этому фильтру плюс 2,3 децибела — то есть потенциал есть, но реализовать его без адаптации нельзя. Именно это противоречие натолкнуло меня на идею собственного метода.</a:t>
+              <a:t>Здесь важна честность сравнения. Для каждой комбинации изображения и уровня шума создаётся один шумный кадр с явным seed, и все методы получают именно его. В основном протоколе шесть сцен умножаются на шесть уровней, то есть каждый метод оценивается на 36 задачах. Перона—Малик реализован самостоятельно как дополнительный конкурент. Оракул не является применимым алгоритмом: он видит эталон только для демонстрации потолка семейства bilateral.</a:t>
             </a:r>
           </a:p>
         </p:txBody>
@@ -1215,7 +1002,7 @@
           <a:lstStyle/>
           <a:p>
             <a:r>
-              <a:t>Идея моего метода — адаптивного контрастно-структурного фильтра, сокращённо АКСФ — состоит из трёх шагов. Первый: автоматически оценить уровень шума прямо по зашумлённому изображению, используя известную оценку Иммеркера через отклик оператора Лапласа. Второй: построить карту структурной активности — для каждого пикселя оценить, сколько в нём «полезной» изменчивости, то есть структуры, а не шума. Третий: фильтровать так, чтобы параметр сигма_r в каждой точке зависел от этой карты. Получается, что в гладких областях фильтр сглаживает смело, а на контурах становится осторожным. Самое важное: коэффициенты правила безразмерные — они выражены в единицах оценки шума. Поэтому один и тот же набор параметров работает и при слабом, и при сильном шуме, и на любом изображении. Это и есть самонастройка.</a:t>
+              <a:t>Главный результат — средний PSNR АКСФ 30,35 децибела. Это на 3,10 децибела выше универсального bilateral. Важно не завышать вывод: оракул выше на 0,31 децибела, но он использует чистый эталон для подбора параметров. В числе честных применимых конкурентов также есть Перона—Малик; он сильнее Gaussian и bilateral, но АКСФ сохраняет преимущество по PSNR и занимает меньше времени.</a:t>
             </a:r>
           </a:p>
         </p:txBody>
@@ -1285,7 +1072,7 @@
           <a:lstStyle/>
           <a:p>
             <a:r>
-              <a:t>Покажу математику метода. Шаг первый — оценка шума по Иммеркеру: изображение свёртывается с маской Лапласа, и среднее абсолютное значение отклика связано со стандартным отклонением шума известной формулой. Метод не требует эталона — только зашумленную картинку. Шаг второй — карта активности: в каждом окне считается выборочная дисперсия яркости, из неё вычитается дисперсия шума, известная из первого шага. Получается оценка дисперсии полезного сигнала; корень из неё — карта A. Вычитание дисперсии шума принципиально: без него шум в гладких областях маскировался бы под структуру. Шаг третий — правило адаптации: сигма_r плавно переходит от k_max·σ̂ в гладких областях к k_min·σ̂ на контурах. Конкретные значения коэффициентов я подобрал по сетке на уровнях шума 20 и 30 и больше их не менял — на слайде они приведены.</a:t>
+              <a:t>Чтобы не объяснять успех случайно удачным средним параметром, включён flat-контроль. В нём та же оценка шума и тот же фильтр, но kmin и kmax сведены к одному среднему значению. Полный АКСФ выигрывает у него по PSNR. Это экспериментальная поддержка именно локального правила, а не просто выбора одной удачной настройки.</a:t>
             </a:r>
           </a:p>
         </p:txBody>
@@ -1355,7 +1142,7 @@
           <a:lstStyle/>
           <a:p>
             <a:r>
-              <a:t>Вот как метод работает изнутри, на примере платы. Слева зашумлённое изображение. В центре — карта структурной активности, которую метод рассчитывает сам: светлые участки соответствуют контурам, дорожкам и мелким деталям, тёмные — гладким областям. Именно по этой карте настраивается сила сглаживания: там, где структура — фильтр почти не меняет пиксели, где гладко — сглаживает активно. Справа результат: шум на плоских участках подавлен, а тонкие дорожки и надписи сохранились. Обратите внимание: карту метод строит сам, без всякой разметки.</a:t>
+              <a:t>Цифры важны, но для шумоподавления необходима визуальная проверка. На фрагменте бабуина видны одновременно гладкие области, контур и мелкая текстура. Gaussian снижает зернистость, но сглаживает мех. Bilateral сохраняет больше границ, но при универсальной настройке оставляет шум. АКСФ использует карту активности и пытается сохранить текстуру, не обрабатывая её как шум.</a:t>
             </a:r>
           </a:p>
         </p:txBody>
@@ -1425,7 +1212,7 @@
           <a:lstStyle/>
           <a:p>
             <a:r>
-              <a:t>Методика эксперимента. Три стандартных тестовых изображения с разным характером содержимого: бабуин с сильной мелкой текстурой меха, плата с тонкими линиями и надписями, фрукты с крупными гладкими областями. Пять уровней шума от 10 до 40 единиц яркости. Важно: генератор шума использует фиксированное зерно, поэтому эксперимент полностью воспроизводим — при повторном запуске получаются в точности те же результаты. Сравниваются все классические фильтры. Отдельно я добавил «оракула» — билатеральный фильтр, которому мы разрешаем подобрать параметры под каждую конкретную задачу так, чтобы результат был максимально хорош. Это не реальный метод, а верхняя граница: показать, насколько близко наш метод подходит к теоретическому потолку этого семейства. Качество измеряем тремя метриками: PSNR — классическая метрика по ошибке, SSIM — структурное сходство и EPI — сохранение краёв.</a:t>
+              <a:t>Один детерминированный запуск может быть удачным или неудачным для конкретного шума. Поэтому сравнение bilateral и АКСФ повторено на 30 независимых seed. Чтобы не делать вид, будто отдельные пиксели — независимые наблюдения, каждое наблюдение — это средний результат всех 36 задач одного seed. Поскольку входы общие, t-тест парный. Полученная p-величина значительно меньше 0,05, поэтому в этом протоколе наблюдаемый выигрыш не объясняется случайной сменой seed.</a:t>
             </a:r>
           </a:p>
         </p:txBody>
@@ -4482,8 +4269,8 @@
         </p:nvSpPr>
         <p:spPr>
           <a:xfrm>
-            <a:off x="822960" y="1371600"/>
-            <a:ext cx="10515600" cy="2926080"/>
+            <a:off x="685800" y="1097280"/>
+            <a:ext cx="10698480" cy="1463040"/>
           </a:xfrm>
           <a:prstGeom prst="rect">
             <a:avLst/>
@@ -4491,13 +4278,13 @@
           <a:noFill/>
         </p:spPr>
         <p:txBody>
-          <a:bodyPr wrap="square">
+          <a:bodyPr wrap="square" anchor="t">
             <a:spAutoFit/>
           </a:bodyPr>
           <a:lstStyle/>
           <a:p>
-            <a:pPr>
-              <a:defRPr sz="4000" b="1">
+            <a:pPr algn="ctr">
+              <a:defRPr sz="3700" b="1">
                 <a:solidFill>
                   <a:srgbClr val="FFFFFF"/>
                 </a:solidFill>
@@ -4505,38 +4292,11 @@
               </a:defRPr>
             </a:pPr>
             <a:r>
-              <a:t>Разработка и исследование метода сглаживания изображений</a:t>
-            </a:r>
-          </a:p>
-          <a:p>
-            <a:pPr>
-              <a:defRPr sz="2400" b="1">
-                <a:solidFill>
-                  <a:srgbClr val="D62728"/>
-                </a:solidFill>
-                <a:latin typeface="Calibri"/>
-              </a:defRPr>
-            </a:pPr>
-            <a:r>
-              <a:t>адаптивный контрастно-структурный фильтр (АКСФ)</a:t>
-            </a:r>
-          </a:p>
-          <a:p>
+              <a:t>Адаптивный</a:t>
+            </a:r>
             <a:br/>
-            <a:pPr>
-              <a:defRPr sz="1800">
-                <a:solidFill>
-                  <a:srgbClr val="C9D6E8"/>
-                </a:solidFill>
-                <a:latin typeface="Calibri"/>
-              </a:defRPr>
-            </a:pPr>
-            <a:r>
-              <a:t>Учебный проект по обработке изображений</a:t>
-            </a:r>
-            <a:br/>
-            <a:r>
-              <a:t>Программная реализация — язык Rust</a:t>
+            <a:r>
+              <a:t>контрастно-структурный фильтр</a:t>
             </a:r>
           </a:p>
         </p:txBody>
@@ -4549,8 +4309,8 @@
         </p:nvSpPr>
         <p:spPr>
           <a:xfrm>
-            <a:off x="822960" y="5120640"/>
-            <a:ext cx="10515600" cy="1097280"/>
+            <a:off x="685800" y="2788920"/>
+            <a:ext cx="10698480" cy="502920"/>
           </a:xfrm>
           <a:prstGeom prst="rect">
             <a:avLst/>
@@ -4558,21 +4318,97 @@
           <a:noFill/>
         </p:spPr>
         <p:txBody>
-          <a:bodyPr wrap="none">
+          <a:bodyPr wrap="square" anchor="t">
             <a:spAutoFit/>
           </a:bodyPr>
           <a:lstStyle/>
           <a:p>
-            <a:pPr>
-              <a:defRPr sz="1600">
+            <a:pPr algn="ctr">
+              <a:defRPr sz="2100" b="1">
                 <a:solidFill>
-                  <a:srgbClr val="FFFFFF"/>
+                  <a:srgbClr val="E66A6B"/>
                 </a:solidFill>
                 <a:latin typeface="Calibri"/>
               </a:defRPr>
             </a:pPr>
             <a:r>
-              <a:t>Выполнил(а): ______________________            Группа: ______________</a:t>
+              <a:t>АКСФ: воспроизводимое исследование шумоподавления на Rust</a:t>
+            </a:r>
+          </a:p>
+        </p:txBody>
+      </p:sp>
+      <p:sp>
+        <p:nvSpPr>
+          <p:cNvPr id="5" name="TextBox 4"/>
+          <p:cNvSpPr txBox="1"/>
+          <p:nvPr/>
+        </p:nvSpPr>
+        <p:spPr>
+          <a:xfrm>
+            <a:off x="685800" y="4069080"/>
+            <a:ext cx="10698480" cy="914400"/>
+          </a:xfrm>
+          <a:prstGeom prst="rect">
+            <a:avLst/>
+          </a:prstGeom>
+          <a:noFill/>
+        </p:spPr>
+        <p:txBody>
+          <a:bodyPr wrap="square" anchor="t">
+            <a:spAutoFit/>
+          </a:bodyPr>
+          <a:lstStyle/>
+          <a:p>
+            <a:pPr algn="ctr">
+              <a:defRPr sz="1800" b="0">
+                <a:solidFill>
+                  <a:srgbClr val="CFD9E8"/>
+                </a:solidFill>
+                <a:latin typeface="Calibri"/>
+              </a:defRPr>
+            </a:pPr>
+            <a:r>
+              <a:t>6 полутоновых сцен · 6 уровней шума · цветный YCbCr-режим</a:t>
+            </a:r>
+            <a:br/>
+            <a:r>
+              <a:t>30 парных независимых прогонов</a:t>
+            </a:r>
+          </a:p>
+        </p:txBody>
+      </p:sp>
+      <p:sp>
+        <p:nvSpPr>
+          <p:cNvPr id="6" name="TextBox 5"/>
+          <p:cNvSpPr txBox="1"/>
+          <p:nvPr/>
+        </p:nvSpPr>
+        <p:spPr>
+          <a:xfrm>
+            <a:off x="685800" y="5897880"/>
+            <a:ext cx="10698480" cy="320040"/>
+          </a:xfrm>
+          <a:prstGeom prst="rect">
+            <a:avLst/>
+          </a:prstGeom>
+          <a:noFill/>
+        </p:spPr>
+        <p:txBody>
+          <a:bodyPr wrap="square" anchor="t">
+            <a:spAutoFit/>
+          </a:bodyPr>
+          <a:lstStyle/>
+          <a:p>
+            <a:pPr algn="ctr">
+              <a:defRPr sz="1400" b="0">
+                <a:solidFill>
+                  <a:srgbClr val="CFD9E8"/>
+                </a:solidFill>
+                <a:latin typeface="Calibri"/>
+              </a:defRPr>
+            </a:pPr>
+            <a:r>
+              <a:t>Учебный проект · 2026</a:t>
             </a:r>
           </a:p>
         </p:txBody>
@@ -4604,7 +4440,7 @@
         <p:spPr>
           <a:xfrm>
             <a:off x="0" y="0"/>
-            <a:ext cx="12191695" cy="914400"/>
+            <a:ext cx="12191695" cy="822960"/>
           </a:xfrm>
           <a:prstGeom prst="rect">
             <a:avLst/>
@@ -4631,11 +4467,11 @@
           </a:fontRef>
         </p:style>
         <p:txBody>
-          <a:bodyPr rtlCol="0" anchor="ctr" lIns="457200" tIns="91440"/>
+          <a:bodyPr rtlCol="0" anchor="ctr" lIns="384048" tIns="73152"/>
           <a:lstStyle/>
           <a:p>
             <a:pPr algn="ctr">
-              <a:defRPr sz="2800" b="1">
+              <a:defRPr sz="2500" b="1">
                 <a:solidFill>
                   <a:srgbClr val="FFFFFF"/>
                 </a:solidFill>
@@ -4643,19 +4479,20 @@
               </a:defRPr>
             </a:pPr>
             <a:r>
-              <a:t>Результаты эксперимента</a:t>
+              <a:t>Реальный цветной YCbCr-режим</a:t>
             </a:r>
           </a:p>
           <a:p>
             <a:pPr>
-              <a:defRPr sz="1400">
+              <a:defRPr sz="1100">
                 <a:solidFill>
                   <a:srgbClr val="C9D6E8"/>
                 </a:solidFill>
+                <a:latin typeface="Calibri"/>
               </a:defRPr>
             </a:pPr>
             <a:r>
-              <a:t>среднее по 3 изображениям и 5 уровням шума</a:t>
+              <a:t>адаптация по Y, совместная фильтрация Y, Cb и Cr</a:t>
             </a:r>
           </a:p>
         </p:txBody>
@@ -4669,8 +4506,8 @@
           <p:nvPr/>
         </p:nvGraphicFramePr>
         <p:xfrm>
-          <a:off x="502920" y="1234440"/>
-          <a:ext cx="5394958" cy="2926080"/>
+          <a:off x="502920" y="1325880"/>
+          <a:ext cx="5349240" cy="2057400"/>
         </p:xfrm>
         <a:graphic>
           <a:graphicData uri="http://schemas.openxmlformats.org/drawingml/2006/table">
@@ -4679,20 +4516,20 @@
                 <a:tableStyleId>{5C22544A-7EE6-4342-B048-85BDC9FD1C3A}</a:tableStyleId>
               </a:tblPr>
               <a:tblGrid>
-                <a:gridCol w="2157984"/>
-                <a:gridCol w="912993"/>
-                <a:gridCol w="746994"/>
-                <a:gridCol w="746994"/>
-                <a:gridCol w="829993"/>
+                <a:gridCol w="1069848"/>
+                <a:gridCol w="1069848"/>
+                <a:gridCol w="1069848"/>
+                <a:gridCol w="1069848"/>
+                <a:gridCol w="1069848"/>
               </a:tblGrid>
-              <a:tr h="487680">
+              <a:tr h="514350">
                 <a:tc>
                   <a:txBody>
                     <a:bodyPr/>
                     <a:lstStyle/>
                     <a:p>
                       <a:pPr algn="l">
-                        <a:defRPr sz="1350" b="1">
+                        <a:defRPr sz="1230" b="1">
                           <a:solidFill>
                             <a:srgbClr val="FFFFFF"/>
                           </a:solidFill>
@@ -4704,7 +4541,11 @@
                       </a:r>
                     </a:p>
                   </a:txBody>
-                  <a:tcPr marL="54864" marR="36576" marT="9144" marB="9144"/>
+                  <a:tcPr marL="36576" marR="36576" marT="13716" marB="13716">
+                    <a:solidFill>
+                      <a:srgbClr val="1F2D5C"/>
+                    </a:solidFill>
+                  </a:tcPr>
                 </a:tc>
                 <a:tc>
                   <a:txBody>
@@ -4712,7 +4553,7 @@
                     <a:lstStyle/>
                     <a:p>
                       <a:pPr algn="ctr">
-                        <a:defRPr sz="1350" b="1">
+                        <a:defRPr sz="1230" b="1">
                           <a:solidFill>
                             <a:srgbClr val="FFFFFF"/>
                           </a:solidFill>
@@ -4720,11 +4561,15 @@
                         </a:defRPr>
                       </a:pPr>
                       <a:r>
-                        <a:t>PSNR, дБ</a:t>
+                        <a:t>PSNR</a:t>
                       </a:r>
                     </a:p>
                   </a:txBody>
-                  <a:tcPr marL="54864" marR="36576" marT="9144" marB="9144"/>
+                  <a:tcPr marL="36576" marR="36576" marT="13716" marB="13716">
+                    <a:solidFill>
+                      <a:srgbClr val="1F2D5C"/>
+                    </a:solidFill>
+                  </a:tcPr>
                 </a:tc>
                 <a:tc>
                   <a:txBody>
@@ -4732,7 +4577,7 @@
                     <a:lstStyle/>
                     <a:p>
                       <a:pPr algn="ctr">
-                        <a:defRPr sz="1350" b="1">
+                        <a:defRPr sz="1230" b="1">
                           <a:solidFill>
                             <a:srgbClr val="FFFFFF"/>
                           </a:solidFill>
@@ -4744,7 +4589,11 @@
                       </a:r>
                     </a:p>
                   </a:txBody>
-                  <a:tcPr marL="54864" marR="36576" marT="9144" marB="9144"/>
+                  <a:tcPr marL="36576" marR="36576" marT="13716" marB="13716">
+                    <a:solidFill>
+                      <a:srgbClr val="1F2D5C"/>
+                    </a:solidFill>
+                  </a:tcPr>
                 </a:tc>
                 <a:tc>
                   <a:txBody>
@@ -4752,7 +4601,7 @@
                     <a:lstStyle/>
                     <a:p>
                       <a:pPr algn="ctr">
-                        <a:defRPr sz="1350" b="1">
+                        <a:defRPr sz="1230" b="1">
                           <a:solidFill>
                             <a:srgbClr val="FFFFFF"/>
                           </a:solidFill>
@@ -4764,7 +4613,11 @@
                       </a:r>
                     </a:p>
                   </a:txBody>
-                  <a:tcPr marL="54864" marR="36576" marT="9144" marB="9144"/>
+                  <a:tcPr marL="36576" marR="36576" marT="13716" marB="13716">
+                    <a:solidFill>
+                      <a:srgbClr val="1F2D5C"/>
+                    </a:solidFill>
+                  </a:tcPr>
                 </a:tc>
                 <a:tc>
                   <a:txBody>
@@ -4772,7 +4625,7 @@
                     <a:lstStyle/>
                     <a:p>
                       <a:pPr algn="ctr">
-                        <a:defRPr sz="1350" b="1">
+                        <a:defRPr sz="1230" b="1">
                           <a:solidFill>
                             <a:srgbClr val="FFFFFF"/>
                           </a:solidFill>
@@ -4780,21 +4633,25 @@
                         </a:defRPr>
                       </a:pPr>
                       <a:r>
-                        <a:t>Время, мс</a:t>
+                        <a:t>мс</a:t>
                       </a:r>
                     </a:p>
                   </a:txBody>
-                  <a:tcPr marL="54864" marR="36576" marT="9144" marB="9144"/>
+                  <a:tcPr marL="36576" marR="36576" marT="13716" marB="13716">
+                    <a:solidFill>
+                      <a:srgbClr val="1F2D5C"/>
+                    </a:solidFill>
+                  </a:tcPr>
                 </a:tc>
               </a:tr>
-              <a:tr h="487680">
+              <a:tr h="514350">
                 <a:tc>
                   <a:txBody>
                     <a:bodyPr/>
                     <a:lstStyle/>
                     <a:p>
                       <a:pPr algn="l">
-                        <a:defRPr sz="1350" b="0">
+                        <a:defRPr sz="1230" b="0">
                           <a:solidFill>
                             <a:srgbClr val="444444"/>
                           </a:solidFill>
@@ -4802,11 +4659,11 @@
                         </a:defRPr>
                       </a:pPr>
                       <a:r>
-                        <a:t>Гауссов</a:t>
+                        <a:t>Без обработки (YCbCr)</a:t>
                       </a:r>
                     </a:p>
                   </a:txBody>
-                  <a:tcPr marL="54864" marR="36576" marT="9144" marB="9144"/>
+                  <a:tcPr marL="36576" marR="36576" marT="13716" marB="13716"/>
                 </a:tc>
                 <a:tc>
                   <a:txBody>
@@ -4814,7 +4671,7 @@
                     <a:lstStyle/>
                     <a:p>
                       <a:pPr algn="ctr">
-                        <a:defRPr sz="1350" b="0">
+                        <a:defRPr sz="1230" b="0">
                           <a:solidFill>
                             <a:srgbClr val="444444"/>
                           </a:solidFill>
@@ -4822,11 +4679,11 @@
                         </a:defRPr>
                       </a:pPr>
                       <a:r>
-                        <a:t>23,07</a:t>
+                        <a:t>24,00</a:t>
                       </a:r>
                     </a:p>
                   </a:txBody>
-                  <a:tcPr marL="54864" marR="36576" marT="9144" marB="9144"/>
+                  <a:tcPr marL="36576" marR="36576" marT="13716" marB="13716"/>
                 </a:tc>
                 <a:tc>
                   <a:txBody>
@@ -4834,7 +4691,7 @@
                     <a:lstStyle/>
                     <a:p>
                       <a:pPr algn="ctr">
-                        <a:defRPr sz="1350" b="0">
+                        <a:defRPr sz="1230" b="0">
                           <a:solidFill>
                             <a:srgbClr val="444444"/>
                           </a:solidFill>
@@ -4842,11 +4699,11 @@
                         </a:defRPr>
                       </a:pPr>
                       <a:r>
-                        <a:t>0,524</a:t>
+                        <a:t>0,3799</a:t>
                       </a:r>
                     </a:p>
                   </a:txBody>
-                  <a:tcPr marL="54864" marR="36576" marT="9144" marB="9144"/>
+                  <a:tcPr marL="36576" marR="36576" marT="13716" marB="13716"/>
                 </a:tc>
                 <a:tc>
                   <a:txBody>
@@ -4854,7 +4711,7 @@
                     <a:lstStyle/>
                     <a:p>
                       <a:pPr algn="ctr">
-                        <a:defRPr sz="1350" b="0">
+                        <a:defRPr sz="1230" b="0">
                           <a:solidFill>
                             <a:srgbClr val="444444"/>
                           </a:solidFill>
@@ -4862,11 +4719,11 @@
                         </a:defRPr>
                       </a:pPr>
                       <a:r>
-                        <a:t>0,351</a:t>
+                        <a:t>0,2168</a:t>
                       </a:r>
                     </a:p>
                   </a:txBody>
-                  <a:tcPr marL="54864" marR="36576" marT="9144" marB="9144"/>
+                  <a:tcPr marL="36576" marR="36576" marT="13716" marB="13716"/>
                 </a:tc>
                 <a:tc>
                   <a:txBody>
@@ -4874,7 +4731,7 @@
                     <a:lstStyle/>
                     <a:p>
                       <a:pPr algn="ctr">
-                        <a:defRPr sz="1350" b="0">
+                        <a:defRPr sz="1230" b="0">
                           <a:solidFill>
                             <a:srgbClr val="444444"/>
                           </a:solidFill>
@@ -4882,21 +4739,21 @@
                         </a:defRPr>
                       </a:pPr>
                       <a:r>
-                        <a:t>16</a:t>
+                        <a:t>1,0</a:t>
                       </a:r>
                     </a:p>
                   </a:txBody>
-                  <a:tcPr marL="54864" marR="36576" marT="9144" marB="9144"/>
+                  <a:tcPr marL="36576" marR="36576" marT="13716" marB="13716"/>
                 </a:tc>
               </a:tr>
-              <a:tr h="487680">
+              <a:tr h="514350">
                 <a:tc>
                   <a:txBody>
                     <a:bodyPr/>
                     <a:lstStyle/>
                     <a:p>
                       <a:pPr algn="l">
-                        <a:defRPr sz="1350" b="0">
+                        <a:defRPr sz="1230" b="0">
                           <a:solidFill>
                             <a:srgbClr val="444444"/>
                           </a:solidFill>
@@ -4904,11 +4761,11 @@
                         </a:defRPr>
                       </a:pPr>
                       <a:r>
-                        <a:t>Медианный 5×5</a:t>
+                        <a:t>Билатеральный (YCbCr)</a:t>
                       </a:r>
                     </a:p>
                   </a:txBody>
-                  <a:tcPr marL="54864" marR="36576" marT="9144" marB="9144"/>
+                  <a:tcPr marL="36576" marR="36576" marT="13716" marB="13716"/>
                 </a:tc>
                 <a:tc>
                   <a:txBody>
@@ -4916,7 +4773,7 @@
                     <a:lstStyle/>
                     <a:p>
                       <a:pPr algn="ctr">
-                        <a:defRPr sz="1350" b="0">
+                        <a:defRPr sz="1230" b="0">
                           <a:solidFill>
                             <a:srgbClr val="444444"/>
                           </a:solidFill>
@@ -4924,11 +4781,11 @@
                         </a:defRPr>
                       </a:pPr>
                       <a:r>
-                        <a:t>22,06</a:t>
+                        <a:t>28,65</a:t>
                       </a:r>
                     </a:p>
                   </a:txBody>
-                  <a:tcPr marL="54864" marR="36576" marT="9144" marB="9144"/>
+                  <a:tcPr marL="36576" marR="36576" marT="13716" marB="13716"/>
                 </a:tc>
                 <a:tc>
                   <a:txBody>
@@ -4936,7 +4793,7 @@
                     <a:lstStyle/>
                     <a:p>
                       <a:pPr algn="ctr">
-                        <a:defRPr sz="1350" b="0">
+                        <a:defRPr sz="1230" b="0">
                           <a:solidFill>
                             <a:srgbClr val="444444"/>
                           </a:solidFill>
@@ -4944,11 +4801,11 @@
                         </a:defRPr>
                       </a:pPr>
                       <a:r>
-                        <a:t>0,414</a:t>
+                        <a:t>0,6053</a:t>
                       </a:r>
                     </a:p>
                   </a:txBody>
-                  <a:tcPr marL="54864" marR="36576" marT="9144" marB="9144"/>
+                  <a:tcPr marL="36576" marR="36576" marT="13716" marB="13716"/>
                 </a:tc>
                 <a:tc>
                   <a:txBody>
@@ -4956,7 +4813,7 @@
                     <a:lstStyle/>
                     <a:p>
                       <a:pPr algn="ctr">
-                        <a:defRPr sz="1350" b="0">
+                        <a:defRPr sz="1230" b="0">
                           <a:solidFill>
                             <a:srgbClr val="444444"/>
                           </a:solidFill>
@@ -4964,11 +4821,11 @@
                         </a:defRPr>
                       </a:pPr>
                       <a:r>
-                        <a:t>0,010</a:t>
+                        <a:t>0,2479</a:t>
                       </a:r>
                     </a:p>
                   </a:txBody>
-                  <a:tcPr marL="54864" marR="36576" marT="9144" marB="9144"/>
+                  <a:tcPr marL="36576" marR="36576" marT="13716" marB="13716"/>
                 </a:tc>
                 <a:tc>
                   <a:txBody>
@@ -4976,7 +4833,7 @@
                     <a:lstStyle/>
                     <a:p>
                       <a:pPr algn="ctr">
-                        <a:defRPr sz="1350" b="0">
+                        <a:defRPr sz="1230" b="0">
                           <a:solidFill>
                             <a:srgbClr val="444444"/>
                           </a:solidFill>
@@ -4984,33 +4841,37 @@
                         </a:defRPr>
                       </a:pPr>
                       <a:r>
-                        <a:t>83</a:t>
+                        <a:t>121,5</a:t>
                       </a:r>
                     </a:p>
                   </a:txBody>
-                  <a:tcPr marL="54864" marR="36576" marT="9144" marB="9144"/>
+                  <a:tcPr marL="36576" marR="36576" marT="13716" marB="13716"/>
                 </a:tc>
               </a:tr>
-              <a:tr h="487680">
+              <a:tr h="514350">
                 <a:tc>
                   <a:txBody>
                     <a:bodyPr/>
                     <a:lstStyle/>
                     <a:p>
                       <a:pPr algn="l">
-                        <a:defRPr sz="1350" b="0">
+                        <a:defRPr sz="1230" b="1">
                           <a:solidFill>
-                            <a:srgbClr val="444444"/>
+                            <a:srgbClr val="D62728"/>
                           </a:solidFill>
                           <a:latin typeface="Calibri"/>
                         </a:defRPr>
                       </a:pPr>
                       <a:r>
-                        <a:t>Билатеральный</a:t>
+                        <a:t>АКСФ (YCbCr)</a:t>
                       </a:r>
                     </a:p>
                   </a:txBody>
-                  <a:tcPr marL="54864" marR="36576" marT="9144" marB="9144"/>
+                  <a:tcPr marL="36576" marR="36576" marT="13716" marB="13716">
+                    <a:solidFill>
+                      <a:srgbClr val="EEF2F8"/>
+                    </a:solidFill>
+                  </a:tcPr>
                 </a:tc>
                 <a:tc>
                   <a:txBody>
@@ -5018,19 +4879,23 @@
                     <a:lstStyle/>
                     <a:p>
                       <a:pPr algn="ctr">
-                        <a:defRPr sz="1350" b="0">
+                        <a:defRPr sz="1230" b="1">
                           <a:solidFill>
-                            <a:srgbClr val="444444"/>
+                            <a:srgbClr val="D62728"/>
                           </a:solidFill>
                           <a:latin typeface="Calibri"/>
                         </a:defRPr>
                       </a:pPr>
                       <a:r>
-                        <a:t>24,15</a:t>
+                        <a:t>31,23</a:t>
                       </a:r>
                     </a:p>
                   </a:txBody>
-                  <a:tcPr marL="54864" marR="36576" marT="9144" marB="9144"/>
+                  <a:tcPr marL="36576" marR="36576" marT="13716" marB="13716">
+                    <a:solidFill>
+                      <a:srgbClr val="EEF2F8"/>
+                    </a:solidFill>
+                  </a:tcPr>
                 </a:tc>
                 <a:tc>
                   <a:txBody>
@@ -5038,19 +4903,23 @@
                     <a:lstStyle/>
                     <a:p>
                       <a:pPr algn="ctr">
-                        <a:defRPr sz="1350" b="0">
+                        <a:defRPr sz="1230" b="1">
                           <a:solidFill>
-                            <a:srgbClr val="444444"/>
+                            <a:srgbClr val="D62728"/>
                           </a:solidFill>
                           <a:latin typeface="Calibri"/>
                         </a:defRPr>
                       </a:pPr>
                       <a:r>
-                        <a:t>0,583</a:t>
+                        <a:t>0,8413</a:t>
                       </a:r>
                     </a:p>
                   </a:txBody>
-                  <a:tcPr marL="54864" marR="36576" marT="9144" marB="9144"/>
+                  <a:tcPr marL="36576" marR="36576" marT="13716" marB="13716">
+                    <a:solidFill>
+                      <a:srgbClr val="EEF2F8"/>
+                    </a:solidFill>
+                  </a:tcPr>
                 </a:tc>
                 <a:tc>
                   <a:txBody>
@@ -5058,19 +4927,23 @@
                     <a:lstStyle/>
                     <a:p>
                       <a:pPr algn="ctr">
-                        <a:defRPr sz="1350" b="0">
+                        <a:defRPr sz="1230" b="1">
                           <a:solidFill>
-                            <a:srgbClr val="444444"/>
+                            <a:srgbClr val="D62728"/>
                           </a:solidFill>
                           <a:latin typeface="Calibri"/>
                         </a:defRPr>
                       </a:pPr>
                       <a:r>
-                        <a:t>0,496</a:t>
+                        <a:t>0,2728</a:t>
                       </a:r>
                     </a:p>
                   </a:txBody>
-                  <a:tcPr marL="54864" marR="36576" marT="9144" marB="9144"/>
+                  <a:tcPr marL="36576" marR="36576" marT="13716" marB="13716">
+                    <a:solidFill>
+                      <a:srgbClr val="EEF2F8"/>
+                    </a:solidFill>
+                  </a:tcPr>
                 </a:tc>
                 <a:tc>
                   <a:txBody>
@@ -5078,131 +4951,7 @@
                     <a:lstStyle/>
                     <a:p>
                       <a:pPr algn="ctr">
-                        <a:defRPr sz="1350" b="0">
-                          <a:solidFill>
-                            <a:srgbClr val="444444"/>
-                          </a:solidFill>
-                          <a:latin typeface="Calibri"/>
-                        </a:defRPr>
-                      </a:pPr>
-                      <a:r>
-                        <a:t>156</a:t>
-                      </a:r>
-                    </a:p>
-                  </a:txBody>
-                  <a:tcPr marL="54864" marR="36576" marT="9144" marB="9144"/>
-                </a:tc>
-              </a:tr>
-              <a:tr h="487680">
-                <a:tc>
-                  <a:txBody>
-                    <a:bodyPr/>
-                    <a:lstStyle/>
-                    <a:p>
-                      <a:pPr algn="l">
-                        <a:defRPr sz="1350" b="0">
-                          <a:solidFill>
-                            <a:srgbClr val="444444"/>
-                          </a:solidFill>
-                          <a:latin typeface="Calibri"/>
-                        </a:defRPr>
-                      </a:pPr>
-                      <a:r>
-                        <a:t>Билатеральный «оракул»</a:t>
-                      </a:r>
-                    </a:p>
-                  </a:txBody>
-                  <a:tcPr marL="54864" marR="36576" marT="9144" marB="9144"/>
-                </a:tc>
-                <a:tc>
-                  <a:txBody>
-                    <a:bodyPr/>
-                    <a:lstStyle/>
-                    <a:p>
-                      <a:pPr algn="ctr">
-                        <a:defRPr sz="1350" b="0">
-                          <a:solidFill>
-                            <a:srgbClr val="444444"/>
-                          </a:solidFill>
-                          <a:latin typeface="Calibri"/>
-                        </a:defRPr>
-                      </a:pPr>
-                      <a:r>
-                        <a:t>26,40</a:t>
-                      </a:r>
-                    </a:p>
-                  </a:txBody>
-                  <a:tcPr marL="54864" marR="36576" marT="9144" marB="9144"/>
-                </a:tc>
-                <a:tc>
-                  <a:txBody>
-                    <a:bodyPr/>
-                    <a:lstStyle/>
-                    <a:p>
-                      <a:pPr algn="ctr">
-                        <a:defRPr sz="1350" b="0">
-                          <a:solidFill>
-                            <a:srgbClr val="444444"/>
-                          </a:solidFill>
-                          <a:latin typeface="Calibri"/>
-                        </a:defRPr>
-                      </a:pPr>
-                      <a:r>
-                        <a:t>0,730</a:t>
-                      </a:r>
-                    </a:p>
-                  </a:txBody>
-                  <a:tcPr marL="54864" marR="36576" marT="9144" marB="9144"/>
-                </a:tc>
-                <a:tc>
-                  <a:txBody>
-                    <a:bodyPr/>
-                    <a:lstStyle/>
-                    <a:p>
-                      <a:pPr algn="ctr">
-                        <a:defRPr sz="1350" b="0">
-                          <a:solidFill>
-                            <a:srgbClr val="444444"/>
-                          </a:solidFill>
-                          <a:latin typeface="Calibri"/>
-                        </a:defRPr>
-                      </a:pPr>
-                      <a:r>
-                        <a:t>0,550</a:t>
-                      </a:r>
-                    </a:p>
-                  </a:txBody>
-                  <a:tcPr marL="54864" marR="36576" marT="9144" marB="9144"/>
-                </a:tc>
-                <a:tc>
-                  <a:txBody>
-                    <a:bodyPr/>
-                    <a:lstStyle/>
-                    <a:p>
-                      <a:pPr algn="ctr">
-                        <a:defRPr sz="1350" b="0">
-                          <a:solidFill>
-                            <a:srgbClr val="444444"/>
-                          </a:solidFill>
-                          <a:latin typeface="Calibri"/>
-                        </a:defRPr>
-                      </a:pPr>
-                      <a:r>
-                        <a:t>—</a:t>
-                      </a:r>
-                    </a:p>
-                  </a:txBody>
-                  <a:tcPr marL="54864" marR="36576" marT="9144" marB="9144"/>
-                </a:tc>
-              </a:tr>
-              <a:tr h="487680">
-                <a:tc>
-                  <a:txBody>
-                    <a:bodyPr/>
-                    <a:lstStyle/>
-                    <a:p>
-                      <a:pPr algn="l">
-                        <a:defRPr sz="1350" b="1">
+                        <a:defRPr sz="1230" b="1">
                           <a:solidFill>
                             <a:srgbClr val="D62728"/>
                           </a:solidFill>
@@ -5210,155 +4959,24 @@
                         </a:defRPr>
                       </a:pPr>
                       <a:r>
-                        <a:t>АКСФ (наш метод)</a:t>
+                        <a:t>123,6</a:t>
                       </a:r>
                     </a:p>
                   </a:txBody>
-                  <a:tcPr marL="54864" marR="36576" marT="9144" marB="9144"/>
-                </a:tc>
-                <a:tc>
-                  <a:txBody>
-                    <a:bodyPr/>
-                    <a:lstStyle/>
-                    <a:p>
-                      <a:pPr algn="ctr">
-                        <a:defRPr sz="1350" b="1">
-                          <a:solidFill>
-                            <a:srgbClr val="D62728"/>
-                          </a:solidFill>
-                          <a:latin typeface="Calibri"/>
-                        </a:defRPr>
-                      </a:pPr>
-                      <a:r>
-                        <a:t>26,14</a:t>
-                      </a:r>
-                    </a:p>
-                  </a:txBody>
-                  <a:tcPr marL="54864" marR="36576" marT="9144" marB="9144"/>
-                </a:tc>
-                <a:tc>
-                  <a:txBody>
-                    <a:bodyPr/>
-                    <a:lstStyle/>
-                    <a:p>
-                      <a:pPr algn="ctr">
-                        <a:defRPr sz="1350" b="1">
-                          <a:solidFill>
-                            <a:srgbClr val="D62728"/>
-                          </a:solidFill>
-                          <a:latin typeface="Calibri"/>
-                        </a:defRPr>
-                      </a:pPr>
-                      <a:r>
-                        <a:t>0,722</a:t>
-                      </a:r>
-                    </a:p>
-                  </a:txBody>
-                  <a:tcPr marL="54864" marR="36576" marT="9144" marB="9144"/>
-                </a:tc>
-                <a:tc>
-                  <a:txBody>
-                    <a:bodyPr/>
-                    <a:lstStyle/>
-                    <a:p>
-                      <a:pPr algn="ctr">
-                        <a:defRPr sz="1350" b="1">
-                          <a:solidFill>
-                            <a:srgbClr val="D62728"/>
-                          </a:solidFill>
-                          <a:latin typeface="Calibri"/>
-                        </a:defRPr>
-                      </a:pPr>
-                      <a:r>
-                        <a:t>0,548</a:t>
-                      </a:r>
-                    </a:p>
-                  </a:txBody>
-                  <a:tcPr marL="54864" marR="36576" marT="9144" marB="9144"/>
-                </a:tc>
-                <a:tc>
-                  <a:txBody>
-                    <a:bodyPr/>
-                    <a:lstStyle/>
-                    <a:p>
-                      <a:pPr algn="ctr">
-                        <a:defRPr sz="1350" b="1">
-                          <a:solidFill>
-                            <a:srgbClr val="D62728"/>
-                          </a:solidFill>
-                          <a:latin typeface="Calibri"/>
-                        </a:defRPr>
-                      </a:pPr>
-                      <a:r>
-                        <a:t>179</a:t>
-                      </a:r>
-                    </a:p>
-                  </a:txBody>
-                  <a:tcPr marL="54864" marR="36576" marT="9144" marB="9144"/>
+                  <a:tcPr marL="36576" marR="36576" marT="13716" marB="13716">
+                    <a:solidFill>
+                      <a:srgbClr val="EEF2F8"/>
+                    </a:solidFill>
+                  </a:tcPr>
                 </a:tc>
               </a:tr>
             </a:tbl>
           </a:graphicData>
         </a:graphic>
       </p:graphicFrame>
-      <p:sp>
-        <p:nvSpPr>
-          <p:cNvPr id="4" name="TextBox 3"/>
-          <p:cNvSpPr txBox="1"/>
-          <p:nvPr/>
-        </p:nvSpPr>
-        <p:spPr>
-          <a:xfrm>
-            <a:off x="502920" y="4480560"/>
-            <a:ext cx="5394960" cy="2103120"/>
-          </a:xfrm>
-          <a:prstGeom prst="rect">
-            <a:avLst/>
-          </a:prstGeom>
-          <a:noFill/>
-        </p:spPr>
-        <p:txBody>
-          <a:bodyPr wrap="square">
-            <a:spAutoFit/>
-          </a:bodyPr>
-          <a:lstStyle/>
-          <a:p>
-            <a:pPr>
-              <a:spcAft>
-                <a:spcPts val="800"/>
-              </a:spcAft>
-              <a:defRPr sz="1500" b="1">
-                <a:solidFill>
-                  <a:srgbClr val="D62728"/>
-                </a:solidFill>
-                <a:latin typeface="Calibri"/>
-              </a:defRPr>
-            </a:pPr>
-            <a:r>
-              <a:t>• +3,07 дБ к лучшему классическому методу</a:t>
-            </a:r>
-          </a:p>
-          <a:p>
-            <a:pPr>
-              <a:spcAft>
-                <a:spcPts val="800"/>
-              </a:spcAft>
-              <a:defRPr sz="1500" b="1">
-                <a:solidFill>
-                  <a:srgbClr val="444444"/>
-                </a:solidFill>
-                <a:latin typeface="Calibri"/>
-              </a:defRPr>
-            </a:pPr>
-            <a:r>
-              <a:t>• −0,26 дБ от «оракула» — без перебора параметров</a:t>
-            </a:r>
-          </a:p>
-        </p:txBody>
-      </p:sp>
       <p:pic>
         <p:nvPicPr>
-          <p:cNvPr id="5" name="Picture 4" descr="fig_psnr_vs_sigma.png"/>
+          <p:cNvPr id="4" name="Picture 3" descr="fig_color_psnr_vs_sigma.png"/>
           <p:cNvPicPr>
             <a:picLocks noChangeAspect="1"/>
           </p:cNvPicPr>
@@ -5372,14 +4990,89 @@
         </p:blipFill>
         <p:spPr>
           <a:xfrm>
-            <a:off x="6172200" y="1371600"/>
-            <a:ext cx="5669280" cy="3042989"/>
+            <a:off x="6172200" y="1143000"/>
+            <a:ext cx="5440680" cy="3280649"/>
           </a:xfrm>
           <a:prstGeom prst="rect">
             <a:avLst/>
           </a:prstGeom>
         </p:spPr>
       </p:pic>
+      <p:sp>
+        <p:nvSpPr>
+          <p:cNvPr id="5" name="TextBox 4"/>
+          <p:cNvSpPr txBox="1"/>
+          <p:nvPr/>
+        </p:nvSpPr>
+        <p:spPr>
+          <a:xfrm>
+            <a:off x="685800" y="4114800"/>
+            <a:ext cx="10835640" cy="1051560"/>
+          </a:xfrm>
+          <a:prstGeom prst="rect">
+            <a:avLst/>
+          </a:prstGeom>
+          <a:noFill/>
+        </p:spPr>
+        <p:txBody>
+          <a:bodyPr wrap="square" anchor="t">
+            <a:spAutoFit/>
+          </a:bodyPr>
+          <a:lstStyle/>
+          <a:p>
+            <a:pPr algn="ctr">
+              <a:defRPr sz="1700" b="1">
+                <a:solidFill>
+                  <a:srgbClr val="D62728"/>
+                </a:solidFill>
+                <a:latin typeface="Calibri"/>
+              </a:defRPr>
+            </a:pPr>
+            <a:r>
+              <a:t>АКСФ в YCbCr: +2,58 дБ к bilateral. Метрики: PSNR из среднего MSE трёх каналов; SSIM/EPI — среднее поканально.</a:t>
+            </a:r>
+          </a:p>
+        </p:txBody>
+      </p:sp>
+      <p:sp>
+        <p:nvSpPr>
+          <p:cNvPr id="6" name="TextBox 5"/>
+          <p:cNvSpPr txBox="1"/>
+          <p:nvPr/>
+        </p:nvSpPr>
+        <p:spPr>
+          <a:xfrm>
+            <a:off x="1097280" y="5349240"/>
+            <a:ext cx="10058400" cy="685800"/>
+          </a:xfrm>
+          <a:prstGeom prst="rect">
+            <a:avLst/>
+          </a:prstGeom>
+          <a:noFill/>
+        </p:spPr>
+        <p:txBody>
+          <a:bodyPr wrap="square">
+            <a:spAutoFit/>
+          </a:bodyPr>
+          <a:lstStyle/>
+          <a:p>
+            <a:pPr>
+              <a:spcAft>
+                <a:spcPts val="900"/>
+              </a:spcAft>
+              <a:defRPr sz="1600" b="0">
+                <a:solidFill>
+                  <a:srgbClr val="444444"/>
+                </a:solidFill>
+                <a:latin typeface="Calibri"/>
+              </a:defRPr>
+            </a:pPr>
+            <a:r>
+              <a:t>• Это не три независимых RGB-фильтра: вес использует яркость и цветность совместно.</a:t>
+            </a:r>
+          </a:p>
+        </p:txBody>
+      </p:sp>
     </p:spTree>
   </p:cSld>
   <p:clrMapOvr>
@@ -5407,7 +5100,7 @@
         <p:spPr>
           <a:xfrm>
             <a:off x="0" y="0"/>
-            <a:ext cx="12191695" cy="914400"/>
+            <a:ext cx="12191695" cy="822960"/>
           </a:xfrm>
           <a:prstGeom prst="rect">
             <a:avLst/>
@@ -5434,11 +5127,11 @@
           </a:fontRef>
         </p:style>
         <p:txBody>
-          <a:bodyPr rtlCol="0" anchor="ctr" lIns="457200" tIns="91440"/>
+          <a:bodyPr rtlCol="0" anchor="ctr" lIns="384048" tIns="73152"/>
           <a:lstStyle/>
           <a:p>
             <a:pPr algn="ctr">
-              <a:defRPr sz="2800" b="1">
+              <a:defRPr sz="2500" b="1">
                 <a:solidFill>
                   <a:srgbClr val="FFFFFF"/>
                 </a:solidFill>
@@ -5446,57 +5139,34 @@
               </a:defRPr>
             </a:pPr>
             <a:r>
-              <a:t>Визуальное сравнение</a:t>
+              <a:t>Выводы и ограничения</a:t>
             </a:r>
           </a:p>
           <a:p>
             <a:pPr>
-              <a:defRPr sz="1400">
+              <a:defRPr sz="1100">
                 <a:solidFill>
                   <a:srgbClr val="C9D6E8"/>
                 </a:solidFill>
+                <a:latin typeface="Calibri"/>
               </a:defRPr>
             </a:pPr>
             <a:r>
-              <a:t>фрагмент изображения «бабуин», σ = 25</a:t>
-            </a:r>
-          </a:p>
-        </p:txBody>
-      </p:sp>
-      <p:pic>
-        <p:nvPicPr>
-          <p:cNvPr id="3" name="Picture 2" descr="fig_visual_baboon.png"/>
-          <p:cNvPicPr>
-            <a:picLocks noChangeAspect="1"/>
-          </p:cNvPicPr>
+              <a:t>что подтверждено, а что требует дальнейшей проверки</a:t>
+            </a:r>
+          </a:p>
+        </p:txBody>
+      </p:sp>
+      <p:sp>
+        <p:nvSpPr>
+          <p:cNvPr id="3" name="TextBox 2"/>
+          <p:cNvSpPr txBox="1"/>
           <p:nvPr/>
-        </p:nvPicPr>
-        <p:blipFill>
-          <a:blip r:embed="rId2"/>
-          <a:stretch>
-            <a:fillRect/>
-          </a:stretch>
-        </p:blipFill>
+        </p:nvSpPr>
         <p:spPr>
           <a:xfrm>
-            <a:off x="548640" y="1554480"/>
-            <a:ext cx="11064240" cy="2581656"/>
-          </a:xfrm>
-          <a:prstGeom prst="rect">
-            <a:avLst/>
-          </a:prstGeom>
-        </p:spPr>
-      </p:pic>
-      <p:sp>
-        <p:nvSpPr>
-          <p:cNvPr id="4" name="TextBox 3"/>
-          <p:cNvSpPr txBox="1"/>
-          <p:nvPr/>
-        </p:nvSpPr>
-        <p:spPr>
-          <a:xfrm>
-            <a:off x="640080" y="4754880"/>
-            <a:ext cx="10972800" cy="1280160"/>
+            <a:off x="685800" y="1143000"/>
+            <a:ext cx="10789920" cy="4206240"/>
           </a:xfrm>
           <a:prstGeom prst="rect">
             <a:avLst/>
@@ -5511,9 +5181,25 @@
           <a:p>
             <a:pPr>
               <a:spcAft>
-                <a:spcPts val="800"/>
+                <a:spcPts val="900"/>
               </a:spcAft>
-              <a:defRPr sz="1600" b="0">
+              <a:defRPr sz="1800" b="1">
+                <a:solidFill>
+                  <a:srgbClr val="D62728"/>
+                </a:solidFill>
+                <a:latin typeface="Calibri"/>
+              </a:defRPr>
+            </a:pPr>
+            <a:r>
+              <a:t>• АКСФ: 30,35 дБ, 0,7978 SSIM, 0,6340 EPI; целевое время 512×512 выполнено.</a:t>
+            </a:r>
+          </a:p>
+          <a:p>
+            <a:pPr>
+              <a:spcAft>
+                <a:spcPts val="900"/>
+              </a:spcAft>
+              <a:defRPr sz="1800" b="0">
                 <a:solidFill>
                   <a:srgbClr val="444444"/>
                 </a:solidFill>
@@ -5521,7 +5207,91 @@
               </a:defRPr>
             </a:pPr>
             <a:r>
-              <a:t>Гауссов фильтр «замыливает» мех; билатеральный кое-где сохраняет шум; АКСФ подавляет шум в гладких участках и сохраняет структуру меха и контур глаза</a:t>
+              <a:t>• Ускоренный public-путь защищён регрессией относительно точного 2D-эталона.</a:t>
+            </a:r>
+          </a:p>
+          <a:p>
+            <a:pPr>
+              <a:spcAft>
+                <a:spcPts val="900"/>
+              </a:spcAft>
+              <a:defRPr sz="1800" b="0">
+                <a:solidFill>
+                  <a:srgbClr val="444444"/>
+                </a:solidFill>
+                <a:latin typeface="Calibri"/>
+              </a:defRPr>
+            </a:pPr>
+            <a:r>
+              <a:t>• Цветной YCbCr и Perona–Malik реализованы самостоятельно и включены в общий протокол.</a:t>
+            </a:r>
+          </a:p>
+          <a:p>
+            <a:pPr>
+              <a:spcAft>
+                <a:spcPts val="900"/>
+              </a:spcAft>
+              <a:defRPr sz="1800" b="0">
+                <a:solidFill>
+                  <a:srgbClr val="444444"/>
+                </a:solidFill>
+                <a:latin typeface="Calibri"/>
+              </a:defRPr>
+            </a:pPr>
+            <a:r>
+              <a:t>• Ограничения: AWGN, ограниченная калибровочная сетка, платформозависимое время, отсутствие испытаний на реальном камерном и импульсном шуме.</a:t>
+            </a:r>
+          </a:p>
+          <a:p>
+            <a:pPr>
+              <a:spcAft>
+                <a:spcPts val="900"/>
+              </a:spcAft>
+              <a:defRPr sz="1800" b="0">
+                <a:solidFill>
+                  <a:srgbClr val="444444"/>
+                </a:solidFill>
+                <a:latin typeface="Calibri"/>
+              </a:defRPr>
+            </a:pPr>
+            <a:r>
+              <a:t>• Следующий шаг: отдельные датасеты/шумовые модели и независимый тестовый набор.</a:t>
+            </a:r>
+          </a:p>
+        </p:txBody>
+      </p:sp>
+      <p:sp>
+        <p:nvSpPr>
+          <p:cNvPr id="4" name="TextBox 3"/>
+          <p:cNvSpPr txBox="1"/>
+          <p:nvPr/>
+        </p:nvSpPr>
+        <p:spPr>
+          <a:xfrm>
+            <a:off x="685800" y="5623560"/>
+            <a:ext cx="10789920" cy="502920"/>
+          </a:xfrm>
+          <a:prstGeom prst="rect">
+            <a:avLst/>
+          </a:prstGeom>
+          <a:noFill/>
+        </p:spPr>
+        <p:txBody>
+          <a:bodyPr wrap="square" anchor="t">
+            <a:spAutoFit/>
+          </a:bodyPr>
+          <a:lstStyle/>
+          <a:p>
+            <a:pPr algn="ctr">
+              <a:defRPr sz="2500" b="1">
+                <a:solidFill>
+                  <a:srgbClr val="1F2D5C"/>
+                </a:solidFill>
+                <a:latin typeface="Calibri"/>
+              </a:defRPr>
+            </a:pPr>
+            <a:r>
+              <a:t>Спасибо за внимание — готов(а) ответить на вопросы.</a:t>
             </a:r>
           </a:p>
         </p:txBody>
@@ -5534,7 +5304,7 @@
 </p:sld>
 </file>
 
-<file path=ppt/slides/slide12.xml><?xml version="1.0" encoding="utf-8"?>
+<file path=ppt/slides/slide2.xml><?xml version="1.0" encoding="utf-8"?>
 <p:sld xmlns:a="http://schemas.openxmlformats.org/drawingml/2006/main" xmlns:p="http://schemas.openxmlformats.org/presentationml/2006/main" xmlns:r="http://schemas.openxmlformats.org/officeDocument/2006/relationships">
   <p:cSld>
     <p:spTree>
@@ -5553,7 +5323,7 @@
         <p:spPr>
           <a:xfrm>
             <a:off x="0" y="0"/>
-            <a:ext cx="12191695" cy="914400"/>
+            <a:ext cx="12191695" cy="822960"/>
           </a:xfrm>
           <a:prstGeom prst="rect">
             <a:avLst/>
@@ -5580,11 +5350,11 @@
           </a:fontRef>
         </p:style>
         <p:txBody>
-          <a:bodyPr rtlCol="0" anchor="ctr" lIns="457200" tIns="91440"/>
+          <a:bodyPr rtlCol="0" anchor="ctr" lIns="384048" tIns="73152"/>
           <a:lstStyle/>
           <a:p>
             <a:pPr algn="ctr">
-              <a:defRPr sz="2800" b="1">
+              <a:defRPr sz="2500" b="1">
                 <a:solidFill>
                   <a:srgbClr val="FFFFFF"/>
                 </a:solidFill>
@@ -5592,33 +5362,58 @@
               </a:defRPr>
             </a:pPr>
             <a:r>
-              <a:t>Надёжность метода</a:t>
+              <a:t>Проблема: шум и потеря деталей</a:t>
             </a:r>
           </a:p>
           <a:p>
             <a:pPr>
-              <a:defRPr sz="1400">
+              <a:defRPr sz="1100">
                 <a:solidFill>
                   <a:srgbClr val="C9D6E8"/>
                 </a:solidFill>
+                <a:latin typeface="Calibri"/>
               </a:defRPr>
             </a:pPr>
             <a:r>
-              <a:t>параметры не переобучены, метод устойчив</a:t>
-            </a:r>
-          </a:p>
-        </p:txBody>
-      </p:sp>
-      <p:sp>
-        <p:nvSpPr>
-          <p:cNvPr id="3" name="TextBox 2"/>
+              <a:t>сглаживание не должно превращать текстуру в размытие</a:t>
+            </a:r>
+          </a:p>
+        </p:txBody>
+      </p:sp>
+      <p:pic>
+        <p:nvPicPr>
+          <p:cNvPr id="3" name="Picture 2" descr="fig_visual_fruits.png"/>
+          <p:cNvPicPr>
+            <a:picLocks noChangeAspect="1"/>
+          </p:cNvPicPr>
+          <p:nvPr/>
+        </p:nvPicPr>
+        <p:blipFill>
+          <a:blip r:embed="rId2"/>
+          <a:stretch>
+            <a:fillRect/>
+          </a:stretch>
+        </p:blipFill>
+        <p:spPr>
+          <a:xfrm>
+            <a:off x="411480" y="1143000"/>
+            <a:ext cx="7406640" cy="1473958"/>
+          </a:xfrm>
+          <a:prstGeom prst="rect">
+            <a:avLst/>
+          </a:prstGeom>
+        </p:spPr>
+      </p:pic>
+      <p:sp>
+        <p:nvSpPr>
+          <p:cNvPr id="4" name="TextBox 3"/>
           <p:cNvSpPr txBox="1"/>
           <p:nvPr/>
         </p:nvSpPr>
         <p:spPr>
           <a:xfrm>
-            <a:off x="640080" y="1143000"/>
-            <a:ext cx="10972800" cy="5120640"/>
+            <a:off x="8046720" y="1371600"/>
+            <a:ext cx="3703320" cy="4480560"/>
           </a:xfrm>
           <a:prstGeom prst="rect">
             <a:avLst/>
@@ -5633,9 +5428,9 @@
           <a:p>
             <a:pPr>
               <a:spcAft>
-                <a:spcPts val="1400"/>
+                <a:spcPts val="900"/>
               </a:spcAft>
-              <a:defRPr sz="1700" b="1">
+              <a:defRPr sz="1600" b="0">
                 <a:solidFill>
                   <a:srgbClr val="444444"/>
                 </a:solidFill>
@@ -5643,15 +5438,15 @@
               </a:defRPr>
             </a:pPr>
             <a:r>
-              <a:t>Параметры выбраны на σ = 20 и 30; проверка на «невиданных» σ = 10 и 40:</a:t>
+              <a:t>• Гауссов шум ухудшает видимость структуры.</a:t>
             </a:r>
           </a:p>
           <a:p>
             <a:pPr>
               <a:spcAft>
-                <a:spcPts val="1400"/>
+                <a:spcPts val="900"/>
               </a:spcAft>
-              <a:defRPr sz="1700" b="0">
+              <a:defRPr sz="1600" b="0">
                 <a:solidFill>
                   <a:srgbClr val="444444"/>
                 </a:solidFill>
@@ -5659,15 +5454,31 @@
               </a:defRPr>
             </a:pPr>
             <a:r>
-              <a:t>• выбранная конфигурация удержала 1-е место (26,93 дБ против 26,75 и 26,66 у альтернатив);</a:t>
+              <a:t>• Обычное среднее уменьшает шум, но размывает границы.</a:t>
             </a:r>
           </a:p>
           <a:p>
             <a:pPr>
               <a:spcAft>
-                <a:spcPts val="1400"/>
+                <a:spcPts val="900"/>
               </a:spcAft>
-              <a:defRPr sz="1700" b="0">
+              <a:defRPr sz="1600" b="1">
+                <a:solidFill>
+                  <a:srgbClr val="D62728"/>
+                </a:solidFill>
+                <a:latin typeface="Calibri"/>
+              </a:defRPr>
+            </a:pPr>
+            <a:r>
+              <a:t>• Нужна сила сглаживания, зависящая от локального содержимого.</a:t>
+            </a:r>
+          </a:p>
+          <a:p>
+            <a:pPr>
+              <a:spcAft>
+                <a:spcPts val="900"/>
+              </a:spcAft>
+              <a:defRPr sz="1600" b="0">
                 <a:solidFill>
                   <a:srgbClr val="444444"/>
                 </a:solidFill>
@@ -5675,39 +5486,7 @@
               </a:defRPr>
             </a:pPr>
             <a:r>
-              <a:t>• Оценка уровня шума на текстурах завышается (для бабуина 14,5 при σ = 10), но качество почти не меняется: подстановка точного σ даёт всего +0,09 дБ</a:t>
-            </a:r>
-          </a:p>
-          <a:p>
-            <a:pPr>
-              <a:spcAft>
-                <a:spcPts val="1400"/>
-              </a:spcAft>
-              <a:defRPr sz="1700" b="1">
-                <a:solidFill>
-                  <a:srgbClr val="444444"/>
-                </a:solidFill>
-                <a:latin typeface="Calibri"/>
-              </a:defRPr>
-            </a:pPr>
-            <a:r>
-              <a:t>• Контроль вклада адаптации: тот же алгоритм с постоянным σr проигрывает 0,52 дБ — успех даёт именно адаптация, а не удачное среднее значение</a:t>
-            </a:r>
-          </a:p>
-          <a:p>
-            <a:pPr>
-              <a:spcAft>
-                <a:spcPts val="1400"/>
-              </a:spcAft>
-              <a:defRPr sz="1700" b="0">
-                <a:solidFill>
-                  <a:srgbClr val="D62728"/>
-                </a:solidFill>
-                <a:latin typeface="Calibri"/>
-              </a:defRPr>
-            </a:pPr>
-            <a:r>
-              <a:t>• Ограничения: в ~11 раз медленнее гауссова фильтра; не предназначен для импульсного шума</a:t>
+              <a:t>• На практике σ шума обычно неизвестна.</a:t>
             </a:r>
           </a:p>
         </p:txBody>
@@ -5720,7 +5499,7 @@
 </p:sld>
 </file>
 
-<file path=ppt/slides/slide13.xml><?xml version="1.0" encoding="utf-8"?>
+<file path=ppt/slides/slide3.xml><?xml version="1.0" encoding="utf-8"?>
 <p:sld xmlns:a="http://schemas.openxmlformats.org/drawingml/2006/main" xmlns:p="http://schemas.openxmlformats.org/presentationml/2006/main" xmlns:r="http://schemas.openxmlformats.org/officeDocument/2006/relationships">
   <p:cSld>
     <p:spTree>
@@ -5739,7 +5518,7 @@
         <p:spPr>
           <a:xfrm>
             <a:off x="0" y="0"/>
-            <a:ext cx="12191695" cy="914400"/>
+            <a:ext cx="12191695" cy="822960"/>
           </a:xfrm>
           <a:prstGeom prst="rect">
             <a:avLst/>
@@ -5766,11 +5545,11 @@
           </a:fontRef>
         </p:style>
         <p:txBody>
-          <a:bodyPr rtlCol="0" anchor="ctr" lIns="457200" tIns="91440"/>
+          <a:bodyPr rtlCol="0" anchor="ctr" lIns="384048" tIns="73152"/>
           <a:lstStyle/>
           <a:p>
             <a:pPr algn="ctr">
-              <a:defRPr sz="2800" b="1">
+              <a:defRPr sz="2500" b="1">
                 <a:solidFill>
                   <a:srgbClr val="FFFFFF"/>
                 </a:solidFill>
@@ -5778,7 +5557,20 @@
               </a:defRPr>
             </a:pPr>
             <a:r>
-              <a:t>Выводы</a:t>
+              <a:t>АКСФ: локальная адаптация σr(p)</a:t>
+            </a:r>
+          </a:p>
+          <a:p>
+            <a:pPr>
+              <a:defRPr sz="1100">
+                <a:solidFill>
+                  <a:srgbClr val="C9D6E8"/>
+                </a:solidFill>
+                <a:latin typeface="Calibri"/>
+              </a:defRPr>
+            </a:pPr>
+            <a:r>
+              <a:t>сначала шум, затем структура, затем билинейное взвешивание</a:t>
             </a:r>
           </a:p>
         </p:txBody>
@@ -5791,8 +5583,8 @@
         </p:nvSpPr>
         <p:spPr>
           <a:xfrm>
-            <a:off x="640080" y="1188720"/>
-            <a:ext cx="10972800" cy="5029200"/>
+            <a:off x="685800" y="1234440"/>
+            <a:ext cx="10789920" cy="502920"/>
           </a:xfrm>
           <a:prstGeom prst="rect">
             <a:avLst/>
@@ -5800,6 +5592,78 @@
           <a:noFill/>
         </p:spPr>
         <p:txBody>
+          <a:bodyPr wrap="square" anchor="t">
+            <a:spAutoFit/>
+          </a:bodyPr>
+          <a:lstStyle/>
+          <a:p>
+            <a:pPr algn="ctr">
+              <a:defRPr sz="2500" b="1">
+                <a:solidFill>
+                  <a:srgbClr val="1F2D5C"/>
+                </a:solidFill>
+                <a:latin typeface="Calibri"/>
+              </a:defRPr>
+            </a:pPr>
+            <a:r>
+              <a:t>A(p) = √max(0, V(p) − σ̂²)</a:t>
+            </a:r>
+          </a:p>
+        </p:txBody>
+      </p:sp>
+      <p:sp>
+        <p:nvSpPr>
+          <p:cNvPr id="4" name="TextBox 3"/>
+          <p:cNvSpPr txBox="1"/>
+          <p:nvPr/>
+        </p:nvSpPr>
+        <p:spPr>
+          <a:xfrm>
+            <a:off x="685800" y="1965960"/>
+            <a:ext cx="10789920" cy="640080"/>
+          </a:xfrm>
+          <a:prstGeom prst="rect">
+            <a:avLst/>
+          </a:prstGeom>
+          <a:noFill/>
+        </p:spPr>
+        <p:txBody>
+          <a:bodyPr wrap="square" anchor="t">
+            <a:spAutoFit/>
+          </a:bodyPr>
+          <a:lstStyle/>
+          <a:p>
+            <a:pPr algn="ctr">
+              <a:defRPr sz="2300" b="1">
+                <a:solidFill>
+                  <a:srgbClr val="D62728"/>
+                </a:solidFill>
+                <a:latin typeface="Calibri"/>
+              </a:defRPr>
+            </a:pPr>
+            <a:r>
+              <a:t>σr(p) = σ̂[kmin + (kmax − kmin) exp(−(A(p)/(cσ̂))²)]</a:t>
+            </a:r>
+          </a:p>
+        </p:txBody>
+      </p:sp>
+      <p:sp>
+        <p:nvSpPr>
+          <p:cNvPr id="5" name="TextBox 4"/>
+          <p:cNvSpPr txBox="1"/>
+          <p:nvPr/>
+        </p:nvSpPr>
+        <p:spPr>
+          <a:xfrm>
+            <a:off x="914400" y="2971800"/>
+            <a:ext cx="5120640" cy="2514600"/>
+          </a:xfrm>
+          <a:prstGeom prst="rect">
+            <a:avLst/>
+          </a:prstGeom>
+          <a:noFill/>
+        </p:spPr>
+        <p:txBody>
           <a:bodyPr wrap="square">
             <a:spAutoFit/>
           </a:bodyPr>
@@ -5807,9 +5671,9 @@
           <a:p>
             <a:pPr>
               <a:spcAft>
-                <a:spcPts val="1300"/>
+                <a:spcPts val="900"/>
               </a:spcAft>
-              <a:defRPr sz="1700" b="0">
+              <a:defRPr sz="1800" b="0">
                 <a:solidFill>
                   <a:srgbClr val="444444"/>
                 </a:solidFill>
@@ -5817,15 +5681,15 @@
               </a:defRPr>
             </a:pPr>
             <a:r>
-              <a:t>• Разработан собственный метод сглаживания — АКСФ: билатеральный фильтр с локально адаптивным σr(p) и автоматической оценкой шума;</a:t>
+              <a:t>• σ̂: автоматическая оценка Иммеркера.</a:t>
             </a:r>
           </a:p>
           <a:p>
             <a:pPr>
               <a:spcAft>
-                <a:spcPts val="1300"/>
+                <a:spcPts val="900"/>
               </a:spcAft>
-              <a:defRPr sz="1700" b="0">
+              <a:defRPr sz="1800" b="0">
                 <a:solidFill>
                   <a:srgbClr val="444444"/>
                 </a:solidFill>
@@ -5833,15 +5697,15 @@
               </a:defRPr>
             </a:pPr>
             <a:r>
-              <a:t>• метод самонастраивается: не требует знания уровня шума и ручного подбора параметров;</a:t>
+              <a:t>• V(p): несмещённая дисперсия в окне 5×5.</a:t>
             </a:r>
           </a:p>
           <a:p>
             <a:pPr>
               <a:spcAft>
-                <a:spcPts val="1300"/>
+                <a:spcPts val="900"/>
               </a:spcAft>
-              <a:defRPr sz="1700" b="0">
+              <a:defRPr sz="1800" b="0">
                 <a:solidFill>
                   <a:srgbClr val="444444"/>
                 </a:solidFill>
@@ -5849,15 +5713,70 @@
               </a:defRPr>
             </a:pPr>
             <a:r>
-              <a:t>• по всем метрикам превосходит классические фильтры (до +3,07 дБ PSNR) и почти достигает «оракула» (−0,26 дБ);</a:t>
-            </a:r>
-          </a:p>
+              <a:t>• A(p): структура после вычитания дисперсии шума.</a:t>
+            </a:r>
+          </a:p>
+        </p:txBody>
+      </p:sp>
+      <p:sp>
+        <p:nvSpPr>
+          <p:cNvPr id="6" name="TextBox 5"/>
+          <p:cNvSpPr txBox="1"/>
+          <p:nvPr/>
+        </p:nvSpPr>
+        <p:spPr>
+          <a:xfrm>
+            <a:off x="6309360" y="2971800"/>
+            <a:ext cx="4937760" cy="2514600"/>
+          </a:xfrm>
+          <a:prstGeom prst="rect">
+            <a:avLst/>
+          </a:prstGeom>
+          <a:noFill/>
+        </p:spPr>
+        <p:txBody>
+          <a:bodyPr wrap="square">
+            <a:spAutoFit/>
+          </a:bodyPr>
+          <a:lstStyle/>
           <a:p>
             <a:pPr>
               <a:spcAft>
-                <a:spcPts val="1300"/>
+                <a:spcPts val="900"/>
               </a:spcAft>
-              <a:defRPr sz="1700" b="0">
+              <a:defRPr sz="1800" b="1">
+                <a:solidFill>
+                  <a:srgbClr val="D62728"/>
+                </a:solidFill>
+                <a:latin typeface="Calibri"/>
+              </a:defRPr>
+            </a:pPr>
+            <a:r>
+              <a:t>• Гладко → σr ближе к kmax·σ̂ → сильное сглаживание.</a:t>
+            </a:r>
+          </a:p>
+          <a:p>
+            <a:pPr>
+              <a:spcAft>
+                <a:spcPts val="900"/>
+              </a:spcAft>
+              <a:defRPr sz="1800" b="1">
+                <a:solidFill>
+                  <a:srgbClr val="D62728"/>
+                </a:solidFill>
+                <a:latin typeface="Calibri"/>
+              </a:defRPr>
+            </a:pPr>
+            <a:r>
+              <a:t>• Контур/текстура → σr ближе к kmin·σ̂ → осторожное сглаживание.</a:t>
+            </a:r>
+          </a:p>
+          <a:p>
+            <a:pPr>
+              <a:spcAft>
+                <a:spcPts val="900"/>
+              </a:spcAft>
+              <a:defRPr sz="1800" b="0">
                 <a:solidFill>
                   <a:srgbClr val="444444"/>
                 </a:solidFill>
@@ -5865,23 +5784,7 @@
               </a:defRPr>
             </a:pPr>
             <a:r>
-              <a:t>• устойчивость подтверждена на уровнях шума, не участвовавших в калибровке;</a:t>
-            </a:r>
-          </a:p>
-          <a:p>
-            <a:pPr>
-              <a:spcAft>
-                <a:spcPts val="1300"/>
-              </a:spcAft>
-              <a:defRPr sz="1700" b="0">
-                <a:solidFill>
-                  <a:srgbClr val="444444"/>
-                </a:solidFill>
-                <a:latin typeface="Calibri"/>
-              </a:defRPr>
-            </a:pPr>
-            <a:r>
-              <a:t>• реализация на Rust: ~1200 строк, все алгоритмы и метрики написаны самостоятельно, эксперимент воспроизводим.</a:t>
+              <a:t>• Пространственный вес — гауссов, окно 11×11.</a:t>
             </a:r>
           </a:p>
         </p:txBody>
@@ -5894,7 +5797,7 @@
 </p:sld>
 </file>
 
-<file path=ppt/slides/slide14.xml><?xml version="1.0" encoding="utf-8"?>
+<file path=ppt/slides/slide4.xml><?xml version="1.0" encoding="utf-8"?>
 <p:sld xmlns:a="http://schemas.openxmlformats.org/drawingml/2006/main" xmlns:p="http://schemas.openxmlformats.org/presentationml/2006/main" xmlns:r="http://schemas.openxmlformats.org/officeDocument/2006/relationships">
   <p:cSld>
     <p:spTree>
@@ -5913,7 +5816,7 @@
         <p:spPr>
           <a:xfrm>
             <a:off x="0" y="0"/>
-            <a:ext cx="12191695" cy="914400"/>
+            <a:ext cx="12191695" cy="822960"/>
           </a:xfrm>
           <a:prstGeom prst="rect">
             <a:avLst/>
@@ -5940,11 +5843,11 @@
           </a:fontRef>
         </p:style>
         <p:txBody>
-          <a:bodyPr rtlCol="0" anchor="ctr" lIns="457200" tIns="91440"/>
+          <a:bodyPr rtlCol="0" anchor="ctr" lIns="384048" tIns="73152"/>
           <a:lstStyle/>
           <a:p>
             <a:pPr algn="ctr">
-              <a:defRPr sz="2800" b="1">
+              <a:defRPr sz="2500" b="1">
                 <a:solidFill>
                   <a:srgbClr val="FFFFFF"/>
                 </a:solidFill>
@@ -5952,7 +5855,20 @@
               </a:defRPr>
             </a:pPr>
             <a:r>
-              <a:t>Развитие метода и вопросы</a:t>
+              <a:t>Калибровка и ускоренная реализация</a:t>
+            </a:r>
+          </a:p>
+          <a:p>
+            <a:pPr>
+              <a:defRPr sz="1100">
+                <a:solidFill>
+                  <a:srgbClr val="C9D6E8"/>
+                </a:solidFill>
+                <a:latin typeface="Calibri"/>
+              </a:defRPr>
+            </a:pPr>
+            <a:r>
+              <a:t>выбор параметров отделён от итогового теста</a:t>
             </a:r>
           </a:p>
         </p:txBody>
@@ -5965,8 +5881,8 @@
         </p:nvSpPr>
         <p:spPr>
           <a:xfrm>
-            <a:off x="640080" y="1188720"/>
-            <a:ext cx="10972800" cy="3291840"/>
+            <a:off x="685800" y="1115568"/>
+            <a:ext cx="10972800" cy="502920"/>
           </a:xfrm>
           <a:prstGeom prst="rect">
             <a:avLst/>
@@ -5974,16 +5890,13 @@
           <a:noFill/>
         </p:spPr>
         <p:txBody>
-          <a:bodyPr wrap="square">
+          <a:bodyPr wrap="square" anchor="t">
             <a:spAutoFit/>
           </a:bodyPr>
           <a:lstStyle/>
           <a:p>
-            <a:pPr>
-              <a:spcAft>
-                <a:spcPts val="1200"/>
-              </a:spcAft>
-              <a:defRPr sz="1600" b="1">
+            <a:pPr algn="ctr">
+              <a:defRPr sz="1900" b="1">
                 <a:solidFill>
                   <a:srgbClr val="D62728"/>
                 </a:solidFill>
@@ -5991,31 +5904,38 @@
               </a:defRPr>
             </a:pPr>
             <a:r>
-              <a:t>Уже доступно: обработка своих цветных фотографий (команда demo, режим --rgb)</a:t>
-            </a:r>
-          </a:p>
+              <a:t>Выбрано на σ=20,30: 2.0,0.85,3.6,1.3,5,2</a:t>
+            </a:r>
+          </a:p>
+        </p:txBody>
+      </p:sp>
+      <p:sp>
+        <p:nvSpPr>
+          <p:cNvPr id="4" name="TextBox 3"/>
+          <p:cNvSpPr txBox="1"/>
+          <p:nvPr/>
+        </p:nvSpPr>
+        <p:spPr>
+          <a:xfrm>
+            <a:off x="731520" y="1828800"/>
+            <a:ext cx="5486400" cy="4206240"/>
+          </a:xfrm>
+          <a:prstGeom prst="rect">
+            <a:avLst/>
+          </a:prstGeom>
+          <a:noFill/>
+        </p:spPr>
+        <p:txBody>
+          <a:bodyPr wrap="square">
+            <a:spAutoFit/>
+          </a:bodyPr>
+          <a:lstStyle/>
           <a:p>
             <a:pPr>
               <a:spcAft>
-                <a:spcPts val="1200"/>
+                <a:spcPts val="900"/>
               </a:spcAft>
-              <a:defRPr sz="1900" b="1">
-                <a:solidFill>
-                  <a:srgbClr val="1F2D5C"/>
-                </a:solidFill>
-                <a:latin typeface="Calibri"/>
-              </a:defRPr>
-            </a:pPr>
-            <a:r>
-              <a:t>Что можно улучшить:</a:t>
-            </a:r>
-          </a:p>
-          <a:p>
-            <a:pPr>
-              <a:spcAft>
-                <a:spcPts val="1200"/>
-              </a:spcAft>
-              <a:defRPr sz="1600" b="0">
+              <a:defRPr sz="1700" b="0">
                 <a:solidFill>
                   <a:srgbClr val="444444"/>
                 </a:solidFill>
@@ -6023,15 +5943,15 @@
               </a:defRPr>
             </a:pPr>
             <a:r>
-              <a:t>• ускорение: сепарабельные вычисления, целочисленная арифметика (сейчас 179 мс → цель &lt; 30 мс);</a:t>
+              <a:t>• Интегральные изображения для карты дисперсии.</a:t>
             </a:r>
           </a:p>
           <a:p>
             <a:pPr>
               <a:spcAft>
-                <a:spcPts val="1200"/>
+                <a:spcPts val="900"/>
               </a:spcAft>
-              <a:defRPr sz="1600" b="0">
+              <a:defRPr sz="1700" b="0">
                 <a:solidFill>
                   <a:srgbClr val="444444"/>
                 </a:solidFill>
@@ -6039,15 +5959,15 @@
               </a:defRPr>
             </a:pPr>
             <a:r>
-              <a:t>• обобщение на цветные изображения (яркость–цветность);</a:t>
+              <a:t>• LUT с линейной интерполяцией для exp(−x).</a:t>
             </a:r>
           </a:p>
           <a:p>
             <a:pPr>
               <a:spcAft>
-                <a:spcPts val="1200"/>
+                <a:spcPts val="900"/>
               </a:spcAft>
-              <a:defRPr sz="1600" b="0">
+              <a:defRPr sz="1700" b="0">
                 <a:solidFill>
                   <a:srgbClr val="444444"/>
                 </a:solidFill>
@@ -6055,15 +5975,261 @@
               </a:defRPr>
             </a:pPr>
             <a:r>
-              <a:t>• перенос идеи адаптивного параметра на вейвлет-фильтрацию и нелокальные средние;</a:t>
+              <a:t>• Два сепарабельных пространственных прохода вместо прямого 2D-ядра.</a:t>
             </a:r>
           </a:p>
           <a:p>
             <a:pPr>
               <a:spcAft>
-                <a:spcPts val="1200"/>
+                <a:spcPts val="900"/>
               </a:spcAft>
-              <a:defRPr sz="1600" b="0">
+              <a:defRPr sz="1700" b="1">
+                <a:solidFill>
+                  <a:srgbClr val="D62728"/>
+                </a:solidFill>
+                <a:latin typeface="Calibri"/>
+              </a:defRPr>
+            </a:pPr>
+            <a:r>
+              <a:t>• На 4 реальных 512×512 сценах: 19,27 мс &lt; 30 мс.</a:t>
+            </a:r>
+          </a:p>
+        </p:txBody>
+      </p:sp>
+      <p:graphicFrame>
+        <p:nvGraphicFramePr>
+          <p:cNvPr id="5" name="Table 4"/>
+          <p:cNvGraphicFramePr>
+            <a:graphicFrameLocks noGrp="1"/>
+          </p:cNvGraphicFramePr>
+          <p:nvPr/>
+        </p:nvGraphicFramePr>
+        <p:xfrm>
+          <a:off x="6629400" y="1965960"/>
+          <a:ext cx="4846320" cy="1920240"/>
+        </p:xfrm>
+        <a:graphic>
+          <a:graphicData uri="http://schemas.openxmlformats.org/drawingml/2006/table">
+            <a:tbl>
+              <a:tblPr firstRow="1" bandRow="1">
+                <a:tableStyleId>{5C22544A-7EE6-4342-B048-85BDC9FD1C3A}</a:tableStyleId>
+              </a:tblPr>
+              <a:tblGrid>
+                <a:gridCol w="2423160"/>
+                <a:gridCol w="2423160"/>
+              </a:tblGrid>
+              <a:tr h="480060">
+                <a:tc>
+                  <a:txBody>
+                    <a:bodyPr/>
+                    <a:lstStyle/>
+                    <a:p>
+                      <a:pPr algn="l">
+                        <a:defRPr sz="1300" b="1">
+                          <a:solidFill>
+                            <a:srgbClr val="FFFFFF"/>
+                          </a:solidFill>
+                          <a:latin typeface="Calibri"/>
+                        </a:defRPr>
+                      </a:pPr>
+                      <a:r>
+                        <a:t>Путь</a:t>
+                      </a:r>
+                    </a:p>
+                  </a:txBody>
+                  <a:tcPr marL="36576" marR="36576" marT="13716" marB="13716">
+                    <a:solidFill>
+                      <a:srgbClr val="1F2D5C"/>
+                    </a:solidFill>
+                  </a:tcPr>
+                </a:tc>
+                <a:tc>
+                  <a:txBody>
+                    <a:bodyPr/>
+                    <a:lstStyle/>
+                    <a:p>
+                      <a:pPr algn="ctr">
+                        <a:defRPr sz="1300" b="1">
+                          <a:solidFill>
+                            <a:srgbClr val="FFFFFF"/>
+                          </a:solidFill>
+                          <a:latin typeface="Calibri"/>
+                        </a:defRPr>
+                      </a:pPr>
+                      <a:r>
+                        <a:t>Время</a:t>
+                      </a:r>
+                    </a:p>
+                  </a:txBody>
+                  <a:tcPr marL="36576" marR="36576" marT="13716" marB="13716">
+                    <a:solidFill>
+                      <a:srgbClr val="1F2D5C"/>
+                    </a:solidFill>
+                  </a:tcPr>
+                </a:tc>
+              </a:tr>
+              <a:tr h="480060">
+                <a:tc>
+                  <a:txBody>
+                    <a:bodyPr/>
+                    <a:lstStyle/>
+                    <a:p>
+                      <a:pPr algn="l">
+                        <a:defRPr sz="1300" b="0">
+                          <a:solidFill>
+                            <a:srgbClr val="444444"/>
+                          </a:solidFill>
+                          <a:latin typeface="Calibri"/>
+                        </a:defRPr>
+                      </a:pPr>
+                      <a:r>
+                        <a:t>Исходный 2D</a:t>
+                      </a:r>
+                    </a:p>
+                  </a:txBody>
+                  <a:tcPr marL="36576" marR="36576" marT="13716" marB="13716"/>
+                </a:tc>
+                <a:tc>
+                  <a:txBody>
+                    <a:bodyPr/>
+                    <a:lstStyle/>
+                    <a:p>
+                      <a:pPr algn="ctr">
+                        <a:defRPr sz="1300" b="0">
+                          <a:solidFill>
+                            <a:srgbClr val="444444"/>
+                          </a:solidFill>
+                          <a:latin typeface="Calibri"/>
+                        </a:defRPr>
+                      </a:pPr>
+                      <a:r>
+                        <a:t>241,9 мс</a:t>
+                      </a:r>
+                    </a:p>
+                  </a:txBody>
+                  <a:tcPr marL="36576" marR="36576" marT="13716" marB="13716"/>
+                </a:tc>
+              </a:tr>
+              <a:tr h="480060">
+                <a:tc>
+                  <a:txBody>
+                    <a:bodyPr/>
+                    <a:lstStyle/>
+                    <a:p>
+                      <a:pPr algn="l">
+                        <a:defRPr sz="1300" b="0">
+                          <a:solidFill>
+                            <a:srgbClr val="444444"/>
+                          </a:solidFill>
+                          <a:latin typeface="Calibri"/>
+                        </a:defRPr>
+                      </a:pPr>
+                      <a:r>
+                        <a:t>Точный ускоренный 2D</a:t>
+                      </a:r>
+                    </a:p>
+                  </a:txBody>
+                  <a:tcPr marL="36576" marR="36576" marT="13716" marB="13716"/>
+                </a:tc>
+                <a:tc>
+                  <a:txBody>
+                    <a:bodyPr/>
+                    <a:lstStyle/>
+                    <a:p>
+                      <a:pPr algn="ctr">
+                        <a:defRPr sz="1300" b="0">
+                          <a:solidFill>
+                            <a:srgbClr val="444444"/>
+                          </a:solidFill>
+                          <a:latin typeface="Calibri"/>
+                        </a:defRPr>
+                      </a:pPr>
+                      <a:r>
+                        <a:t>70,9 мс</a:t>
+                      </a:r>
+                    </a:p>
+                  </a:txBody>
+                  <a:tcPr marL="36576" marR="36576" marT="13716" marB="13716"/>
+                </a:tc>
+              </a:tr>
+              <a:tr h="480060">
+                <a:tc>
+                  <a:txBody>
+                    <a:bodyPr/>
+                    <a:lstStyle/>
+                    <a:p>
+                      <a:pPr algn="l">
+                        <a:defRPr sz="1300" b="1">
+                          <a:solidFill>
+                            <a:srgbClr val="D62728"/>
+                          </a:solidFill>
+                          <a:latin typeface="Calibri"/>
+                        </a:defRPr>
+                      </a:pPr>
+                      <a:r>
+                        <a:t>Сепарабельный public</a:t>
+                      </a:r>
+                    </a:p>
+                  </a:txBody>
+                  <a:tcPr marL="36576" marR="36576" marT="13716" marB="13716">
+                    <a:solidFill>
+                      <a:srgbClr val="EEF2F8"/>
+                    </a:solidFill>
+                  </a:tcPr>
+                </a:tc>
+                <a:tc>
+                  <a:txBody>
+                    <a:bodyPr/>
+                    <a:lstStyle/>
+                    <a:p>
+                      <a:pPr algn="ctr">
+                        <a:defRPr sz="1300" b="1">
+                          <a:solidFill>
+                            <a:srgbClr val="D62728"/>
+                          </a:solidFill>
+                          <a:latin typeface="Calibri"/>
+                        </a:defRPr>
+                      </a:pPr>
+                      <a:r>
+                        <a:t>20,47 мс</a:t>
+                      </a:r>
+                    </a:p>
+                  </a:txBody>
+                  <a:tcPr marL="36576" marR="36576" marT="13716" marB="13716">
+                    <a:solidFill>
+                      <a:srgbClr val="EEF2F8"/>
+                    </a:solidFill>
+                  </a:tcPr>
+                </a:tc>
+              </a:tr>
+            </a:tbl>
+          </a:graphicData>
+        </a:graphic>
+      </p:graphicFrame>
+      <p:sp>
+        <p:nvSpPr>
+          <p:cNvPr id="6" name="TextBox 5"/>
+          <p:cNvSpPr txBox="1"/>
+          <p:nvPr/>
+        </p:nvSpPr>
+        <p:spPr>
+          <a:xfrm>
+            <a:off x="6629400" y="4251960"/>
+            <a:ext cx="4800600" cy="1143000"/>
+          </a:xfrm>
+          <a:prstGeom prst="rect">
+            <a:avLst/>
+          </a:prstGeom>
+          <a:noFill/>
+        </p:spPr>
+        <p:txBody>
+          <a:bodyPr wrap="square" anchor="t">
+            <a:spAutoFit/>
+          </a:bodyPr>
+          <a:lstStyle/>
+          <a:p>
+            <a:pPr algn="ctr">
+              <a:defRPr sz="1500" b="0">
                 <a:solidFill>
                   <a:srgbClr val="444444"/>
                 </a:solidFill>
@@ -6071,56 +6237,7 @@
               </a:defRPr>
             </a:pPr>
             <a:r>
-              <a:t>• добавление обработки импульсного шума (гибрид с медианным фильтром).</a:t>
-            </a:r>
-          </a:p>
-        </p:txBody>
-      </p:sp>
-      <p:sp>
-        <p:nvSpPr>
-          <p:cNvPr id="4" name="TextBox 3"/>
-          <p:cNvSpPr txBox="1"/>
-          <p:nvPr/>
-        </p:nvSpPr>
-        <p:spPr>
-          <a:xfrm>
-            <a:off x="640080" y="4754880"/>
-            <a:ext cx="10972800" cy="1463040"/>
-          </a:xfrm>
-          <a:prstGeom prst="rect">
-            <a:avLst/>
-          </a:prstGeom>
-          <a:noFill/>
-        </p:spPr>
-        <p:txBody>
-          <a:bodyPr wrap="none">
-            <a:spAutoFit/>
-          </a:bodyPr>
-          <a:lstStyle/>
-          <a:p>
-            <a:pPr>
-              <a:defRPr sz="3000" b="1">
-                <a:solidFill>
-                  <a:srgbClr val="D62728"/>
-                </a:solidFill>
-                <a:latin typeface="Calibri"/>
-              </a:defRPr>
-            </a:pPr>
-            <a:r>
-              <a:t>Спасибо за внимание!</a:t>
-            </a:r>
-          </a:p>
-          <a:p>
-            <a:pPr>
-              <a:defRPr sz="1700">
-                <a:solidFill>
-                  <a:srgbClr val="444444"/>
-                </a:solidFill>
-                <a:latin typeface="Calibri"/>
-              </a:defRPr>
-            </a:pPr>
-            <a:r>
-              <a:t>Готов(а) ответить на вопросы</a:t>
+              <a:t>Регрессионный тест: public ACSF не может потерять более 0,05 дБ относительно сохранённой точной 2D-версии при общей σ̂.</a:t>
             </a:r>
           </a:p>
         </p:txBody>
@@ -6133,7 +6250,7 @@
 </p:sld>
 </file>
 
-<file path=ppt/slides/slide2.xml><?xml version="1.0" encoding="utf-8"?>
+<file path=ppt/slides/slide5.xml><?xml version="1.0" encoding="utf-8"?>
 <p:sld xmlns:a="http://schemas.openxmlformats.org/drawingml/2006/main" xmlns:p="http://schemas.openxmlformats.org/presentationml/2006/main" xmlns:r="http://schemas.openxmlformats.org/officeDocument/2006/relationships">
   <p:cSld>
     <p:spTree>
@@ -6152,7 +6269,7 @@
         <p:spPr>
           <a:xfrm>
             <a:off x="0" y="0"/>
-            <a:ext cx="12191695" cy="914400"/>
+            <a:ext cx="12191695" cy="822960"/>
           </a:xfrm>
           <a:prstGeom prst="rect">
             <a:avLst/>
@@ -6179,11 +6296,11 @@
           </a:fontRef>
         </p:style>
         <p:txBody>
-          <a:bodyPr rtlCol="0" anchor="ctr" lIns="457200" tIns="91440"/>
+          <a:bodyPr rtlCol="0" anchor="ctr" lIns="384048" tIns="73152"/>
           <a:lstStyle/>
           <a:p>
             <a:pPr algn="ctr">
-              <a:defRPr sz="2800" b="1">
+              <a:defRPr sz="2500" b="1">
                 <a:solidFill>
                   <a:srgbClr val="FFFFFF"/>
                 </a:solidFill>
@@ -6191,26 +6308,130 @@
               </a:defRPr>
             </a:pPr>
             <a:r>
-              <a:t>Проблема: шум и сглаживание</a:t>
+              <a:t>Честный протокол</a:t>
             </a:r>
           </a:p>
           <a:p>
             <a:pPr>
-              <a:defRPr sz="1400">
+              <a:defRPr sz="1100">
                 <a:solidFill>
                   <a:srgbClr val="C9D6E8"/>
                 </a:solidFill>
+                <a:latin typeface="Calibri"/>
               </a:defRPr>
             </a:pPr>
             <a:r>
-              <a:t>любое усреднение уменьшает шум, но размывает детали</a:t>
+              <a:t>один генератор, один шумный вход и один seed для сравниваемых методов</a:t>
+            </a:r>
+          </a:p>
+        </p:txBody>
+      </p:sp>
+      <p:sp>
+        <p:nvSpPr>
+          <p:cNvPr id="3" name="TextBox 2"/>
+          <p:cNvSpPr txBox="1"/>
+          <p:nvPr/>
+        </p:nvSpPr>
+        <p:spPr>
+          <a:xfrm>
+            <a:off x="731520" y="1234440"/>
+            <a:ext cx="5303520" cy="4937760"/>
+          </a:xfrm>
+          <a:prstGeom prst="rect">
+            <a:avLst/>
+          </a:prstGeom>
+          <a:noFill/>
+        </p:spPr>
+        <p:txBody>
+          <a:bodyPr wrap="square">
+            <a:spAutoFit/>
+          </a:bodyPr>
+          <a:lstStyle/>
+          <a:p>
+            <a:pPr>
+              <a:spcAft>
+                <a:spcPts val="900"/>
+              </a:spcAft>
+              <a:defRPr sz="1600" b="1">
+                <a:solidFill>
+                  <a:srgbClr val="1F2D5C"/>
+                </a:solidFill>
+                <a:latin typeface="Calibri"/>
+              </a:defRPr>
+            </a:pPr>
+            <a:r>
+              <a:t>• 6 сцен: astronaut, baboon, board, fruits, grace_hopper, gradient_circles</a:t>
+            </a:r>
+          </a:p>
+          <a:p>
+            <a:pPr>
+              <a:spcAft>
+                <a:spcPts val="900"/>
+              </a:spcAft>
+              <a:defRPr sz="1600" b="0">
+                <a:solidFill>
+                  <a:srgbClr val="444444"/>
+                </a:solidFill>
+                <a:latin typeface="Calibri"/>
+              </a:defRPr>
+            </a:pPr>
+            <a:r>
+              <a:t>• σ = 5, 10, 15, 20, 30, 40; всего 36 задач на метод.</a:t>
+            </a:r>
+          </a:p>
+          <a:p>
+            <a:pPr>
+              <a:spcAft>
+                <a:spcPts val="900"/>
+              </a:spcAft>
+              <a:defRPr sz="1600" b="0">
+                <a:solidFill>
+                  <a:srgbClr val="444444"/>
+                </a:solidFill>
+                <a:latin typeface="Calibri"/>
+              </a:defRPr>
+            </a:pPr>
+            <a:r>
+              <a:t>• raw, flat-контроль, box, Gaussian, median, bilateral, Perona–Malik, ACSF.</a:t>
+            </a:r>
+          </a:p>
+          <a:p>
+            <a:pPr>
+              <a:spcAft>
+                <a:spcPts val="900"/>
+              </a:spcAft>
+              <a:defRPr sz="1600" b="0">
+                <a:solidFill>
+                  <a:srgbClr val="444444"/>
+                </a:solidFill>
+                <a:latin typeface="Calibri"/>
+              </a:defRPr>
+            </a:pPr>
+            <a:r>
+              <a:t>• «Оракул» bilateral — только диагностическая верхняя граница.</a:t>
+            </a:r>
+          </a:p>
+          <a:p>
+            <a:pPr>
+              <a:spcAft>
+                <a:spcPts val="900"/>
+              </a:spcAft>
+              <a:defRPr sz="1600" b="0">
+                <a:solidFill>
+                  <a:srgbClr val="444444"/>
+                </a:solidFill>
+                <a:latin typeface="Calibri"/>
+              </a:defRPr>
+            </a:pPr>
+            <a:r>
+              <a:t>• PSNR, SSIM, EPI и время; CSV и логи сохраняются workflow-ом.</a:t>
             </a:r>
           </a:p>
         </p:txBody>
       </p:sp>
       <p:pic>
         <p:nvPicPr>
-          <p:cNvPr id="3" name="Picture 2" descr="fig_visual_fruits.png"/>
+          <p:cNvPr id="4" name="Picture 3" descr="fig_activity_map.png"/>
           <p:cNvPicPr>
             <a:picLocks noChangeAspect="1"/>
           </p:cNvPicPr>
@@ -6224,117 +6445,14 @@
         </p:blipFill>
         <p:spPr>
           <a:xfrm>
-            <a:off x="457200" y="1143000"/>
-            <a:ext cx="6949440" cy="1621536"/>
+            <a:off x="6309360" y="1417320"/>
+            <a:ext cx="5303520" cy="2104571"/>
           </a:xfrm>
           <a:prstGeom prst="rect">
             <a:avLst/>
           </a:prstGeom>
         </p:spPr>
       </p:pic>
-      <p:sp>
-        <p:nvSpPr>
-          <p:cNvPr id="4" name="TextBox 3"/>
-          <p:cNvSpPr txBox="1"/>
-          <p:nvPr/>
-        </p:nvSpPr>
-        <p:spPr>
-          <a:xfrm>
-            <a:off x="7680960" y="1234440"/>
-            <a:ext cx="4114800" cy="4572000"/>
-          </a:xfrm>
-          <a:prstGeom prst="rect">
-            <a:avLst/>
-          </a:prstGeom>
-          <a:noFill/>
-        </p:spPr>
-        <p:txBody>
-          <a:bodyPr wrap="square">
-            <a:spAutoFit/>
-          </a:bodyPr>
-          <a:lstStyle/>
-          <a:p>
-            <a:pPr>
-              <a:spcAft>
-                <a:spcPts val="800"/>
-              </a:spcAft>
-              <a:defRPr sz="1600" b="0">
-                <a:solidFill>
-                  <a:srgbClr val="444444"/>
-                </a:solidFill>
-                <a:latin typeface="Calibri"/>
-              </a:defRPr>
-            </a:pPr>
-            <a:r>
-              <a:t>• Шум неизбежен при съёмке, передаче и сжатии изображений</a:t>
-            </a:r>
-          </a:p>
-          <a:p>
-            <a:pPr>
-              <a:spcAft>
-                <a:spcPts val="800"/>
-              </a:spcAft>
-              <a:defRPr sz="1600" b="1">
-                <a:solidFill>
-                  <a:srgbClr val="1F2D5C"/>
-                </a:solidFill>
-                <a:latin typeface="Calibri"/>
-              </a:defRPr>
-            </a:pPr>
-            <a:r>
-              <a:t>Модель: I_шум = I + n,  n ~ N(0, σ²)</a:t>
-            </a:r>
-          </a:p>
-          <a:p>
-            <a:pPr>
-              <a:spcAft>
-                <a:spcPts val="800"/>
-              </a:spcAft>
-              <a:defRPr sz="1600" b="0">
-                <a:solidFill>
-                  <a:srgbClr val="444444"/>
-                </a:solidFill>
-                <a:latin typeface="Calibri"/>
-              </a:defRPr>
-            </a:pPr>
-            <a:r>
-              <a:t>• Простое усреднение подавляет шум, но «замазывает» контуры и мелкую текстуру</a:t>
-            </a:r>
-          </a:p>
-          <a:p>
-            <a:pPr>
-              <a:spcAft>
-                <a:spcPts val="800"/>
-              </a:spcAft>
-              <a:defRPr sz="1600" b="1">
-                <a:solidFill>
-                  <a:srgbClr val="D62728"/>
-                </a:solidFill>
-                <a:latin typeface="Calibri"/>
-              </a:defRPr>
-            </a:pPr>
-            <a:r>
-              <a:t>• Нужны методы, которые сглаживают шум, но сохраняют структуру</a:t>
-            </a:r>
-          </a:p>
-          <a:p>
-            <a:pPr>
-              <a:spcAft>
-                <a:spcPts val="800"/>
-              </a:spcAft>
-              <a:defRPr sz="1600" b="1">
-                <a:solidFill>
-                  <a:srgbClr val="D62728"/>
-                </a:solidFill>
-                <a:latin typeface="Calibri"/>
-              </a:defRPr>
-            </a:pPr>
-            <a:r>
-              <a:t>• На практике уровень шума заранее НЕИЗВЕСТЕН</a:t>
-            </a:r>
-          </a:p>
-        </p:txBody>
-      </p:sp>
     </p:spTree>
   </p:cSld>
   <p:clrMapOvr>
@@ -6343,7 +6461,7 @@
 </p:sld>
 </file>
 
-<file path=ppt/slides/slide3.xml><?xml version="1.0" encoding="utf-8"?>
+<file path=ppt/slides/slide6.xml><?xml version="1.0" encoding="utf-8"?>
 <p:sld xmlns:a="http://schemas.openxmlformats.org/drawingml/2006/main" xmlns:p="http://schemas.openxmlformats.org/presentationml/2006/main" xmlns:r="http://schemas.openxmlformats.org/officeDocument/2006/relationships">
   <p:cSld>
     <p:spTree>
@@ -6362,7 +6480,7 @@
         <p:spPr>
           <a:xfrm>
             <a:off x="0" y="0"/>
-            <a:ext cx="12191695" cy="914400"/>
+            <a:ext cx="12191695" cy="822960"/>
           </a:xfrm>
           <a:prstGeom prst="rect">
             <a:avLst/>
@@ -6389,11 +6507,11 @@
           </a:fontRef>
         </p:style>
         <p:txBody>
-          <a:bodyPr rtlCol="0" anchor="ctr" lIns="457200" tIns="91440"/>
+          <a:bodyPr rtlCol="0" anchor="ctr" lIns="384048" tIns="73152"/>
           <a:lstStyle/>
           <a:p>
             <a:pPr algn="ctr">
-              <a:defRPr sz="2800" b="1">
+              <a:defRPr sz="2500" b="1">
                 <a:solidFill>
                   <a:srgbClr val="FFFFFF"/>
                 </a:solidFill>
@@ -6401,21 +6519,841 @@
               </a:defRPr>
             </a:pPr>
             <a:r>
-              <a:t>Цель и задачи проекта</a:t>
-            </a:r>
-          </a:p>
-        </p:txBody>
-      </p:sp>
-      <p:sp>
-        <p:nvSpPr>
-          <p:cNvPr id="3" name="TextBox 2"/>
+              <a:t>Основные результаты: полутоновый режим</a:t>
+            </a:r>
+          </a:p>
+          <a:p>
+            <a:pPr>
+              <a:defRPr sz="1100">
+                <a:solidFill>
+                  <a:srgbClr val="C9D6E8"/>
+                </a:solidFill>
+                <a:latin typeface="Calibri"/>
+              </a:defRPr>
+            </a:pPr>
+            <a:r>
+              <a:t>среднее по 6 сценам × 6 уровням шума</a:t>
+            </a:r>
+          </a:p>
+        </p:txBody>
+      </p:sp>
+      <p:graphicFrame>
+        <p:nvGraphicFramePr>
+          <p:cNvPr id="3" name="Table 2"/>
+          <p:cNvGraphicFramePr>
+            <a:graphicFrameLocks noGrp="1"/>
+          </p:cNvGraphicFramePr>
+          <p:nvPr/>
+        </p:nvGraphicFramePr>
+        <p:xfrm>
+          <a:off x="411480" y="1188720"/>
+          <a:ext cx="5623560" cy="3246120"/>
+        </p:xfrm>
+        <a:graphic>
+          <a:graphicData uri="http://schemas.openxmlformats.org/drawingml/2006/table">
+            <a:tbl>
+              <a:tblPr firstRow="1" bandRow="1">
+                <a:tableStyleId>{5C22544A-7EE6-4342-B048-85BDC9FD1C3A}</a:tableStyleId>
+              </a:tblPr>
+              <a:tblGrid>
+                <a:gridCol w="1124712"/>
+                <a:gridCol w="1124712"/>
+                <a:gridCol w="1124712"/>
+                <a:gridCol w="1124712"/>
+                <a:gridCol w="1124712"/>
+              </a:tblGrid>
+              <a:tr h="463731">
+                <a:tc>
+                  <a:txBody>
+                    <a:bodyPr/>
+                    <a:lstStyle/>
+                    <a:p>
+                      <a:pPr algn="l">
+                        <a:defRPr sz="1150" b="1">
+                          <a:solidFill>
+                            <a:srgbClr val="FFFFFF"/>
+                          </a:solidFill>
+                          <a:latin typeface="Calibri"/>
+                        </a:defRPr>
+                      </a:pPr>
+                      <a:r>
+                        <a:t>Метод</a:t>
+                      </a:r>
+                    </a:p>
+                  </a:txBody>
+                  <a:tcPr marL="36576" marR="36576" marT="13716" marB="13716">
+                    <a:solidFill>
+                      <a:srgbClr val="1F2D5C"/>
+                    </a:solidFill>
+                  </a:tcPr>
+                </a:tc>
+                <a:tc>
+                  <a:txBody>
+                    <a:bodyPr/>
+                    <a:lstStyle/>
+                    <a:p>
+                      <a:pPr algn="ctr">
+                        <a:defRPr sz="1150" b="1">
+                          <a:solidFill>
+                            <a:srgbClr val="FFFFFF"/>
+                          </a:solidFill>
+                          <a:latin typeface="Calibri"/>
+                        </a:defRPr>
+                      </a:pPr>
+                      <a:r>
+                        <a:t>PSNR</a:t>
+                      </a:r>
+                    </a:p>
+                  </a:txBody>
+                  <a:tcPr marL="36576" marR="36576" marT="13716" marB="13716">
+                    <a:solidFill>
+                      <a:srgbClr val="1F2D5C"/>
+                    </a:solidFill>
+                  </a:tcPr>
+                </a:tc>
+                <a:tc>
+                  <a:txBody>
+                    <a:bodyPr/>
+                    <a:lstStyle/>
+                    <a:p>
+                      <a:pPr algn="ctr">
+                        <a:defRPr sz="1150" b="1">
+                          <a:solidFill>
+                            <a:srgbClr val="FFFFFF"/>
+                          </a:solidFill>
+                          <a:latin typeface="Calibri"/>
+                        </a:defRPr>
+                      </a:pPr>
+                      <a:r>
+                        <a:t>SSIM</a:t>
+                      </a:r>
+                    </a:p>
+                  </a:txBody>
+                  <a:tcPr marL="36576" marR="36576" marT="13716" marB="13716">
+                    <a:solidFill>
+                      <a:srgbClr val="1F2D5C"/>
+                    </a:solidFill>
+                  </a:tcPr>
+                </a:tc>
+                <a:tc>
+                  <a:txBody>
+                    <a:bodyPr/>
+                    <a:lstStyle/>
+                    <a:p>
+                      <a:pPr algn="ctr">
+                        <a:defRPr sz="1150" b="1">
+                          <a:solidFill>
+                            <a:srgbClr val="FFFFFF"/>
+                          </a:solidFill>
+                          <a:latin typeface="Calibri"/>
+                        </a:defRPr>
+                      </a:pPr>
+                      <a:r>
+                        <a:t>EPI</a:t>
+                      </a:r>
+                    </a:p>
+                  </a:txBody>
+                  <a:tcPr marL="36576" marR="36576" marT="13716" marB="13716">
+                    <a:solidFill>
+                      <a:srgbClr val="1F2D5C"/>
+                    </a:solidFill>
+                  </a:tcPr>
+                </a:tc>
+                <a:tc>
+                  <a:txBody>
+                    <a:bodyPr/>
+                    <a:lstStyle/>
+                    <a:p>
+                      <a:pPr algn="ctr">
+                        <a:defRPr sz="1150" b="1">
+                          <a:solidFill>
+                            <a:srgbClr val="FFFFFF"/>
+                          </a:solidFill>
+                          <a:latin typeface="Calibri"/>
+                        </a:defRPr>
+                      </a:pPr>
+                      <a:r>
+                        <a:t>мс</a:t>
+                      </a:r>
+                    </a:p>
+                  </a:txBody>
+                  <a:tcPr marL="36576" marR="36576" marT="13716" marB="13716">
+                    <a:solidFill>
+                      <a:srgbClr val="1F2D5C"/>
+                    </a:solidFill>
+                  </a:tcPr>
+                </a:tc>
+              </a:tr>
+              <a:tr h="463731">
+                <a:tc>
+                  <a:txBody>
+                    <a:bodyPr/>
+                    <a:lstStyle/>
+                    <a:p>
+                      <a:pPr algn="l">
+                        <a:defRPr sz="1150" b="0">
+                          <a:solidFill>
+                            <a:srgbClr val="444444"/>
+                          </a:solidFill>
+                          <a:latin typeface="Calibri"/>
+                        </a:defRPr>
+                      </a:pPr>
+                      <a:r>
+                        <a:t>Гауссов</a:t>
+                      </a:r>
+                    </a:p>
+                  </a:txBody>
+                  <a:tcPr marL="36576" marR="36576" marT="13716" marB="13716"/>
+                </a:tc>
+                <a:tc>
+                  <a:txBody>
+                    <a:bodyPr/>
+                    <a:lstStyle/>
+                    <a:p>
+                      <a:pPr algn="ctr">
+                        <a:defRPr sz="1150" b="0">
+                          <a:solidFill>
+                            <a:srgbClr val="444444"/>
+                          </a:solidFill>
+                          <a:latin typeface="Calibri"/>
+                        </a:defRPr>
+                      </a:pPr>
+                      <a:r>
+                        <a:t>26,19</a:t>
+                      </a:r>
+                    </a:p>
+                  </a:txBody>
+                  <a:tcPr marL="36576" marR="36576" marT="13716" marB="13716"/>
+                </a:tc>
+                <a:tc>
+                  <a:txBody>
+                    <a:bodyPr/>
+                    <a:lstStyle/>
+                    <a:p>
+                      <a:pPr algn="ctr">
+                        <a:defRPr sz="1150" b="0">
+                          <a:solidFill>
+                            <a:srgbClr val="444444"/>
+                          </a:solidFill>
+                          <a:latin typeface="Calibri"/>
+                        </a:defRPr>
+                      </a:pPr>
+                      <a:r>
+                        <a:t>0,6584</a:t>
+                      </a:r>
+                    </a:p>
+                  </a:txBody>
+                  <a:tcPr marL="36576" marR="36576" marT="13716" marB="13716"/>
+                </a:tc>
+                <a:tc>
+                  <a:txBody>
+                    <a:bodyPr/>
+                    <a:lstStyle/>
+                    <a:p>
+                      <a:pPr algn="ctr">
+                        <a:defRPr sz="1150" b="0">
+                          <a:solidFill>
+                            <a:srgbClr val="444444"/>
+                          </a:solidFill>
+                          <a:latin typeface="Calibri"/>
+                        </a:defRPr>
+                      </a:pPr>
+                      <a:r>
+                        <a:t>0,3272</a:t>
+                      </a:r>
+                    </a:p>
+                  </a:txBody>
+                  <a:tcPr marL="36576" marR="36576" marT="13716" marB="13716"/>
+                </a:tc>
+                <a:tc>
+                  <a:txBody>
+                    <a:bodyPr/>
+                    <a:lstStyle/>
+                    <a:p>
+                      <a:pPr algn="ctr">
+                        <a:defRPr sz="1150" b="0">
+                          <a:solidFill>
+                            <a:srgbClr val="444444"/>
+                          </a:solidFill>
+                          <a:latin typeface="Calibri"/>
+                        </a:defRPr>
+                      </a:pPr>
+                      <a:r>
+                        <a:t>3,5</a:t>
+                      </a:r>
+                    </a:p>
+                  </a:txBody>
+                  <a:tcPr marL="36576" marR="36576" marT="13716" marB="13716"/>
+                </a:tc>
+              </a:tr>
+              <a:tr h="463731">
+                <a:tc>
+                  <a:txBody>
+                    <a:bodyPr/>
+                    <a:lstStyle/>
+                    <a:p>
+                      <a:pPr algn="l">
+                        <a:defRPr sz="1150" b="0">
+                          <a:solidFill>
+                            <a:srgbClr val="444444"/>
+                          </a:solidFill>
+                          <a:latin typeface="Calibri"/>
+                        </a:defRPr>
+                      </a:pPr>
+                      <a:r>
+                        <a:t>Перона—Малик</a:t>
+                      </a:r>
+                    </a:p>
+                  </a:txBody>
+                  <a:tcPr marL="36576" marR="36576" marT="13716" marB="13716"/>
+                </a:tc>
+                <a:tc>
+                  <a:txBody>
+                    <a:bodyPr/>
+                    <a:lstStyle/>
+                    <a:p>
+                      <a:pPr algn="ctr">
+                        <a:defRPr sz="1150" b="0">
+                          <a:solidFill>
+                            <a:srgbClr val="444444"/>
+                          </a:solidFill>
+                          <a:latin typeface="Calibri"/>
+                        </a:defRPr>
+                      </a:pPr>
+                      <a:r>
+                        <a:t>29,25</a:t>
+                      </a:r>
+                    </a:p>
+                  </a:txBody>
+                  <a:tcPr marL="36576" marR="36576" marT="13716" marB="13716"/>
+                </a:tc>
+                <a:tc>
+                  <a:txBody>
+                    <a:bodyPr/>
+                    <a:lstStyle/>
+                    <a:p>
+                      <a:pPr algn="ctr">
+                        <a:defRPr sz="1150" b="0">
+                          <a:solidFill>
+                            <a:srgbClr val="444444"/>
+                          </a:solidFill>
+                          <a:latin typeface="Calibri"/>
+                        </a:defRPr>
+                      </a:pPr>
+                      <a:r>
+                        <a:t>0,7633</a:t>
+                      </a:r>
+                    </a:p>
+                  </a:txBody>
+                  <a:tcPr marL="36576" marR="36576" marT="13716" marB="13716"/>
+                </a:tc>
+                <a:tc>
+                  <a:txBody>
+                    <a:bodyPr/>
+                    <a:lstStyle/>
+                    <a:p>
+                      <a:pPr algn="ctr">
+                        <a:defRPr sz="1150" b="0">
+                          <a:solidFill>
+                            <a:srgbClr val="444444"/>
+                          </a:solidFill>
+                          <a:latin typeface="Calibri"/>
+                        </a:defRPr>
+                      </a:pPr>
+                      <a:r>
+                        <a:t>0,5399</a:t>
+                      </a:r>
+                    </a:p>
+                  </a:txBody>
+                  <a:tcPr marL="36576" marR="36576" marT="13716" marB="13716"/>
+                </a:tc>
+                <a:tc>
+                  <a:txBody>
+                    <a:bodyPr/>
+                    <a:lstStyle/>
+                    <a:p>
+                      <a:pPr algn="ctr">
+                        <a:defRPr sz="1150" b="0">
+                          <a:solidFill>
+                            <a:srgbClr val="444444"/>
+                          </a:solidFill>
+                          <a:latin typeface="Calibri"/>
+                        </a:defRPr>
+                      </a:pPr>
+                      <a:r>
+                        <a:t>55,2</a:t>
+                      </a:r>
+                    </a:p>
+                  </a:txBody>
+                  <a:tcPr marL="36576" marR="36576" marT="13716" marB="13716"/>
+                </a:tc>
+              </a:tr>
+              <a:tr h="463731">
+                <a:tc>
+                  <a:txBody>
+                    <a:bodyPr/>
+                    <a:lstStyle/>
+                    <a:p>
+                      <a:pPr algn="l">
+                        <a:defRPr sz="1150" b="0">
+                          <a:solidFill>
+                            <a:srgbClr val="444444"/>
+                          </a:solidFill>
+                          <a:latin typeface="Calibri"/>
+                        </a:defRPr>
+                      </a:pPr>
+                      <a:r>
+                        <a:t>Билатеральный</a:t>
+                      </a:r>
+                    </a:p>
+                  </a:txBody>
+                  <a:tcPr marL="36576" marR="36576" marT="13716" marB="13716"/>
+                </a:tc>
+                <a:tc>
+                  <a:txBody>
+                    <a:bodyPr/>
+                    <a:lstStyle/>
+                    <a:p>
+                      <a:pPr algn="ctr">
+                        <a:defRPr sz="1150" b="0">
+                          <a:solidFill>
+                            <a:srgbClr val="444444"/>
+                          </a:solidFill>
+                          <a:latin typeface="Calibri"/>
+                        </a:defRPr>
+                      </a:pPr>
+                      <a:r>
+                        <a:t>27,25</a:t>
+                      </a:r>
+                    </a:p>
+                  </a:txBody>
+                  <a:tcPr marL="36576" marR="36576" marT="13716" marB="13716"/>
+                </a:tc>
+                <a:tc>
+                  <a:txBody>
+                    <a:bodyPr/>
+                    <a:lstStyle/>
+                    <a:p>
+                      <a:pPr algn="ctr">
+                        <a:defRPr sz="1150" b="0">
+                          <a:solidFill>
+                            <a:srgbClr val="444444"/>
+                          </a:solidFill>
+                          <a:latin typeface="Calibri"/>
+                        </a:defRPr>
+                      </a:pPr>
+                      <a:r>
+                        <a:t>0,5980</a:t>
+                      </a:r>
+                    </a:p>
+                  </a:txBody>
+                  <a:tcPr marL="36576" marR="36576" marT="13716" marB="13716"/>
+                </a:tc>
+                <a:tc>
+                  <a:txBody>
+                    <a:bodyPr/>
+                    <a:lstStyle/>
+                    <a:p>
+                      <a:pPr algn="ctr">
+                        <a:defRPr sz="1150" b="0">
+                          <a:solidFill>
+                            <a:srgbClr val="444444"/>
+                          </a:solidFill>
+                          <a:latin typeface="Calibri"/>
+                        </a:defRPr>
+                      </a:pPr>
+                      <a:r>
+                        <a:t>0,4958</a:t>
+                      </a:r>
+                    </a:p>
+                  </a:txBody>
+                  <a:tcPr marL="36576" marR="36576" marT="13716" marB="13716"/>
+                </a:tc>
+                <a:tc>
+                  <a:txBody>
+                    <a:bodyPr/>
+                    <a:lstStyle/>
+                    <a:p>
+                      <a:pPr algn="ctr">
+                        <a:defRPr sz="1150" b="0">
+                          <a:solidFill>
+                            <a:srgbClr val="444444"/>
+                          </a:solidFill>
+                          <a:latin typeface="Calibri"/>
+                        </a:defRPr>
+                      </a:pPr>
+                      <a:r>
+                        <a:t>64,4</a:t>
+                      </a:r>
+                    </a:p>
+                  </a:txBody>
+                  <a:tcPr marL="36576" marR="36576" marT="13716" marB="13716"/>
+                </a:tc>
+              </a:tr>
+              <a:tr h="463731">
+                <a:tc>
+                  <a:txBody>
+                    <a:bodyPr/>
+                    <a:lstStyle/>
+                    <a:p>
+                      <a:pPr algn="l">
+                        <a:defRPr sz="1150" b="0">
+                          <a:solidFill>
+                            <a:srgbClr val="444444"/>
+                          </a:solidFill>
+                          <a:latin typeface="Calibri"/>
+                        </a:defRPr>
+                      </a:pPr>
+                      <a:r>
+                        <a:t>Билатеральный («оракул»)</a:t>
+                      </a:r>
+                    </a:p>
+                  </a:txBody>
+                  <a:tcPr marL="36576" marR="36576" marT="13716" marB="13716"/>
+                </a:tc>
+                <a:tc>
+                  <a:txBody>
+                    <a:bodyPr/>
+                    <a:lstStyle/>
+                    <a:p>
+                      <a:pPr algn="ctr">
+                        <a:defRPr sz="1150" b="0">
+                          <a:solidFill>
+                            <a:srgbClr val="444444"/>
+                          </a:solidFill>
+                          <a:latin typeface="Calibri"/>
+                        </a:defRPr>
+                      </a:pPr>
+                      <a:r>
+                        <a:t>30,66</a:t>
+                      </a:r>
+                    </a:p>
+                  </a:txBody>
+                  <a:tcPr marL="36576" marR="36576" marT="13716" marB="13716"/>
+                </a:tc>
+                <a:tc>
+                  <a:txBody>
+                    <a:bodyPr/>
+                    <a:lstStyle/>
+                    <a:p>
+                      <a:pPr algn="ctr">
+                        <a:defRPr sz="1150" b="0">
+                          <a:solidFill>
+                            <a:srgbClr val="444444"/>
+                          </a:solidFill>
+                          <a:latin typeface="Calibri"/>
+                        </a:defRPr>
+                      </a:pPr>
+                      <a:r>
+                        <a:t>0,7989</a:t>
+                      </a:r>
+                    </a:p>
+                  </a:txBody>
+                  <a:tcPr marL="36576" marR="36576" marT="13716" marB="13716"/>
+                </a:tc>
+                <a:tc>
+                  <a:txBody>
+                    <a:bodyPr/>
+                    <a:lstStyle/>
+                    <a:p>
+                      <a:pPr algn="ctr">
+                        <a:defRPr sz="1150" b="0">
+                          <a:solidFill>
+                            <a:srgbClr val="444444"/>
+                          </a:solidFill>
+                          <a:latin typeface="Calibri"/>
+                        </a:defRPr>
+                      </a:pPr>
+                      <a:r>
+                        <a:t>0,6018</a:t>
+                      </a:r>
+                    </a:p>
+                  </a:txBody>
+                  <a:tcPr marL="36576" marR="36576" marT="13716" marB="13716"/>
+                </a:tc>
+                <a:tc>
+                  <a:txBody>
+                    <a:bodyPr/>
+                    <a:lstStyle/>
+                    <a:p>
+                      <a:pPr algn="ctr">
+                        <a:defRPr sz="1150" b="0">
+                          <a:solidFill>
+                            <a:srgbClr val="444444"/>
+                          </a:solidFill>
+                          <a:latin typeface="Calibri"/>
+                        </a:defRPr>
+                      </a:pPr>
+                      <a:r>
+                        <a:t>—</a:t>
+                      </a:r>
+                    </a:p>
+                  </a:txBody>
+                  <a:tcPr marL="36576" marR="36576" marT="13716" marB="13716"/>
+                </a:tc>
+              </a:tr>
+              <a:tr h="463731">
+                <a:tc>
+                  <a:txBody>
+                    <a:bodyPr/>
+                    <a:lstStyle/>
+                    <a:p>
+                      <a:pPr algn="l">
+                        <a:defRPr sz="1150" b="0">
+                          <a:solidFill>
+                            <a:srgbClr val="444444"/>
+                          </a:solidFill>
+                          <a:latin typeface="Calibri"/>
+                        </a:defRPr>
+                      </a:pPr>
+                      <a:r>
+                        <a:t>АКСФ без адаптации</a:t>
+                      </a:r>
+                    </a:p>
+                  </a:txBody>
+                  <a:tcPr marL="36576" marR="36576" marT="13716" marB="13716"/>
+                </a:tc>
+                <a:tc>
+                  <a:txBody>
+                    <a:bodyPr/>
+                    <a:lstStyle/>
+                    <a:p>
+                      <a:pPr algn="ctr">
+                        <a:defRPr sz="1150" b="0">
+                          <a:solidFill>
+                            <a:srgbClr val="444444"/>
+                          </a:solidFill>
+                          <a:latin typeface="Calibri"/>
+                        </a:defRPr>
+                      </a:pPr>
+                      <a:r>
+                        <a:t>29,60</a:t>
+                      </a:r>
+                    </a:p>
+                  </a:txBody>
+                  <a:tcPr marL="36576" marR="36576" marT="13716" marB="13716"/>
+                </a:tc>
+                <a:tc>
+                  <a:txBody>
+                    <a:bodyPr/>
+                    <a:lstStyle/>
+                    <a:p>
+                      <a:pPr algn="ctr">
+                        <a:defRPr sz="1150" b="0">
+                          <a:solidFill>
+                            <a:srgbClr val="444444"/>
+                          </a:solidFill>
+                          <a:latin typeface="Calibri"/>
+                        </a:defRPr>
+                      </a:pPr>
+                      <a:r>
+                        <a:t>0,7680</a:t>
+                      </a:r>
+                    </a:p>
+                  </a:txBody>
+                  <a:tcPr marL="36576" marR="36576" marT="13716" marB="13716"/>
+                </a:tc>
+                <a:tc>
+                  <a:txBody>
+                    <a:bodyPr/>
+                    <a:lstStyle/>
+                    <a:p>
+                      <a:pPr algn="ctr">
+                        <a:defRPr sz="1150" b="0">
+                          <a:solidFill>
+                            <a:srgbClr val="444444"/>
+                          </a:solidFill>
+                          <a:latin typeface="Calibri"/>
+                        </a:defRPr>
+                      </a:pPr>
+                      <a:r>
+                        <a:t>0,6005</a:t>
+                      </a:r>
+                    </a:p>
+                  </a:txBody>
+                  <a:tcPr marL="36576" marR="36576" marT="13716" marB="13716"/>
+                </a:tc>
+                <a:tc>
+                  <a:txBody>
+                    <a:bodyPr/>
+                    <a:lstStyle/>
+                    <a:p>
+                      <a:pPr algn="ctr">
+                        <a:defRPr sz="1150" b="0">
+                          <a:solidFill>
+                            <a:srgbClr val="444444"/>
+                          </a:solidFill>
+                          <a:latin typeface="Calibri"/>
+                        </a:defRPr>
+                      </a:pPr>
+                      <a:r>
+                        <a:t>18,3</a:t>
+                      </a:r>
+                    </a:p>
+                  </a:txBody>
+                  <a:tcPr marL="36576" marR="36576" marT="13716" marB="13716"/>
+                </a:tc>
+              </a:tr>
+              <a:tr h="463734">
+                <a:tc>
+                  <a:txBody>
+                    <a:bodyPr/>
+                    <a:lstStyle/>
+                    <a:p>
+                      <a:pPr algn="l">
+                        <a:defRPr sz="1150" b="1">
+                          <a:solidFill>
+                            <a:srgbClr val="D62728"/>
+                          </a:solidFill>
+                          <a:latin typeface="Calibri"/>
+                        </a:defRPr>
+                      </a:pPr>
+                      <a:r>
+                        <a:t>АКСФ</a:t>
+                      </a:r>
+                    </a:p>
+                  </a:txBody>
+                  <a:tcPr marL="36576" marR="36576" marT="13716" marB="13716">
+                    <a:solidFill>
+                      <a:srgbClr val="EEF2F8"/>
+                    </a:solidFill>
+                  </a:tcPr>
+                </a:tc>
+                <a:tc>
+                  <a:txBody>
+                    <a:bodyPr/>
+                    <a:lstStyle/>
+                    <a:p>
+                      <a:pPr algn="ctr">
+                        <a:defRPr sz="1150" b="1">
+                          <a:solidFill>
+                            <a:srgbClr val="D62728"/>
+                          </a:solidFill>
+                          <a:latin typeface="Calibri"/>
+                        </a:defRPr>
+                      </a:pPr>
+                      <a:r>
+                        <a:t>30,35</a:t>
+                      </a:r>
+                    </a:p>
+                  </a:txBody>
+                  <a:tcPr marL="36576" marR="36576" marT="13716" marB="13716">
+                    <a:solidFill>
+                      <a:srgbClr val="EEF2F8"/>
+                    </a:solidFill>
+                  </a:tcPr>
+                </a:tc>
+                <a:tc>
+                  <a:txBody>
+                    <a:bodyPr/>
+                    <a:lstStyle/>
+                    <a:p>
+                      <a:pPr algn="ctr">
+                        <a:defRPr sz="1150" b="1">
+                          <a:solidFill>
+                            <a:srgbClr val="D62728"/>
+                          </a:solidFill>
+                          <a:latin typeface="Calibri"/>
+                        </a:defRPr>
+                      </a:pPr>
+                      <a:r>
+                        <a:t>0,7978</a:t>
+                      </a:r>
+                    </a:p>
+                  </a:txBody>
+                  <a:tcPr marL="36576" marR="36576" marT="13716" marB="13716">
+                    <a:solidFill>
+                      <a:srgbClr val="EEF2F8"/>
+                    </a:solidFill>
+                  </a:tcPr>
+                </a:tc>
+                <a:tc>
+                  <a:txBody>
+                    <a:bodyPr/>
+                    <a:lstStyle/>
+                    <a:p>
+                      <a:pPr algn="ctr">
+                        <a:defRPr sz="1150" b="1">
+                          <a:solidFill>
+                            <a:srgbClr val="D62728"/>
+                          </a:solidFill>
+                          <a:latin typeface="Calibri"/>
+                        </a:defRPr>
+                      </a:pPr>
+                      <a:r>
+                        <a:t>0,6340</a:t>
+                      </a:r>
+                    </a:p>
+                  </a:txBody>
+                  <a:tcPr marL="36576" marR="36576" marT="13716" marB="13716">
+                    <a:solidFill>
+                      <a:srgbClr val="EEF2F8"/>
+                    </a:solidFill>
+                  </a:tcPr>
+                </a:tc>
+                <a:tc>
+                  <a:txBody>
+                    <a:bodyPr/>
+                    <a:lstStyle/>
+                    <a:p>
+                      <a:pPr algn="ctr">
+                        <a:defRPr sz="1150" b="1">
+                          <a:solidFill>
+                            <a:srgbClr val="D62728"/>
+                          </a:solidFill>
+                          <a:latin typeface="Calibri"/>
+                        </a:defRPr>
+                      </a:pPr>
+                      <a:r>
+                        <a:t>19,5</a:t>
+                      </a:r>
+                    </a:p>
+                  </a:txBody>
+                  <a:tcPr marL="36576" marR="36576" marT="13716" marB="13716">
+                    <a:solidFill>
+                      <a:srgbClr val="EEF2F8"/>
+                    </a:solidFill>
+                  </a:tcPr>
+                </a:tc>
+              </a:tr>
+            </a:tbl>
+          </a:graphicData>
+        </a:graphic>
+      </p:graphicFrame>
+      <p:pic>
+        <p:nvPicPr>
+          <p:cNvPr id="4" name="Picture 3" descr="fig_psnr_vs_sigma.png"/>
+          <p:cNvPicPr>
+            <a:picLocks noChangeAspect="1"/>
+          </p:cNvPicPr>
+          <p:nvPr/>
+        </p:nvPicPr>
+        <p:blipFill>
+          <a:blip r:embed="rId2"/>
+          <a:stretch>
+            <a:fillRect/>
+          </a:stretch>
+        </p:blipFill>
+        <p:spPr>
+          <a:xfrm>
+            <a:off x="6263640" y="1216152"/>
+            <a:ext cx="5440680" cy="3280649"/>
+          </a:xfrm>
+          <a:prstGeom prst="rect">
+            <a:avLst/>
+          </a:prstGeom>
+        </p:spPr>
+      </p:pic>
+      <p:sp>
+        <p:nvSpPr>
+          <p:cNvPr id="5" name="TextBox 4"/>
           <p:cNvSpPr txBox="1"/>
           <p:nvPr/>
         </p:nvSpPr>
         <p:spPr>
           <a:xfrm>
-            <a:off x="640080" y="1188720"/>
-            <a:ext cx="10972800" cy="914400"/>
+            <a:off x="594360" y="4800600"/>
+            <a:ext cx="10972800" cy="749808"/>
           </a:xfrm>
           <a:prstGeom prst="rect">
             <a:avLst/>
@@ -6423,143 +7361,21 @@
           <a:noFill/>
         </p:spPr>
         <p:txBody>
-          <a:bodyPr wrap="square">
+          <a:bodyPr wrap="square" anchor="t">
             <a:spAutoFit/>
           </a:bodyPr>
           <a:lstStyle/>
           <a:p>
-            <a:pPr>
-              <a:spcAft>
-                <a:spcPts val="800"/>
-              </a:spcAft>
-              <a:defRPr sz="2000" b="1">
+            <a:pPr algn="ctr">
+              <a:defRPr sz="1800" b="1">
                 <a:solidFill>
-                  <a:srgbClr val="1F2D5C"/>
+                  <a:srgbClr val="D62728"/>
                 </a:solidFill>
                 <a:latin typeface="Calibri"/>
               </a:defRPr>
             </a:pPr>
             <a:r>
-              <a:t>Цель: разработать собственный метод сглаживания, который настраивается автоматически — без знания уровня шума и без ручного подбора параметров</a:t>
-            </a:r>
-          </a:p>
-        </p:txBody>
-      </p:sp>
-      <p:sp>
-        <p:nvSpPr>
-          <p:cNvPr id="4" name="TextBox 3"/>
-          <p:cNvSpPr txBox="1"/>
-          <p:nvPr/>
-        </p:nvSpPr>
-        <p:spPr>
-          <a:xfrm>
-            <a:off x="640080" y="2286000"/>
-            <a:ext cx="10972800" cy="3931920"/>
-          </a:xfrm>
-          <a:prstGeom prst="rect">
-            <a:avLst/>
-          </a:prstGeom>
-          <a:noFill/>
-        </p:spPr>
-        <p:txBody>
-          <a:bodyPr wrap="square">
-            <a:spAutoFit/>
-          </a:bodyPr>
-          <a:lstStyle/>
-          <a:p>
-            <a:pPr>
-              <a:spcAft>
-                <a:spcPts val="1000"/>
-              </a:spcAft>
-              <a:defRPr sz="1800" b="0">
-                <a:solidFill>
-                  <a:srgbClr val="444444"/>
-                </a:solidFill>
-                <a:latin typeface="Calibri"/>
-              </a:defRPr>
-            </a:pPr>
-            <a:r>
-              <a:t>• изучить классические методы и их математические модели;</a:t>
-            </a:r>
-          </a:p>
-          <a:p>
-            <a:pPr>
-              <a:spcAft>
-                <a:spcPts val="1000"/>
-              </a:spcAft>
-              <a:defRPr sz="1800" b="0">
-                <a:solidFill>
-                  <a:srgbClr val="444444"/>
-                </a:solidFill>
-                <a:latin typeface="Calibri"/>
-              </a:defRPr>
-            </a:pPr>
-            <a:r>
-              <a:t>• разработать модификацию фильтра с автоматической адаптацией к уровню шума и локальной структуре;</a:t>
-            </a:r>
-          </a:p>
-          <a:p>
-            <a:pPr>
-              <a:spcAft>
-                <a:spcPts val="1000"/>
-              </a:spcAft>
-              <a:defRPr sz="1800" b="0">
-                <a:solidFill>
-                  <a:srgbClr val="444444"/>
-                </a:solidFill>
-                <a:latin typeface="Calibri"/>
-              </a:defRPr>
-            </a:pPr>
-            <a:r>
-              <a:t>• реализовать метод и методы сравнения на языке Rust;</a:t>
-            </a:r>
-          </a:p>
-          <a:p>
-            <a:pPr>
-              <a:spcAft>
-                <a:spcPts val="1000"/>
-              </a:spcAft>
-              <a:defRPr sz="1800" b="0">
-                <a:solidFill>
-                  <a:srgbClr val="444444"/>
-                </a:solidFill>
-                <a:latin typeface="Calibri"/>
-              </a:defRPr>
-            </a:pPr>
-            <a:r>
-              <a:t>• спланировать и провести эксперимент: 3 изображения × 5 уровней шума × 8 методов;</a:t>
-            </a:r>
-          </a:p>
-          <a:p>
-            <a:pPr>
-              <a:spcAft>
-                <a:spcPts val="1000"/>
-              </a:spcAft>
-              <a:defRPr sz="1800" b="0">
-                <a:solidFill>
-                  <a:srgbClr val="444444"/>
-                </a:solidFill>
-                <a:latin typeface="Calibri"/>
-              </a:defRPr>
-            </a:pPr>
-            <a:r>
-              <a:t>• оценить качество по метрикам PSNR, SSIM, EPI и по времени работы;</a:t>
-            </a:r>
-          </a:p>
-          <a:p>
-            <a:pPr>
-              <a:spcAft>
-                <a:spcPts val="1000"/>
-              </a:spcAft>
-              <a:defRPr sz="1800" b="0">
-                <a:solidFill>
-                  <a:srgbClr val="444444"/>
-                </a:solidFill>
-                <a:latin typeface="Calibri"/>
-              </a:defRPr>
-            </a:pPr>
-            <a:r>
-              <a:t>• честно определить ограничения метода и направления развития.</a:t>
+              <a:t>АКСФ: +3,10 дБ к универсальному bilateral; до «оракула» 0,31 дБ.  Средний PSNR = 30,35 дБ.</a:t>
             </a:r>
           </a:p>
         </p:txBody>
@@ -6572,7 +7388,7 @@
 </p:sld>
 </file>
 
-<file path=ppt/slides/slide4.xml><?xml version="1.0" encoding="utf-8"?>
+<file path=ppt/slides/slide7.xml><?xml version="1.0" encoding="utf-8"?>
 <p:sld xmlns:a="http://schemas.openxmlformats.org/drawingml/2006/main" xmlns:p="http://schemas.openxmlformats.org/presentationml/2006/main" xmlns:r="http://schemas.openxmlformats.org/officeDocument/2006/relationships">
   <p:cSld>
     <p:spTree>
@@ -6591,7 +7407,7 @@
         <p:spPr>
           <a:xfrm>
             <a:off x="0" y="0"/>
-            <a:ext cx="12191695" cy="914400"/>
+            <a:ext cx="12191695" cy="822960"/>
           </a:xfrm>
           <a:prstGeom prst="rect">
             <a:avLst/>
@@ -6618,11 +7434,11 @@
           </a:fontRef>
         </p:style>
         <p:txBody>
-          <a:bodyPr rtlCol="0" anchor="ctr" lIns="457200" tIns="91440"/>
+          <a:bodyPr rtlCol="0" anchor="ctr" lIns="384048" tIns="73152"/>
           <a:lstStyle/>
           <a:p>
             <a:pPr algn="ctr">
-              <a:defRPr sz="2800" b="1">
+              <a:defRPr sz="2500" b="1">
                 <a:solidFill>
                   <a:srgbClr val="FFFFFF"/>
                 </a:solidFill>
@@ -6630,145 +7446,27 @@
               </a:defRPr>
             </a:pPr>
             <a:r>
-              <a:t>Классические методы сглаживания</a:t>
+              <a:t>Что даёт именно адаптация?</a:t>
             </a:r>
           </a:p>
           <a:p>
             <a:pPr>
-              <a:defRPr sz="1400">
+              <a:defRPr sz="1100">
                 <a:solidFill>
                   <a:srgbClr val="C9D6E8"/>
-                </a:solidFill>
-              </a:defRPr>
-            </a:pPr>
-            <a:r>
-              <a:t>и почему их недостаточно</a:t>
-            </a:r>
-          </a:p>
-        </p:txBody>
-      </p:sp>
-      <p:sp>
-        <p:nvSpPr>
-          <p:cNvPr id="3" name="TextBox 2"/>
-          <p:cNvSpPr txBox="1"/>
-          <p:nvPr/>
-        </p:nvSpPr>
-        <p:spPr>
-          <a:xfrm>
-            <a:off x="548640" y="1143000"/>
-            <a:ext cx="5577840" cy="4937760"/>
-          </a:xfrm>
-          <a:prstGeom prst="rect">
-            <a:avLst/>
-          </a:prstGeom>
-          <a:noFill/>
-        </p:spPr>
-        <p:txBody>
-          <a:bodyPr wrap="square">
-            <a:spAutoFit/>
-          </a:bodyPr>
-          <a:lstStyle/>
-          <a:p>
-            <a:pPr>
-              <a:spcAft>
-                <a:spcPts val="800"/>
-              </a:spcAft>
-              <a:defRPr sz="1500" b="1">
-                <a:solidFill>
-                  <a:srgbClr val="444444"/>
                 </a:solidFill>
                 <a:latin typeface="Calibri"/>
               </a:defRPr>
             </a:pPr>
             <a:r>
-              <a:t>Скользящее среднее — среднее по окну k×k:</a:t>
-            </a:r>
-          </a:p>
-          <a:p>
-            <a:pPr>
-              <a:spcAft>
-                <a:spcPts val="800"/>
-              </a:spcAft>
-              <a:defRPr sz="1500" b="0">
-                <a:solidFill>
-                  <a:srgbClr val="1F2D5C"/>
-                </a:solidFill>
-                <a:latin typeface="Calibri"/>
-              </a:defRPr>
-            </a:pPr>
-            <a:r>
-              <a:t>Î(x,y) = (1/|W|) Σ I(x+s, y+t)</a:t>
-            </a:r>
-          </a:p>
-          <a:p>
-            <a:pPr>
-              <a:spcAft>
-                <a:spcPts val="800"/>
-              </a:spcAft>
-              <a:defRPr sz="1500" b="1">
-                <a:solidFill>
-                  <a:srgbClr val="444444"/>
-                </a:solidFill>
-                <a:latin typeface="Calibri"/>
-              </a:defRPr>
-            </a:pPr>
-            <a:r>
-              <a:t>Гауссов фильтр — взвешенное среднее:</a:t>
-            </a:r>
-          </a:p>
-          <a:p>
-            <a:pPr>
-              <a:spcAft>
-                <a:spcPts val="800"/>
-              </a:spcAft>
-              <a:defRPr sz="1500" b="0">
-                <a:solidFill>
-                  <a:srgbClr val="1F2D5C"/>
-                </a:solidFill>
-                <a:latin typeface="Calibri"/>
-              </a:defRPr>
-            </a:pPr>
-            <a:r>
-              <a:t>G(s,t) = exp(−(s²+t²)/2σs²)</a:t>
-            </a:r>
-          </a:p>
-          <a:p>
-            <a:pPr>
-              <a:spcAft>
-                <a:spcPts val="800"/>
-              </a:spcAft>
-              <a:defRPr sz="1500" b="1">
-                <a:solidFill>
-                  <a:srgbClr val="444444"/>
-                </a:solidFill>
-                <a:latin typeface="Calibri"/>
-              </a:defRPr>
-            </a:pPr>
-            <a:r>
-              <a:t>Медианный фильтр — медиана яркостей в окне:</a:t>
-            </a:r>
-          </a:p>
-          <a:p>
-            <a:pPr>
-              <a:spcAft>
-                <a:spcPts val="800"/>
-              </a:spcAft>
-              <a:defRPr sz="1500" b="0">
-                <a:solidFill>
-                  <a:srgbClr val="444444"/>
-                </a:solidFill>
-                <a:latin typeface="Calibri"/>
-              </a:defRPr>
-            </a:pPr>
-            <a:r>
-              <a:t>устойчив к импульсному шуму, но «стирает» мелкую текстуру</a:t>
+              <a:t>контрольный ACSF-flat отличается только отсутствием локальной карты</a:t>
             </a:r>
           </a:p>
         </p:txBody>
       </p:sp>
       <p:pic>
         <p:nvPicPr>
-          <p:cNvPr id="4" name="Picture 3" descr="fig_visual_board.png"/>
+          <p:cNvPr id="3" name="Picture 2" descr="fig_summary_bars.png"/>
           <p:cNvPicPr>
             <a:picLocks noChangeAspect="1"/>
           </p:cNvPicPr>
@@ -6782,8 +7480,8 @@
         </p:blipFill>
         <p:spPr>
           <a:xfrm>
-            <a:off x="6309360" y="1371600"/>
-            <a:ext cx="5486400" cy="1280160"/>
+            <a:off x="411480" y="1051560"/>
+            <a:ext cx="7406640" cy="2331658"/>
           </a:xfrm>
           <a:prstGeom prst="rect">
             <a:avLst/>
@@ -6792,14 +7490,14 @@
       </p:pic>
       <p:sp>
         <p:nvSpPr>
-          <p:cNvPr id="5" name="TextBox 4"/>
+          <p:cNvPr id="4" name="TextBox 3"/>
           <p:cNvSpPr txBox="1"/>
           <p:nvPr/>
         </p:nvSpPr>
         <p:spPr>
           <a:xfrm>
-            <a:off x="6309360" y="4846320"/>
-            <a:ext cx="5486400" cy="1463040"/>
+            <a:off x="8046720" y="1417320"/>
+            <a:ext cx="3611880" cy="4206240"/>
           </a:xfrm>
           <a:prstGeom prst="rect">
             <a:avLst/>
@@ -6814,9 +7512,9 @@
           <a:p>
             <a:pPr>
               <a:spcAft>
-                <a:spcPts val="800"/>
+                <a:spcPts val="900"/>
               </a:spcAft>
-              <a:defRPr sz="1500" b="1">
+              <a:defRPr sz="1600" b="1">
                 <a:solidFill>
                   <a:srgbClr val="D62728"/>
                 </a:solidFill>
@@ -6824,7 +7522,55 @@
               </a:defRPr>
             </a:pPr>
             <a:r>
-              <a:t>Общий недостаток: параметр размытия глобальный и подбирается вручную; сильнее давим шум — сильнее теряем детали</a:t>
+              <a:t>• ACSF − flat = +0,75 дБ PSNR</a:t>
+            </a:r>
+          </a:p>
+          <a:p>
+            <a:pPr>
+              <a:spcAft>
+                <a:spcPts val="900"/>
+              </a:spcAft>
+              <a:defRPr sz="1600" b="1">
+                <a:solidFill>
+                  <a:srgbClr val="D62728"/>
+                </a:solidFill>
+                <a:latin typeface="Calibri"/>
+              </a:defRPr>
+            </a:pPr>
+            <a:r>
+              <a:t>• ACSF − Perona–Malik = +1,10 дБ</a:t>
+            </a:r>
+          </a:p>
+          <a:p>
+            <a:pPr>
+              <a:spcAft>
+                <a:spcPts val="900"/>
+              </a:spcAft>
+              <a:defRPr sz="1600" b="0">
+                <a:solidFill>
+                  <a:srgbClr val="444444"/>
+                </a:solidFill>
+                <a:latin typeface="Calibri"/>
+              </a:defRPr>
+            </a:pPr>
+            <a:r>
+              <a:t>• Рост SSIM и EPI подтверждает, что выигрыш не сводится к размытию.</a:t>
+            </a:r>
+          </a:p>
+          <a:p>
+            <a:pPr>
+              <a:spcAft>
+                <a:spcPts val="900"/>
+              </a:spcAft>
+              <a:defRPr sz="1600" b="0">
+                <a:solidFill>
+                  <a:srgbClr val="444444"/>
+                </a:solidFill>
+                <a:latin typeface="Calibri"/>
+              </a:defRPr>
+            </a:pPr>
+            <a:r>
+              <a:t>• Карта A(p) отделяет полезную структуру от шума.</a:t>
             </a:r>
           </a:p>
         </p:txBody>
@@ -6837,7 +7583,7 @@
 </p:sld>
 </file>
 
-<file path=ppt/slides/slide5.xml><?xml version="1.0" encoding="utf-8"?>
+<file path=ppt/slides/slide8.xml><?xml version="1.0" encoding="utf-8"?>
 <p:sld xmlns:a="http://schemas.openxmlformats.org/drawingml/2006/main" xmlns:p="http://schemas.openxmlformats.org/presentationml/2006/main" xmlns:r="http://schemas.openxmlformats.org/officeDocument/2006/relationships">
   <p:cSld>
     <p:spTree>
@@ -6856,7 +7602,7 @@
         <p:spPr>
           <a:xfrm>
             <a:off x="0" y="0"/>
-            <a:ext cx="12191695" cy="914400"/>
+            <a:ext cx="12191695" cy="822960"/>
           </a:xfrm>
           <a:prstGeom prst="rect">
             <a:avLst/>
@@ -6883,11 +7629,11 @@
           </a:fontRef>
         </p:style>
         <p:txBody>
-          <a:bodyPr rtlCol="0" anchor="ctr" lIns="457200" tIns="91440"/>
+          <a:bodyPr rtlCol="0" anchor="ctr" lIns="384048" tIns="73152"/>
           <a:lstStyle/>
           <a:p>
             <a:pPr algn="ctr">
-              <a:defRPr sz="2800" b="1">
+              <a:defRPr sz="2500" b="1">
                 <a:solidFill>
                   <a:srgbClr val="FFFFFF"/>
                 </a:solidFill>
@@ -6895,33 +7641,58 @@
               </a:defRPr>
             </a:pPr>
             <a:r>
-              <a:t>Билатеральный фильтр: шаг вперёд</a:t>
+              <a:t>Визуальная проверка</a:t>
             </a:r>
           </a:p>
           <a:p>
             <a:pPr>
-              <a:defRPr sz="1400">
+              <a:defRPr sz="1100">
                 <a:solidFill>
                   <a:srgbClr val="C9D6E8"/>
                 </a:solidFill>
+                <a:latin typeface="Calibri"/>
               </a:defRPr>
             </a:pPr>
             <a:r>
-              <a:t>но параметр σr — общий для всего изображения</a:t>
-            </a:r>
-          </a:p>
-        </p:txBody>
-      </p:sp>
-      <p:sp>
-        <p:nvSpPr>
-          <p:cNvPr id="3" name="TextBox 2"/>
+              <a:t>фрагмент «baboon», σ=20; подписи PSNR считываются из CSV</a:t>
+            </a:r>
+          </a:p>
+        </p:txBody>
+      </p:sp>
+      <p:pic>
+        <p:nvPicPr>
+          <p:cNvPr id="3" name="Picture 2" descr="fig_visual_baboon.png"/>
+          <p:cNvPicPr>
+            <a:picLocks noChangeAspect="1"/>
+          </p:cNvPicPr>
+          <p:nvPr/>
+        </p:nvPicPr>
+        <p:blipFill>
+          <a:blip r:embed="rId2"/>
+          <a:stretch>
+            <a:fillRect/>
+          </a:stretch>
+        </p:blipFill>
+        <p:spPr>
+          <a:xfrm>
+            <a:off x="274320" y="1325880"/>
+            <a:ext cx="11612880" cy="2311021"/>
+          </a:xfrm>
+          <a:prstGeom prst="rect">
+            <a:avLst/>
+          </a:prstGeom>
+        </p:spPr>
+      </p:pic>
+      <p:sp>
+        <p:nvSpPr>
+          <p:cNvPr id="4" name="TextBox 3"/>
           <p:cNvSpPr txBox="1"/>
           <p:nvPr/>
         </p:nvSpPr>
         <p:spPr>
           <a:xfrm>
-            <a:off x="640080" y="1097280"/>
-            <a:ext cx="10972800" cy="548640"/>
+            <a:off x="731520" y="5349240"/>
+            <a:ext cx="10744200" cy="640080"/>
           </a:xfrm>
           <a:prstGeom prst="rect">
             <a:avLst/>
@@ -6929,52 +7700,13 @@
           <a:noFill/>
         </p:spPr>
         <p:txBody>
-          <a:bodyPr wrap="square">
+          <a:bodyPr wrap="square" anchor="t">
             <a:spAutoFit/>
           </a:bodyPr>
           <a:lstStyle/>
           <a:p>
             <a:pPr algn="ctr">
-              <a:defRPr sz="2200" i="1">
-                <a:solidFill>
-                  <a:srgbClr val="1F2D5C"/>
-                </a:solidFill>
-                <a:latin typeface="Cambria"/>
-              </a:defRPr>
-            </a:pPr>
-            <a:r>
-              <a:t>w(p,q) = exp(−‖p−q‖²/2σs²) · exp(−(I(p)−I(q))²/2σr²)</a:t>
-            </a:r>
-          </a:p>
-        </p:txBody>
-      </p:sp>
-      <p:sp>
-        <p:nvSpPr>
-          <p:cNvPr id="4" name="TextBox 3"/>
-          <p:cNvSpPr txBox="1"/>
-          <p:nvPr/>
-        </p:nvSpPr>
-        <p:spPr>
-          <a:xfrm>
-            <a:off x="640080" y="1828800"/>
-            <a:ext cx="10972800" cy="4206240"/>
-          </a:xfrm>
-          <a:prstGeom prst="rect">
-            <a:avLst/>
-          </a:prstGeom>
-          <a:noFill/>
-        </p:spPr>
-        <p:txBody>
-          <a:bodyPr wrap="square">
-            <a:spAutoFit/>
-          </a:bodyPr>
-          <a:lstStyle/>
-          <a:p>
-            <a:pPr>
-              <a:spcAft>
-                <a:spcPts val="800"/>
-              </a:spcAft>
-              <a:defRPr sz="1700" b="0">
+              <a:defRPr sz="1600" b="0">
                 <a:solidFill>
                   <a:srgbClr val="444444"/>
                 </a:solidFill>
@@ -6982,87 +7714,7 @@
               </a:defRPr>
             </a:pPr>
             <a:r>
-              <a:t>• пространственный вес: ближние пиксели влияют сильнее;</a:t>
-            </a:r>
-          </a:p>
-          <a:p>
-            <a:pPr>
-              <a:spcAft>
-                <a:spcPts val="800"/>
-              </a:spcAft>
-              <a:defRPr sz="1700" b="0">
-                <a:solidFill>
-                  <a:srgbClr val="444444"/>
-                </a:solidFill>
-                <a:latin typeface="Calibri"/>
-              </a:defRPr>
-            </a:pPr>
-            <a:r>
-              <a:t>• вес по яркости: пиксели с сильно отличающейся яркостью почти не учитываются — контуры сохраняются;</a:t>
-            </a:r>
-          </a:p>
-          <a:p>
-            <a:pPr>
-              <a:spcAft>
-                <a:spcPts val="800"/>
-              </a:spcAft>
-              <a:defRPr sz="1700" b="1">
-                <a:solidFill>
-                  <a:srgbClr val="D62728"/>
-                </a:solidFill>
-                <a:latin typeface="Calibri"/>
-              </a:defRPr>
-            </a:pPr>
-            <a:r>
-              <a:t>• Проблема: единственное σr на всё изображение — компромисс:</a:t>
-            </a:r>
-          </a:p>
-          <a:p>
-            <a:pPr>
-              <a:spcAft>
-                <a:spcPts val="800"/>
-              </a:spcAft>
-              <a:defRPr sz="1700" b="0">
-                <a:solidFill>
-                  <a:srgbClr val="444444"/>
-                </a:solidFill>
-                <a:latin typeface="Calibri"/>
-              </a:defRPr>
-            </a:pPr>
-            <a:r>
-              <a:t>• малое σr → в гладких областях шум остаётся;</a:t>
-            </a:r>
-          </a:p>
-          <a:p>
-            <a:pPr>
-              <a:spcAft>
-                <a:spcPts val="800"/>
-              </a:spcAft>
-              <a:defRPr sz="1700" b="0">
-                <a:solidFill>
-                  <a:srgbClr val="444444"/>
-                </a:solidFill>
-                <a:latin typeface="Calibri"/>
-              </a:defRPr>
-            </a:pPr>
-            <a:r>
-              <a:t>• большое σr → размываются контуры и мелкие детали;</a:t>
-            </a:r>
-          </a:p>
-          <a:p>
-            <a:pPr>
-              <a:spcAft>
-                <a:spcPts val="800"/>
-              </a:spcAft>
-              <a:defRPr sz="1700" b="1">
-                <a:solidFill>
-                  <a:srgbClr val="444444"/>
-                </a:solidFill>
-                <a:latin typeface="Calibri"/>
-              </a:defRPr>
-            </a:pPr>
-            <a:r>
-              <a:t>Эксперимент: при универсальной настройке билатеральный фильтр проигрывает варианту с подбором параметров ~2,3 дБ по PSNR</a:t>
+              <a:t>Визуальный вывод согласуется с метриками: в гладких зонах шум ослаблен, а текстура и контур сохранены лучше, чем при глобальном сглаживании.</a:t>
             </a:r>
           </a:p>
         </p:txBody>
@@ -7075,7 +7727,7 @@
 </p:sld>
 </file>
 
-<file path=ppt/slides/slide6.xml><?xml version="1.0" encoding="utf-8"?>
+<file path=ppt/slides/slide9.xml><?xml version="1.0" encoding="utf-8"?>
 <p:sld xmlns:a="http://schemas.openxmlformats.org/drawingml/2006/main" xmlns:p="http://schemas.openxmlformats.org/presentationml/2006/main" xmlns:r="http://schemas.openxmlformats.org/officeDocument/2006/relationships">
   <p:cSld>
     <p:spTree>
@@ -7094,7 +7746,7 @@
         <p:spPr>
           <a:xfrm>
             <a:off x="0" y="0"/>
-            <a:ext cx="12191695" cy="914400"/>
+            <a:ext cx="12191695" cy="822960"/>
           </a:xfrm>
           <a:prstGeom prst="rect">
             <a:avLst/>
@@ -7121,11 +7773,11 @@
           </a:fontRef>
         </p:style>
         <p:txBody>
-          <a:bodyPr rtlCol="0" anchor="ctr" lIns="457200" tIns="91440"/>
+          <a:bodyPr rtlCol="0" anchor="ctr" lIns="384048" tIns="73152"/>
           <a:lstStyle/>
           <a:p>
             <a:pPr algn="ctr">
-              <a:defRPr sz="2800" b="1">
+              <a:defRPr sz="2500" b="1">
                 <a:solidFill>
                   <a:srgbClr val="FFFFFF"/>
                 </a:solidFill>
@@ -7133,33 +7785,286 @@
               </a:defRPr>
             </a:pPr>
             <a:r>
-              <a:t>Идея собственного метода: АКСФ</a:t>
+              <a:t>Статистическая проверка</a:t>
             </a:r>
           </a:p>
           <a:p>
             <a:pPr>
-              <a:defRPr sz="1400">
+              <a:defRPr sz="1100">
                 <a:solidFill>
                   <a:srgbClr val="C9D6E8"/>
                 </a:solidFill>
+                <a:latin typeface="Calibri"/>
               </a:defRPr>
             </a:pPr>
             <a:r>
-              <a:t>адаптивный контрастно-структурный фильтр</a:t>
-            </a:r>
-          </a:p>
-        </p:txBody>
-      </p:sp>
-      <p:sp>
-        <p:nvSpPr>
-          <p:cNvPr id="3" name="TextBox 2"/>
+              <a:t>30 парных независимых seed-прогонов: ACSF &gt; bilateral</a:t>
+            </a:r>
+          </a:p>
+        </p:txBody>
+      </p:sp>
+      <p:graphicFrame>
+        <p:nvGraphicFramePr>
+          <p:cNvPr id="3" name="Table 2"/>
+          <p:cNvGraphicFramePr>
+            <a:graphicFrameLocks noGrp="1"/>
+          </p:cNvGraphicFramePr>
+          <p:nvPr/>
+        </p:nvGraphicFramePr>
+        <p:xfrm>
+          <a:off x="822960" y="1463040"/>
+          <a:ext cx="4937760" cy="2651760"/>
+        </p:xfrm>
+        <a:graphic>
+          <a:graphicData uri="http://schemas.openxmlformats.org/drawingml/2006/table">
+            <a:tbl>
+              <a:tblPr firstRow="1" bandRow="1">
+                <a:tableStyleId>{5C22544A-7EE6-4342-B048-85BDC9FD1C3A}</a:tableStyleId>
+              </a:tblPr>
+              <a:tblGrid>
+                <a:gridCol w="2468880"/>
+                <a:gridCol w="2468880"/>
+              </a:tblGrid>
+              <a:tr h="530352">
+                <a:tc>
+                  <a:txBody>
+                    <a:bodyPr/>
+                    <a:lstStyle/>
+                    <a:p>
+                      <a:pPr algn="l">
+                        <a:defRPr sz="1400" b="1">
+                          <a:solidFill>
+                            <a:srgbClr val="FFFFFF"/>
+                          </a:solidFill>
+                          <a:latin typeface="Calibri"/>
+                        </a:defRPr>
+                      </a:pPr>
+                      <a:r>
+                        <a:t>Показатель</a:t>
+                      </a:r>
+                    </a:p>
+                  </a:txBody>
+                  <a:tcPr marL="36576" marR="36576" marT="13716" marB="13716">
+                    <a:solidFill>
+                      <a:srgbClr val="1F2D5C"/>
+                    </a:solidFill>
+                  </a:tcPr>
+                </a:tc>
+                <a:tc>
+                  <a:txBody>
+                    <a:bodyPr/>
+                    <a:lstStyle/>
+                    <a:p>
+                      <a:pPr algn="ctr">
+                        <a:defRPr sz="1400" b="1">
+                          <a:solidFill>
+                            <a:srgbClr val="FFFFFF"/>
+                          </a:solidFill>
+                          <a:latin typeface="Calibri"/>
+                        </a:defRPr>
+                      </a:pPr>
+                      <a:r>
+                        <a:t>Значение</a:t>
+                      </a:r>
+                    </a:p>
+                  </a:txBody>
+                  <a:tcPr marL="36576" marR="36576" marT="13716" marB="13716">
+                    <a:solidFill>
+                      <a:srgbClr val="1F2D5C"/>
+                    </a:solidFill>
+                  </a:tcPr>
+                </a:tc>
+              </a:tr>
+              <a:tr h="530352">
+                <a:tc>
+                  <a:txBody>
+                    <a:bodyPr/>
+                    <a:lstStyle/>
+                    <a:p>
+                      <a:pPr algn="l">
+                        <a:defRPr sz="1400" b="0">
+                          <a:solidFill>
+                            <a:srgbClr val="444444"/>
+                          </a:solidFill>
+                          <a:latin typeface="Calibri"/>
+                        </a:defRPr>
+                      </a:pPr>
+                      <a:r>
+                        <a:t>Независимых пар</a:t>
+                      </a:r>
+                    </a:p>
+                  </a:txBody>
+                  <a:tcPr marL="36576" marR="36576" marT="13716" marB="13716"/>
+                </a:tc>
+                <a:tc>
+                  <a:txBody>
+                    <a:bodyPr/>
+                    <a:lstStyle/>
+                    <a:p>
+                      <a:pPr algn="ctr">
+                        <a:defRPr sz="1400" b="0">
+                          <a:solidFill>
+                            <a:srgbClr val="444444"/>
+                          </a:solidFill>
+                          <a:latin typeface="Calibri"/>
+                        </a:defRPr>
+                      </a:pPr>
+                      <a:r>
+                        <a:t>30</a:t>
+                      </a:r>
+                    </a:p>
+                  </a:txBody>
+                  <a:tcPr marL="36576" marR="36576" marT="13716" marB="13716"/>
+                </a:tc>
+              </a:tr>
+              <a:tr h="530352">
+                <a:tc>
+                  <a:txBody>
+                    <a:bodyPr/>
+                    <a:lstStyle/>
+                    <a:p>
+                      <a:pPr algn="l">
+                        <a:defRPr sz="1400" b="0">
+                          <a:solidFill>
+                            <a:srgbClr val="444444"/>
+                          </a:solidFill>
+                          <a:latin typeface="Calibri"/>
+                        </a:defRPr>
+                      </a:pPr>
+                      <a:r>
+                        <a:t>Δ PSNR, дБ</a:t>
+                      </a:r>
+                    </a:p>
+                  </a:txBody>
+                  <a:tcPr marL="36576" marR="36576" marT="13716" marB="13716"/>
+                </a:tc>
+                <a:tc>
+                  <a:txBody>
+                    <a:bodyPr/>
+                    <a:lstStyle/>
+                    <a:p>
+                      <a:pPr algn="ctr">
+                        <a:defRPr sz="1400" b="0">
+                          <a:solidFill>
+                            <a:srgbClr val="444444"/>
+                          </a:solidFill>
+                          <a:latin typeface="Calibri"/>
+                        </a:defRPr>
+                      </a:pPr>
+                      <a:r>
+                        <a:t>+3,099</a:t>
+                      </a:r>
+                    </a:p>
+                  </a:txBody>
+                  <a:tcPr marL="36576" marR="36576" marT="13716" marB="13716"/>
+                </a:tc>
+              </a:tr>
+              <a:tr h="530352">
+                <a:tc>
+                  <a:txBody>
+                    <a:bodyPr/>
+                    <a:lstStyle/>
+                    <a:p>
+                      <a:pPr algn="l">
+                        <a:defRPr sz="1400" b="0">
+                          <a:solidFill>
+                            <a:srgbClr val="444444"/>
+                          </a:solidFill>
+                          <a:latin typeface="Calibri"/>
+                        </a:defRPr>
+                      </a:pPr>
+                      <a:r>
+                        <a:t>t</a:t>
+                      </a:r>
+                    </a:p>
+                  </a:txBody>
+                  <a:tcPr marL="36576" marR="36576" marT="13716" marB="13716"/>
+                </a:tc>
+                <a:tc>
+                  <a:txBody>
+                    <a:bodyPr/>
+                    <a:lstStyle/>
+                    <a:p>
+                      <a:pPr algn="ctr">
+                        <a:defRPr sz="1400" b="0">
+                          <a:solidFill>
+                            <a:srgbClr val="444444"/>
+                          </a:solidFill>
+                          <a:latin typeface="Calibri"/>
+                        </a:defRPr>
+                      </a:pPr>
+                      <a:r>
+                        <a:t>3775.9</a:t>
+                      </a:r>
+                    </a:p>
+                  </a:txBody>
+                  <a:tcPr marL="36576" marR="36576" marT="13716" marB="13716"/>
+                </a:tc>
+              </a:tr>
+              <a:tr h="530352">
+                <a:tc>
+                  <a:txBody>
+                    <a:bodyPr/>
+                    <a:lstStyle/>
+                    <a:p>
+                      <a:pPr algn="l">
+                        <a:defRPr sz="1400" b="1">
+                          <a:solidFill>
+                            <a:srgbClr val="D62728"/>
+                          </a:solidFill>
+                          <a:latin typeface="Calibri"/>
+                        </a:defRPr>
+                      </a:pPr>
+                      <a:r>
+                        <a:t>p, односторонний</a:t>
+                      </a:r>
+                    </a:p>
+                  </a:txBody>
+                  <a:tcPr marL="36576" marR="36576" marT="13716" marB="13716">
+                    <a:solidFill>
+                      <a:srgbClr val="EEF2F8"/>
+                    </a:solidFill>
+                  </a:tcPr>
+                </a:tc>
+                <a:tc>
+                  <a:txBody>
+                    <a:bodyPr/>
+                    <a:lstStyle/>
+                    <a:p>
+                      <a:pPr algn="ctr">
+                        <a:defRPr sz="1400" b="1">
+                          <a:solidFill>
+                            <a:srgbClr val="D62728"/>
+                          </a:solidFill>
+                          <a:latin typeface="Calibri"/>
+                        </a:defRPr>
+                      </a:pPr>
+                      <a:r>
+                        <a:t>2.17e-84</a:t>
+                      </a:r>
+                    </a:p>
+                  </a:txBody>
+                  <a:tcPr marL="36576" marR="36576" marT="13716" marB="13716">
+                    <a:solidFill>
+                      <a:srgbClr val="EEF2F8"/>
+                    </a:solidFill>
+                  </a:tcPr>
+                </a:tc>
+              </a:tr>
+            </a:tbl>
+          </a:graphicData>
+        </a:graphic>
+      </p:graphicFrame>
+      <p:sp>
+        <p:nvSpPr>
+          <p:cNvPr id="4" name="TextBox 3"/>
           <p:cNvSpPr txBox="1"/>
           <p:nvPr/>
         </p:nvSpPr>
         <p:spPr>
           <a:xfrm>
-            <a:off x="640080" y="1143000"/>
-            <a:ext cx="10972800" cy="2011680"/>
+            <a:off x="6217920" y="1463040"/>
+            <a:ext cx="4937760" cy="3383280"/>
           </a:xfrm>
           <a:prstGeom prst="rect">
             <a:avLst/>
@@ -7174,63 +8079,63 @@
           <a:p>
             <a:pPr>
               <a:spcAft>
-                <a:spcPts val="1200"/>
+                <a:spcPts val="900"/>
               </a:spcAft>
-              <a:defRPr sz="2000" b="1">
+              <a:defRPr sz="1800" b="0">
                 <a:solidFill>
-                  <a:srgbClr val="1F2D5C"/>
+                  <a:srgbClr val="444444"/>
                 </a:solidFill>
                 <a:latin typeface="Calibri"/>
               </a:defRPr>
             </a:pPr>
             <a:r>
-              <a:t>• 1. Оценить уровень шума σ̂ автоматически — по самому изображению (метод Иммеркера)</a:t>
+              <a:t>• Единица наблюдения — среднее по 36 задачам одного seed.</a:t>
             </a:r>
           </a:p>
           <a:p>
             <a:pPr>
               <a:spcAft>
-                <a:spcPts val="1200"/>
+                <a:spcPts val="900"/>
               </a:spcAft>
-              <a:defRPr sz="2000" b="1">
+              <a:defRPr sz="1800" b="0">
                 <a:solidFill>
-                  <a:srgbClr val="1F2D5C"/>
+                  <a:srgbClr val="444444"/>
                 </a:solidFill>
                 <a:latin typeface="Calibri"/>
               </a:defRPr>
             </a:pPr>
             <a:r>
-              <a:t>• 2. Построить карту структурной активности A(p) — очищенную от вклада шума</a:t>
+              <a:t>• Сравнение парное: оба метода получают один шумный вход.</a:t>
             </a:r>
           </a:p>
           <a:p>
             <a:pPr>
               <a:spcAft>
-                <a:spcPts val="1200"/>
+                <a:spcPts val="900"/>
               </a:spcAft>
-              <a:defRPr sz="2000" b="1">
+              <a:defRPr sz="1800" b="1">
                 <a:solidFill>
-                  <a:srgbClr val="1F2D5C"/>
+                  <a:srgbClr val="D62728"/>
                 </a:solidFill>
                 <a:latin typeface="Calibri"/>
               </a:defRPr>
             </a:pPr>
             <a:r>
-              <a:t>• 3. Сглаживать с параметром σr(p), который в каждой точке зависит от A(p)</a:t>
-            </a:r>
-          </a:p>
-        </p:txBody>
-      </p:sp>
-      <p:sp>
-        <p:nvSpPr>
-          <p:cNvPr id="4" name="TextBox 3"/>
+              <a:t>• p &lt; 0,05: превосходство АКСФ в данном протоколе статистически подтверждено.</a:t>
+            </a:r>
+          </a:p>
+        </p:txBody>
+      </p:sp>
+      <p:sp>
+        <p:nvSpPr>
+          <p:cNvPr id="5" name="TextBox 4"/>
           <p:cNvSpPr txBox="1"/>
           <p:nvPr/>
         </p:nvSpPr>
         <p:spPr>
           <a:xfrm>
-            <a:off x="640080" y="3017520"/>
-            <a:ext cx="10972800" cy="3108960"/>
+            <a:off x="914400" y="4983480"/>
+            <a:ext cx="10332720" cy="502920"/>
           </a:xfrm>
           <a:prstGeom prst="rect">
             <a:avLst/>
@@ -7238,394 +8143,12 @@
           <a:noFill/>
         </p:spPr>
         <p:txBody>
-          <a:bodyPr wrap="square">
+          <a:bodyPr wrap="square" anchor="t">
             <a:spAutoFit/>
           </a:bodyPr>
           <a:lstStyle/>
           <a:p>
-            <a:pPr>
-              <a:spcAft>
-                <a:spcPts val="1200"/>
-              </a:spcAft>
-              <a:defRPr sz="1700" b="0">
-                <a:solidFill>
-                  <a:srgbClr val="444444"/>
-                </a:solidFill>
-                <a:latin typeface="Calibri"/>
-              </a:defRPr>
-            </a:pPr>
-            <a:r>
-              <a:t>• в гладких областях (A ≈ 0): σr → k_max·σ̂ — сглаживаем смело, шум подавляется;</a:t>
-            </a:r>
-          </a:p>
-          <a:p>
-            <a:pPr>
-              <a:spcAft>
-                <a:spcPts val="1200"/>
-              </a:spcAft>
-              <a:defRPr sz="1700" b="0">
-                <a:solidFill>
-                  <a:srgbClr val="444444"/>
-                </a:solidFill>
-                <a:latin typeface="Calibri"/>
-              </a:defRPr>
-            </a:pPr>
-            <a:r>
-              <a:t>• на контурах и текстурах (A ≫ σ̂): σr → k_min·σ̂ — фильтр «осторожен», структура сохраняется;</a:t>
-            </a:r>
-          </a:p>
-          <a:p>
-            <a:pPr>
-              <a:spcAft>
-                <a:spcPts val="1200"/>
-              </a:spcAft>
-              <a:defRPr sz="1700" b="1">
-                <a:solidFill>
-                  <a:srgbClr val="D62728"/>
-                </a:solidFill>
-                <a:latin typeface="Calibri"/>
-              </a:defRPr>
-            </a:pPr>
-            <a:r>
-              <a:t>→ Коэффициенты k_min, k_max, c — безразмерные (в единицах σ̂), поэтому один набор работает при любом шуме и на любом изображении</a:t>
-            </a:r>
-          </a:p>
-        </p:txBody>
-      </p:sp>
-    </p:spTree>
-  </p:cSld>
-  <p:clrMapOvr>
-    <a:masterClrMapping/>
-  </p:clrMapOvr>
-</p:sld>
-</file>
-
-<file path=ppt/slides/slide7.xml><?xml version="1.0" encoding="utf-8"?>
-<p:sld xmlns:a="http://schemas.openxmlformats.org/drawingml/2006/main" xmlns:p="http://schemas.openxmlformats.org/presentationml/2006/main" xmlns:r="http://schemas.openxmlformats.org/officeDocument/2006/relationships">
-  <p:cSld>
-    <p:spTree>
-      <p:nvGrpSpPr>
-        <p:cNvPr id="1" name=""/>
-        <p:cNvGrpSpPr/>
-        <p:nvPr/>
-      </p:nvGrpSpPr>
-      <p:grpSpPr/>
-      <p:sp>
-        <p:nvSpPr>
-          <p:cNvPr id="2" name="Rectangle 1"/>
-          <p:cNvSpPr/>
-          <p:nvPr/>
-        </p:nvSpPr>
-        <p:spPr>
-          <a:xfrm>
-            <a:off x="0" y="0"/>
-            <a:ext cx="12191695" cy="914400"/>
-          </a:xfrm>
-          <a:prstGeom prst="rect">
-            <a:avLst/>
-          </a:prstGeom>
-          <a:solidFill>
-            <a:srgbClr val="1F2D5C"/>
-          </a:solidFill>
-          <a:ln>
-            <a:noFill/>
-          </a:ln>
-        </p:spPr>
-        <p:style>
-          <a:lnRef idx="1">
-            <a:schemeClr val="accent1"/>
-          </a:lnRef>
-          <a:fillRef idx="3">
-            <a:schemeClr val="accent1"/>
-          </a:fillRef>
-          <a:effectRef idx="2">
-            <a:schemeClr val="accent1"/>
-          </a:effectRef>
-          <a:fontRef idx="minor">
-            <a:schemeClr val="lt1"/>
-          </a:fontRef>
-        </p:style>
-        <p:txBody>
-          <a:bodyPr rtlCol="0" anchor="ctr" lIns="457200" tIns="91440"/>
-          <a:lstStyle/>
-          <a:p>
             <a:pPr algn="ctr">
-              <a:defRPr sz="2800" b="1">
-                <a:solidFill>
-                  <a:srgbClr val="FFFFFF"/>
-                </a:solidFill>
-                <a:latin typeface="Calibri"/>
-              </a:defRPr>
-            </a:pPr>
-            <a:r>
-              <a:t>АКСФ: математическая модель</a:t>
-            </a:r>
-          </a:p>
-          <a:p>
-            <a:pPr>
-              <a:defRPr sz="1400">
-                <a:solidFill>
-                  <a:srgbClr val="C9D6E8"/>
-                </a:solidFill>
-              </a:defRPr>
-            </a:pPr>
-            <a:r>
-              <a:t>три формулы — три шага метода</a:t>
-            </a:r>
-          </a:p>
-        </p:txBody>
-      </p:sp>
-      <p:sp>
-        <p:nvSpPr>
-          <p:cNvPr id="3" name="TextBox 2"/>
-          <p:cNvSpPr txBox="1"/>
-          <p:nvPr/>
-        </p:nvSpPr>
-        <p:spPr>
-          <a:xfrm>
-            <a:off x="640080" y="1051560"/>
-            <a:ext cx="10972800" cy="457200"/>
-          </a:xfrm>
-          <a:prstGeom prst="rect">
-            <a:avLst/>
-          </a:prstGeom>
-          <a:noFill/>
-        </p:spPr>
-        <p:txBody>
-          <a:bodyPr wrap="square">
-            <a:spAutoFit/>
-          </a:bodyPr>
-          <a:lstStyle/>
-          <a:p>
-            <a:pPr>
-              <a:spcAft>
-                <a:spcPts val="800"/>
-              </a:spcAft>
-              <a:defRPr sz="1700" b="1">
-                <a:solidFill>
-                  <a:srgbClr val="1F2D5C"/>
-                </a:solidFill>
-                <a:latin typeface="Calibri"/>
-              </a:defRPr>
-            </a:pPr>
-            <a:r>
-              <a:t>Шаг 1. Оценка уровня шума (Иммеркер, 1996):</a:t>
-            </a:r>
-          </a:p>
-        </p:txBody>
-      </p:sp>
-      <p:sp>
-        <p:nvSpPr>
-          <p:cNvPr id="4" name="TextBox 3"/>
-          <p:cNvSpPr txBox="1"/>
-          <p:nvPr/>
-        </p:nvSpPr>
-        <p:spPr>
-          <a:xfrm>
-            <a:off x="640080" y="1481328"/>
-            <a:ext cx="10972800" cy="548640"/>
-          </a:xfrm>
-          <a:prstGeom prst="rect">
-            <a:avLst/>
-          </a:prstGeom>
-          <a:noFill/>
-        </p:spPr>
-        <p:txBody>
-          <a:bodyPr wrap="square">
-            <a:spAutoFit/>
-          </a:bodyPr>
-          <a:lstStyle/>
-          <a:p>
-            <a:pPr algn="ctr">
-              <a:defRPr sz="1800" i="1">
-                <a:solidFill>
-                  <a:srgbClr val="1F2D5C"/>
-                </a:solidFill>
-                <a:latin typeface="Cambria"/>
-              </a:defRPr>
-            </a:pPr>
-            <a:r>
-              <a:t>σ̂ = sqrt(π/2) · Σ|I ∗ L| / (6·(W−2)·(H−2)),   L = [1 −2 1; −2 4 −2; 1 −2 1]</a:t>
-            </a:r>
-          </a:p>
-        </p:txBody>
-      </p:sp>
-      <p:sp>
-        <p:nvSpPr>
-          <p:cNvPr id="5" name="TextBox 4"/>
-          <p:cNvSpPr txBox="1"/>
-          <p:nvPr/>
-        </p:nvSpPr>
-        <p:spPr>
-          <a:xfrm>
-            <a:off x="640080" y="2148840"/>
-            <a:ext cx="10972800" cy="457200"/>
-          </a:xfrm>
-          <a:prstGeom prst="rect">
-            <a:avLst/>
-          </a:prstGeom>
-          <a:noFill/>
-        </p:spPr>
-        <p:txBody>
-          <a:bodyPr wrap="square">
-            <a:spAutoFit/>
-          </a:bodyPr>
-          <a:lstStyle/>
-          <a:p>
-            <a:pPr>
-              <a:spcAft>
-                <a:spcPts val="800"/>
-              </a:spcAft>
-              <a:defRPr sz="1700" b="1">
-                <a:solidFill>
-                  <a:srgbClr val="1F2D5C"/>
-                </a:solidFill>
-                <a:latin typeface="Calibri"/>
-              </a:defRPr>
-            </a:pPr>
-            <a:r>
-              <a:t>Шаг 2. Карта структурной активности (дисперсия минус дисперсия шума):</a:t>
-            </a:r>
-          </a:p>
-        </p:txBody>
-      </p:sp>
-      <p:sp>
-        <p:nvSpPr>
-          <p:cNvPr id="6" name="TextBox 5"/>
-          <p:cNvSpPr txBox="1"/>
-          <p:nvPr/>
-        </p:nvSpPr>
-        <p:spPr>
-          <a:xfrm>
-            <a:off x="640080" y="2578608"/>
-            <a:ext cx="10972800" cy="548640"/>
-          </a:xfrm>
-          <a:prstGeom prst="rect">
-            <a:avLst/>
-          </a:prstGeom>
-          <a:noFill/>
-        </p:spPr>
-        <p:txBody>
-          <a:bodyPr wrap="square">
-            <a:spAutoFit/>
-          </a:bodyPr>
-          <a:lstStyle/>
-          <a:p>
-            <a:pPr algn="ctr">
-              <a:defRPr sz="2000" i="1">
-                <a:solidFill>
-                  <a:srgbClr val="1F2D5C"/>
-                </a:solidFill>
-                <a:latin typeface="Cambria"/>
-              </a:defRPr>
-            </a:pPr>
-            <a:r>
-              <a:t>A(p) = sqrt( max(0, V(p) − σ̂²) )</a:t>
-            </a:r>
-          </a:p>
-        </p:txBody>
-      </p:sp>
-      <p:sp>
-        <p:nvSpPr>
-          <p:cNvPr id="7" name="TextBox 6"/>
-          <p:cNvSpPr txBox="1"/>
-          <p:nvPr/>
-        </p:nvSpPr>
-        <p:spPr>
-          <a:xfrm>
-            <a:off x="640080" y="3246120"/>
-            <a:ext cx="10972800" cy="457200"/>
-          </a:xfrm>
-          <a:prstGeom prst="rect">
-            <a:avLst/>
-          </a:prstGeom>
-          <a:noFill/>
-        </p:spPr>
-        <p:txBody>
-          <a:bodyPr wrap="square">
-            <a:spAutoFit/>
-          </a:bodyPr>
-          <a:lstStyle/>
-          <a:p>
-            <a:pPr>
-              <a:spcAft>
-                <a:spcPts val="800"/>
-              </a:spcAft>
-              <a:defRPr sz="1700" b="1">
-                <a:solidFill>
-                  <a:srgbClr val="1F2D5C"/>
-                </a:solidFill>
-                <a:latin typeface="Calibri"/>
-              </a:defRPr>
-            </a:pPr>
-            <a:r>
-              <a:t>Шаг 3. Адаптивный параметр сглаживания:</a:t>
-            </a:r>
-          </a:p>
-        </p:txBody>
-      </p:sp>
-      <p:sp>
-        <p:nvSpPr>
-          <p:cNvPr id="8" name="TextBox 7"/>
-          <p:cNvSpPr txBox="1"/>
-          <p:nvPr/>
-        </p:nvSpPr>
-        <p:spPr>
-          <a:xfrm>
-            <a:off x="640080" y="3657600"/>
-            <a:ext cx="10972800" cy="548640"/>
-          </a:xfrm>
-          <a:prstGeom prst="rect">
-            <a:avLst/>
-          </a:prstGeom>
-          <a:noFill/>
-        </p:spPr>
-        <p:txBody>
-          <a:bodyPr wrap="square">
-            <a:spAutoFit/>
-          </a:bodyPr>
-          <a:lstStyle/>
-          <a:p>
-            <a:pPr algn="ctr">
-              <a:defRPr sz="2000" i="1">
-                <a:solidFill>
-                  <a:srgbClr val="D62728"/>
-                </a:solidFill>
-                <a:latin typeface="Cambria"/>
-              </a:defRPr>
-            </a:pPr>
-            <a:r>
-              <a:t>σr(p) = σ̂ · ( k_min + (k_max − k_min) · exp( −(A(p)/(c·σ̂))² ) )</a:t>
-            </a:r>
-          </a:p>
-        </p:txBody>
-      </p:sp>
-      <p:sp>
-        <p:nvSpPr>
-          <p:cNvPr id="9" name="TextBox 8"/>
-          <p:cNvSpPr txBox="1"/>
-          <p:nvPr/>
-        </p:nvSpPr>
-        <p:spPr>
-          <a:xfrm>
-            <a:off x="640080" y="4434840"/>
-            <a:ext cx="10972800" cy="2011680"/>
-          </a:xfrm>
-          <a:prstGeom prst="rect">
-            <a:avLst/>
-          </a:prstGeom>
-          <a:noFill/>
-        </p:spPr>
-        <p:txBody>
-          <a:bodyPr wrap="square">
-            <a:spAutoFit/>
-          </a:bodyPr>
-          <a:lstStyle/>
-          <a:p>
-            <a:pPr>
-              <a:spcAft>
-                <a:spcPts val="600"/>
-              </a:spcAft>
               <a:defRPr sz="1600" b="0">
                 <a:solidFill>
                   <a:srgbClr val="444444"/>
@@ -7634,490 +8157,7 @@
               </a:defRPr>
             </a:pPr>
             <a:r>
-              <a:t>• σs = 2,0    k_min = 0,7    k_max = 3,2    c = 1,2    окно 11×11</a:t>
-            </a:r>
-          </a:p>
-          <a:p>
-            <a:pPr>
-              <a:spcAft>
-                <a:spcPts val="600"/>
-              </a:spcAft>
-              <a:defRPr sz="1600" b="0">
-                <a:solidFill>
-                  <a:srgbClr val="444444"/>
-                </a:solidFill>
-                <a:latin typeface="Calibri"/>
-              </a:defRPr>
-            </a:pPr>
-            <a:r>
-              <a:t>• Все параметры выбраны однократно по уровням шума σ = 20 и 30 и далее не меняются</a:t>
-            </a:r>
-          </a:p>
-        </p:txBody>
-      </p:sp>
-    </p:spTree>
-  </p:cSld>
-  <p:clrMapOvr>
-    <a:masterClrMapping/>
-  </p:clrMapOvr>
-</p:sld>
-</file>
-
-<file path=ppt/slides/slide8.xml><?xml version="1.0" encoding="utf-8"?>
-<p:sld xmlns:a="http://schemas.openxmlformats.org/drawingml/2006/main" xmlns:p="http://schemas.openxmlformats.org/presentationml/2006/main" xmlns:r="http://schemas.openxmlformats.org/officeDocument/2006/relationships">
-  <p:cSld>
-    <p:spTree>
-      <p:nvGrpSpPr>
-        <p:cNvPr id="1" name=""/>
-        <p:cNvGrpSpPr/>
-        <p:nvPr/>
-      </p:nvGrpSpPr>
-      <p:grpSpPr/>
-      <p:sp>
-        <p:nvSpPr>
-          <p:cNvPr id="2" name="Rectangle 1"/>
-          <p:cNvSpPr/>
-          <p:nvPr/>
-        </p:nvSpPr>
-        <p:spPr>
-          <a:xfrm>
-            <a:off x="0" y="0"/>
-            <a:ext cx="12191695" cy="914400"/>
-          </a:xfrm>
-          <a:prstGeom prst="rect">
-            <a:avLst/>
-          </a:prstGeom>
-          <a:solidFill>
-            <a:srgbClr val="1F2D5C"/>
-          </a:solidFill>
-          <a:ln>
-            <a:noFill/>
-          </a:ln>
-        </p:spPr>
-        <p:style>
-          <a:lnRef idx="1">
-            <a:schemeClr val="accent1"/>
-          </a:lnRef>
-          <a:fillRef idx="3">
-            <a:schemeClr val="accent1"/>
-          </a:fillRef>
-          <a:effectRef idx="2">
-            <a:schemeClr val="accent1"/>
-          </a:effectRef>
-          <a:fontRef idx="minor">
-            <a:schemeClr val="lt1"/>
-          </a:fontRef>
-        </p:style>
-        <p:txBody>
-          <a:bodyPr rtlCol="0" anchor="ctr" lIns="457200" tIns="91440"/>
-          <a:lstStyle/>
-          <a:p>
-            <a:pPr algn="ctr">
-              <a:defRPr sz="2800" b="1">
-                <a:solidFill>
-                  <a:srgbClr val="FFFFFF"/>
-                </a:solidFill>
-                <a:latin typeface="Calibri"/>
-              </a:defRPr>
-            </a:pPr>
-            <a:r>
-              <a:t>Как работает адаптация</a:t>
-            </a:r>
-          </a:p>
-          <a:p>
-            <a:pPr>
-              <a:defRPr sz="1400">
-                <a:solidFill>
-                  <a:srgbClr val="C9D6E8"/>
-                </a:solidFill>
-              </a:defRPr>
-            </a:pPr>
-            <a:r>
-              <a:t>карта структурной активности управляет силой сглаживания</a:t>
-            </a:r>
-          </a:p>
-        </p:txBody>
-      </p:sp>
-      <p:pic>
-        <p:nvPicPr>
-          <p:cNvPr id="3" name="Picture 2" descr="fig_activity_map.png"/>
-          <p:cNvPicPr>
-            <a:picLocks noChangeAspect="1"/>
-          </p:cNvPicPr>
-          <p:nvPr/>
-        </p:nvPicPr>
-        <p:blipFill>
-          <a:blip r:embed="rId2"/>
-          <a:stretch>
-            <a:fillRect/>
-          </a:stretch>
-        </p:blipFill>
-        <p:spPr>
-          <a:xfrm>
-            <a:off x="1371600" y="1371600"/>
-            <a:ext cx="9418320" cy="3662680"/>
-          </a:xfrm>
-          <a:prstGeom prst="rect">
-            <a:avLst/>
-          </a:prstGeom>
-        </p:spPr>
-      </p:pic>
-      <p:sp>
-        <p:nvSpPr>
-          <p:cNvPr id="4" name="TextBox 3"/>
-          <p:cNvSpPr txBox="1"/>
-          <p:nvPr/>
-        </p:nvSpPr>
-        <p:spPr>
-          <a:xfrm>
-            <a:off x="914400" y="5212080"/>
-            <a:ext cx="10515600" cy="1463040"/>
-          </a:xfrm>
-          <a:prstGeom prst="rect">
-            <a:avLst/>
-          </a:prstGeom>
-          <a:noFill/>
-        </p:spPr>
-        <p:txBody>
-          <a:bodyPr wrap="square">
-            <a:spAutoFit/>
-          </a:bodyPr>
-          <a:lstStyle/>
-          <a:p>
-            <a:pPr>
-              <a:spcAft>
-                <a:spcPts val="800"/>
-              </a:spcAft>
-              <a:defRPr sz="1600" b="0">
-                <a:solidFill>
-                  <a:srgbClr val="444444"/>
-                </a:solidFill>
-                <a:latin typeface="Calibri"/>
-              </a:defRPr>
-            </a:pPr>
-            <a:r>
-              <a:t>Слева — зашумлённое изображение; в центре — рассчитанная карта A(p): яркие участки — контуры и мелкие детали; справа — результат: сила сглаживания распределена по карте</a:t>
-            </a:r>
-          </a:p>
-        </p:txBody>
-      </p:sp>
-    </p:spTree>
-  </p:cSld>
-  <p:clrMapOvr>
-    <a:masterClrMapping/>
-  </p:clrMapOvr>
-</p:sld>
-</file>
-
-<file path=ppt/slides/slide9.xml><?xml version="1.0" encoding="utf-8"?>
-<p:sld xmlns:a="http://schemas.openxmlformats.org/drawingml/2006/main" xmlns:p="http://schemas.openxmlformats.org/presentationml/2006/main" xmlns:r="http://schemas.openxmlformats.org/officeDocument/2006/relationships">
-  <p:cSld>
-    <p:spTree>
-      <p:nvGrpSpPr>
-        <p:cNvPr id="1" name=""/>
-        <p:cNvGrpSpPr/>
-        <p:nvPr/>
-      </p:nvGrpSpPr>
-      <p:grpSpPr/>
-      <p:sp>
-        <p:nvSpPr>
-          <p:cNvPr id="2" name="Rectangle 1"/>
-          <p:cNvSpPr/>
-          <p:nvPr/>
-        </p:nvSpPr>
-        <p:spPr>
-          <a:xfrm>
-            <a:off x="0" y="0"/>
-            <a:ext cx="12191695" cy="914400"/>
-          </a:xfrm>
-          <a:prstGeom prst="rect">
-            <a:avLst/>
-          </a:prstGeom>
-          <a:solidFill>
-            <a:srgbClr val="1F2D5C"/>
-          </a:solidFill>
-          <a:ln>
-            <a:noFill/>
-          </a:ln>
-        </p:spPr>
-        <p:style>
-          <a:lnRef idx="1">
-            <a:schemeClr val="accent1"/>
-          </a:lnRef>
-          <a:fillRef idx="3">
-            <a:schemeClr val="accent1"/>
-          </a:fillRef>
-          <a:effectRef idx="2">
-            <a:schemeClr val="accent1"/>
-          </a:effectRef>
-          <a:fontRef idx="minor">
-            <a:schemeClr val="lt1"/>
-          </a:fontRef>
-        </p:style>
-        <p:txBody>
-          <a:bodyPr rtlCol="0" anchor="ctr" lIns="457200" tIns="91440"/>
-          <a:lstStyle/>
-          <a:p>
-            <a:pPr algn="ctr">
-              <a:defRPr sz="2800" b="1">
-                <a:solidFill>
-                  <a:srgbClr val="FFFFFF"/>
-                </a:solidFill>
-                <a:latin typeface="Calibri"/>
-              </a:defRPr>
-            </a:pPr>
-            <a:r>
-              <a:t>Методика эксперимента</a:t>
-            </a:r>
-          </a:p>
-          <a:p>
-            <a:pPr>
-              <a:defRPr sz="1400">
-                <a:solidFill>
-                  <a:srgbClr val="C9D6E8"/>
-                </a:solidFill>
-              </a:defRPr>
-            </a:pPr>
-            <a:r>
-              <a:t>честное сравнение: одинаковые условия для всех методов</a:t>
-            </a:r>
-          </a:p>
-        </p:txBody>
-      </p:sp>
-      <p:sp>
-        <p:nvSpPr>
-          <p:cNvPr id="3" name="TextBox 2"/>
-          <p:cNvSpPr txBox="1"/>
-          <p:nvPr/>
-        </p:nvSpPr>
-        <p:spPr>
-          <a:xfrm>
-            <a:off x="640080" y="1143000"/>
-            <a:ext cx="5669280" cy="4937760"/>
-          </a:xfrm>
-          <a:prstGeom prst="rect">
-            <a:avLst/>
-          </a:prstGeom>
-          <a:noFill/>
-        </p:spPr>
-        <p:txBody>
-          <a:bodyPr wrap="square">
-            <a:spAutoFit/>
-          </a:bodyPr>
-          <a:lstStyle/>
-          <a:p>
-            <a:pPr>
-              <a:spcAft>
-                <a:spcPts val="800"/>
-              </a:spcAft>
-              <a:defRPr sz="1600" b="1">
-                <a:solidFill>
-                  <a:srgbClr val="444444"/>
-                </a:solidFill>
-                <a:latin typeface="Calibri"/>
-              </a:defRPr>
-            </a:pPr>
-            <a:r>
-              <a:t>3 тестовых изображения:</a:t>
-            </a:r>
-          </a:p>
-          <a:p>
-            <a:pPr>
-              <a:spcAft>
-                <a:spcPts val="800"/>
-              </a:spcAft>
-              <a:defRPr sz="1600" b="0">
-                <a:solidFill>
-                  <a:srgbClr val="444444"/>
-                </a:solidFill>
-                <a:latin typeface="Calibri"/>
-              </a:defRPr>
-            </a:pPr>
-            <a:r>
-              <a:t>• бабуин — сильная мелкая текстура;</a:t>
-            </a:r>
-          </a:p>
-          <a:p>
-            <a:pPr>
-              <a:spcAft>
-                <a:spcPts val="800"/>
-              </a:spcAft>
-              <a:defRPr sz="1600" b="0">
-                <a:solidFill>
-                  <a:srgbClr val="444444"/>
-                </a:solidFill>
-                <a:latin typeface="Calibri"/>
-              </a:defRPr>
-            </a:pPr>
-            <a:r>
-              <a:t>• плата — тонкие линии и мелкие детали;</a:t>
-            </a:r>
-          </a:p>
-          <a:p>
-            <a:pPr>
-              <a:spcAft>
-                <a:spcPts val="800"/>
-              </a:spcAft>
-              <a:defRPr sz="1600" b="0">
-                <a:solidFill>
-                  <a:srgbClr val="444444"/>
-                </a:solidFill>
-                <a:latin typeface="Calibri"/>
-              </a:defRPr>
-            </a:pPr>
-            <a:r>
-              <a:t>• фрукты — гладкие области с зерном;</a:t>
-            </a:r>
-          </a:p>
-          <a:p>
-            <a:pPr>
-              <a:spcAft>
-                <a:spcPts val="800"/>
-              </a:spcAft>
-              <a:defRPr sz="1600" b="1">
-                <a:solidFill>
-                  <a:srgbClr val="444444"/>
-                </a:solidFill>
-                <a:latin typeface="Calibri"/>
-              </a:defRPr>
-            </a:pPr>
-            <a:r>
-              <a:t>уровни шума σ = 10, 20, 25, 30, 40</a:t>
-            </a:r>
-          </a:p>
-          <a:p>
-            <a:pPr>
-              <a:spcAft>
-                <a:spcPts val="800"/>
-              </a:spcAft>
-              <a:defRPr sz="1600" b="0">
-                <a:solidFill>
-                  <a:srgbClr val="444444"/>
-                </a:solidFill>
-                <a:latin typeface="Calibri"/>
-              </a:defRPr>
-            </a:pPr>
-            <a:r>
-              <a:t>• фиксированный seed — эксперимент воспроизводим;</a:t>
-            </a:r>
-          </a:p>
-        </p:txBody>
-      </p:sp>
-      <p:sp>
-        <p:nvSpPr>
-          <p:cNvPr id="4" name="TextBox 3"/>
-          <p:cNvSpPr txBox="1"/>
-          <p:nvPr/>
-        </p:nvSpPr>
-        <p:spPr>
-          <a:xfrm>
-            <a:off x="6583680" y="1143000"/>
-            <a:ext cx="5120640" cy="4937760"/>
-          </a:xfrm>
-          <a:prstGeom prst="rect">
-            <a:avLst/>
-          </a:prstGeom>
-          <a:noFill/>
-        </p:spPr>
-        <p:txBody>
-          <a:bodyPr wrap="square">
-            <a:spAutoFit/>
-          </a:bodyPr>
-          <a:lstStyle/>
-          <a:p>
-            <a:pPr>
-              <a:spcAft>
-                <a:spcPts val="800"/>
-              </a:spcAft>
-              <a:defRPr sz="1600" b="1">
-                <a:solidFill>
-                  <a:srgbClr val="444444"/>
-                </a:solidFill>
-                <a:latin typeface="Calibri"/>
-              </a:defRPr>
-            </a:pPr>
-            <a:r>
-              <a:t>Сравниваемые методы:</a:t>
-            </a:r>
-          </a:p>
-          <a:p>
-            <a:pPr>
-              <a:spcAft>
-                <a:spcPts val="800"/>
-              </a:spcAft>
-              <a:defRPr sz="1600" b="0">
-                <a:solidFill>
-                  <a:srgbClr val="444444"/>
-                </a:solidFill>
-                <a:latin typeface="Calibri"/>
-              </a:defRPr>
-            </a:pPr>
-            <a:r>
-              <a:t>• среднее 5×5, гауссов, медианный 5×5;</a:t>
-            </a:r>
-          </a:p>
-          <a:p>
-            <a:pPr>
-              <a:spcAft>
-                <a:spcPts val="800"/>
-              </a:spcAft>
-              <a:defRPr sz="1600" b="0">
-                <a:solidFill>
-                  <a:srgbClr val="444444"/>
-                </a:solidFill>
-                <a:latin typeface="Calibri"/>
-              </a:defRPr>
-            </a:pPr>
-            <a:r>
-              <a:t>• билатеральный (универсальная настройка);</a:t>
-            </a:r>
-          </a:p>
-          <a:p>
-            <a:pPr>
-              <a:spcAft>
-                <a:spcPts val="800"/>
-              </a:spcAft>
-              <a:defRPr sz="1600" b="0">
-                <a:solidFill>
-                  <a:srgbClr val="444444"/>
-                </a:solidFill>
-                <a:latin typeface="Calibri"/>
-              </a:defRPr>
-            </a:pPr>
-            <a:r>
-              <a:t>• билатеральный «оракул» — верхняя граница: параметры подбираются под каждую задачу</a:t>
-            </a:r>
-          </a:p>
-          <a:p>
-            <a:pPr>
-              <a:spcAft>
-                <a:spcPts val="800"/>
-              </a:spcAft>
-              <a:defRPr sz="1600" b="1">
-                <a:solidFill>
-                  <a:srgbClr val="D62728"/>
-                </a:solidFill>
-                <a:latin typeface="Calibri"/>
-              </a:defRPr>
-            </a:pPr>
-            <a:r>
-              <a:t>• АКСФ — наш метод, параметры фиксированы всегда</a:t>
-            </a:r>
-          </a:p>
-          <a:p>
-            <a:pPr>
-              <a:spcAft>
-                <a:spcPts val="800"/>
-              </a:spcAft>
-              <a:defRPr sz="1600" b="0">
-                <a:solidFill>
-                  <a:srgbClr val="444444"/>
-                </a:solidFill>
-                <a:latin typeface="Calibri"/>
-              </a:defRPr>
-            </a:pPr>
-            <a:r>
-              <a:t>• метрики: PSNR, SSIM, EPI + время работы</a:t>
+              <a:t>Это не доказательство универсальности для всех видов шума; это корректная проверка внутри заранее заданного эксперимента.</a:t>
             </a:r>
           </a:p>
         </p:txBody>

--- a/docs/Презентация_Сглаживание_изображений.pptx
+++ b/docs/Презентация_Сглаживание_изображений.pptx
@@ -4739,7 +4739,7 @@
                         </a:defRPr>
                       </a:pPr>
                       <a:r>
-                        <a:t>1,0</a:t>
+                        <a:t>1,1</a:t>
                       </a:r>
                     </a:p>
                   </a:txBody>
@@ -4841,7 +4841,7 @@
                         </a:defRPr>
                       </a:pPr>
                       <a:r>
-                        <a:t>121,5</a:t>
+                        <a:t>121,1</a:t>
                       </a:r>
                     </a:p>
                   </a:txBody>
@@ -4959,7 +4959,7 @@
                         </a:defRPr>
                       </a:pPr>
                       <a:r>
-                        <a:t>123,6</a:t>
+                        <a:t>125,2</a:t>
                       </a:r>
                     </a:p>
                   </a:txBody>
@@ -5991,7 +5991,7 @@
               </a:defRPr>
             </a:pPr>
             <a:r>
-              <a:t>• На 4 реальных 512×512 сценах: 19,27 мс &lt; 30 мс.</a:t>
+              <a:t>• На 4 реальных 512×512 сценах: 19,38 мс &lt; 30 мс.</a:t>
             </a:r>
           </a:p>
         </p:txBody>
@@ -6881,7 +6881,7 @@
                         </a:defRPr>
                       </a:pPr>
                       <a:r>
-                        <a:t>55,2</a:t>
+                        <a:t>55,0</a:t>
                       </a:r>
                     </a:p>
                   </a:txBody>
@@ -6983,7 +6983,7 @@
                         </a:defRPr>
                       </a:pPr>
                       <a:r>
-                        <a:t>64,4</a:t>
+                        <a:t>64,6</a:t>
                       </a:r>
                     </a:p>
                   </a:txBody>
@@ -7187,7 +7187,7 @@
                         </a:defRPr>
                       </a:pPr>
                       <a:r>
-                        <a:t>18,3</a:t>
+                        <a:t>18,8</a:t>
                       </a:r>
                     </a:p>
                   </a:txBody>
@@ -7305,7 +7305,7 @@
                         </a:defRPr>
                       </a:pPr>
                       <a:r>
-                        <a:t>19,5</a:t>
+                        <a:t>19,9</a:t>
                       </a:r>
                     </a:p>
                   </a:txBody>
